--- a/docs/Ease Of Access.pptx
+++ b/docs/Ease Of Access.pptx
@@ -8,8 +8,8 @@
     <p:sldId id="256" r:id="rId2"/>
     <p:sldId id="257" r:id="rId3"/>
     <p:sldId id="259" r:id="rId4"/>
-    <p:sldId id="260" r:id="rId5"/>
-    <p:sldId id="261" r:id="rId6"/>
+    <p:sldId id="261" r:id="rId5"/>
+    <p:sldId id="260" r:id="rId6"/>
     <p:sldId id="262" r:id="rId7"/>
     <p:sldId id="263" r:id="rId8"/>
     <p:sldId id="264" r:id="rId9"/>
@@ -111,6 +111,11 @@
       </a:defRPr>
     </a:lvl9pPr>
   </p:defaultTextStyle>
+  <p:extLst>
+    <p:ext uri="{EFAFB233-063F-42B5-8137-9DF3F51BA10A}">
+      <p15:sldGuideLst xmlns:p15="http://schemas.microsoft.com/office/powerpoint/2012/main"/>
+    </p:ext>
+  </p:extLst>
 </p:presentation>
 </file>
 
@@ -5808,381 +5813,6 @@
 <file path=ppt/diagrams/data3.xml><?xml version="1.0" encoding="utf-8"?>
 <dgm:dataModel xmlns:dgm="http://schemas.openxmlformats.org/drawingml/2006/diagram" xmlns:a="http://schemas.openxmlformats.org/drawingml/2006/main">
   <dgm:ptLst>
-    <dgm:pt modelId="{AFA06E40-05B6-4A58-8888-F6805D97C799}" type="doc">
-      <dgm:prSet loTypeId="urn:microsoft.com/office/officeart/2005/8/layout/vProcess5" loCatId="process" qsTypeId="urn:microsoft.com/office/officeart/2005/8/quickstyle/simple1" qsCatId="simple" csTypeId="urn:microsoft.com/office/officeart/2005/8/colors/accent1_2" csCatId="accent1"/>
-      <dgm:spPr/>
-      <dgm:t>
-        <a:bodyPr/>
-        <a:lstStyle/>
-        <a:p>
-          <a:endParaRPr lang="en-US"/>
-        </a:p>
-      </dgm:t>
-    </dgm:pt>
-    <dgm:pt modelId="{6E516B96-C1FF-4BAA-9C66-D1BFF1FD662D}">
-      <dgm:prSet/>
-      <dgm:spPr/>
-      <dgm:t>
-        <a:bodyPr/>
-        <a:lstStyle/>
-        <a:p>
-          <a:r>
-            <a:rPr lang="en-GB" b="1"/>
-            <a:t>Smart diagnostics</a:t>
-          </a:r>
-          <a:endParaRPr lang="en-US"/>
-        </a:p>
-      </dgm:t>
-    </dgm:pt>
-    <dgm:pt modelId="{0AB77FBB-0A9F-45D0-817A-459A7E9B3D8D}" type="parTrans" cxnId="{90214139-4FA6-4731-A8B0-485D548537E2}">
-      <dgm:prSet/>
-      <dgm:spPr/>
-      <dgm:t>
-        <a:bodyPr/>
-        <a:lstStyle/>
-        <a:p>
-          <a:endParaRPr lang="en-US"/>
-        </a:p>
-      </dgm:t>
-    </dgm:pt>
-    <dgm:pt modelId="{02E3A216-183F-42E4-8124-17094EAC88F7}" type="sibTrans" cxnId="{90214139-4FA6-4731-A8B0-485D548537E2}">
-      <dgm:prSet/>
-      <dgm:spPr/>
-      <dgm:t>
-        <a:bodyPr/>
-        <a:lstStyle/>
-        <a:p>
-          <a:endParaRPr lang="en-US"/>
-        </a:p>
-      </dgm:t>
-    </dgm:pt>
-    <dgm:pt modelId="{143D9803-C62C-4E2A-8849-1E63D1AB7902}">
-      <dgm:prSet/>
-      <dgm:spPr/>
-      <dgm:t>
-        <a:bodyPr/>
-        <a:lstStyle/>
-        <a:p>
-          <a:r>
-            <a:rPr lang="en-GB"/>
-            <a:t>Tracks user behaviour</a:t>
-          </a:r>
-          <a:endParaRPr lang="en-US"/>
-        </a:p>
-      </dgm:t>
-    </dgm:pt>
-    <dgm:pt modelId="{97FDB433-9427-4EE5-A8CA-77C6169E5FBD}" type="parTrans" cxnId="{62F0E0C7-7689-4370-8063-51FCDB4F736D}">
-      <dgm:prSet/>
-      <dgm:spPr/>
-      <dgm:t>
-        <a:bodyPr/>
-        <a:lstStyle/>
-        <a:p>
-          <a:endParaRPr lang="en-US"/>
-        </a:p>
-      </dgm:t>
-    </dgm:pt>
-    <dgm:pt modelId="{2A82018F-9C8E-439F-AD8A-59E42816E60A}" type="sibTrans" cxnId="{62F0E0C7-7689-4370-8063-51FCDB4F736D}">
-      <dgm:prSet/>
-      <dgm:spPr/>
-      <dgm:t>
-        <a:bodyPr/>
-        <a:lstStyle/>
-        <a:p>
-          <a:endParaRPr lang="en-US"/>
-        </a:p>
-      </dgm:t>
-    </dgm:pt>
-    <dgm:pt modelId="{726C1A6F-FC3C-4357-AC79-6EF3B958A495}">
-      <dgm:prSet/>
-      <dgm:spPr/>
-      <dgm:t>
-        <a:bodyPr/>
-        <a:lstStyle/>
-        <a:p>
-          <a:r>
-            <a:rPr lang="en-GB"/>
-            <a:t>Offers correct options automatically</a:t>
-          </a:r>
-          <a:endParaRPr lang="en-US"/>
-        </a:p>
-      </dgm:t>
-    </dgm:pt>
-    <dgm:pt modelId="{E9AB789D-C74D-4DD3-A1DE-E1D7545DEE5E}" type="parTrans" cxnId="{8AB85540-EFDA-4BE5-A89A-8E46EE1536F2}">
-      <dgm:prSet/>
-      <dgm:spPr/>
-      <dgm:t>
-        <a:bodyPr/>
-        <a:lstStyle/>
-        <a:p>
-          <a:endParaRPr lang="en-US"/>
-        </a:p>
-      </dgm:t>
-    </dgm:pt>
-    <dgm:pt modelId="{CBFD414F-F12C-4918-8980-4E2C9D697315}" type="sibTrans" cxnId="{8AB85540-EFDA-4BE5-A89A-8E46EE1536F2}">
-      <dgm:prSet/>
-      <dgm:spPr/>
-      <dgm:t>
-        <a:bodyPr/>
-        <a:lstStyle/>
-        <a:p>
-          <a:endParaRPr lang="en-US"/>
-        </a:p>
-      </dgm:t>
-    </dgm:pt>
-    <dgm:pt modelId="{DA427EA4-A0BD-4D57-9B3D-966CA244AF0E}">
-      <dgm:prSet/>
-      <dgm:spPr/>
-      <dgm:t>
-        <a:bodyPr/>
-        <a:lstStyle/>
-        <a:p>
-          <a:r>
-            <a:rPr lang="en-GB"/>
-            <a:t>Reduces confusion</a:t>
-          </a:r>
-          <a:endParaRPr lang="en-US"/>
-        </a:p>
-      </dgm:t>
-    </dgm:pt>
-    <dgm:pt modelId="{1ED9C636-85C2-481F-80B3-A2847AF36443}" type="parTrans" cxnId="{A9654B09-BAED-41FB-99BD-73B94617EB81}">
-      <dgm:prSet/>
-      <dgm:spPr/>
-      <dgm:t>
-        <a:bodyPr/>
-        <a:lstStyle/>
-        <a:p>
-          <a:endParaRPr lang="en-US"/>
-        </a:p>
-      </dgm:t>
-    </dgm:pt>
-    <dgm:pt modelId="{8156E576-885C-4201-A712-0701A264784A}" type="sibTrans" cxnId="{A9654B09-BAED-41FB-99BD-73B94617EB81}">
-      <dgm:prSet/>
-      <dgm:spPr/>
-      <dgm:t>
-        <a:bodyPr/>
-        <a:lstStyle/>
-        <a:p>
-          <a:endParaRPr lang="en-US"/>
-        </a:p>
-      </dgm:t>
-    </dgm:pt>
-    <dgm:pt modelId="{96F8B810-8CFC-4B04-91F6-B0858CD0CF37}">
-      <dgm:prSet/>
-      <dgm:spPr/>
-      <dgm:t>
-        <a:bodyPr/>
-        <a:lstStyle/>
-        <a:p>
-          <a:r>
-            <a:rPr lang="en-GB"/>
-            <a:t>Adapts to user patterns over time</a:t>
-          </a:r>
-          <a:endParaRPr lang="en-US"/>
-        </a:p>
-      </dgm:t>
-    </dgm:pt>
-    <dgm:pt modelId="{39F0F134-943F-4E9B-B521-BB3BFF05300E}" type="parTrans" cxnId="{03D655F9-641E-4007-B1C8-1A192E1A27E8}">
-      <dgm:prSet/>
-      <dgm:spPr/>
-      <dgm:t>
-        <a:bodyPr/>
-        <a:lstStyle/>
-        <a:p>
-          <a:endParaRPr lang="en-US"/>
-        </a:p>
-      </dgm:t>
-    </dgm:pt>
-    <dgm:pt modelId="{3951ED3A-C731-4018-BF63-EFD48ADF0D6C}" type="sibTrans" cxnId="{03D655F9-641E-4007-B1C8-1A192E1A27E8}">
-      <dgm:prSet/>
-      <dgm:spPr/>
-      <dgm:t>
-        <a:bodyPr/>
-        <a:lstStyle/>
-        <a:p>
-          <a:endParaRPr lang="en-US"/>
-        </a:p>
-      </dgm:t>
-    </dgm:pt>
-    <dgm:pt modelId="{007CD930-5EE4-4AD9-B308-CBE994062CC2}" type="pres">
-      <dgm:prSet presAssocID="{AFA06E40-05B6-4A58-8888-F6805D97C799}" presName="outerComposite" presStyleCnt="0">
-        <dgm:presLayoutVars>
-          <dgm:chMax val="5"/>
-          <dgm:dir/>
-          <dgm:resizeHandles val="exact"/>
-        </dgm:presLayoutVars>
-      </dgm:prSet>
-      <dgm:spPr/>
-    </dgm:pt>
-    <dgm:pt modelId="{9549903E-00D6-4F12-9B83-D95EFF018961}" type="pres">
-      <dgm:prSet presAssocID="{AFA06E40-05B6-4A58-8888-F6805D97C799}" presName="dummyMaxCanvas" presStyleCnt="0">
-        <dgm:presLayoutVars/>
-      </dgm:prSet>
-      <dgm:spPr/>
-    </dgm:pt>
-    <dgm:pt modelId="{F3D9EFA8-8466-4AB8-BEF7-C5F49F946AEA}" type="pres">
-      <dgm:prSet presAssocID="{AFA06E40-05B6-4A58-8888-F6805D97C799}" presName="FiveNodes_1" presStyleLbl="node1" presStyleIdx="0" presStyleCnt="5">
-        <dgm:presLayoutVars>
-          <dgm:bulletEnabled val="1"/>
-        </dgm:presLayoutVars>
-      </dgm:prSet>
-      <dgm:spPr/>
-    </dgm:pt>
-    <dgm:pt modelId="{99F364CA-ABD3-4672-A607-FDB673856798}" type="pres">
-      <dgm:prSet presAssocID="{AFA06E40-05B6-4A58-8888-F6805D97C799}" presName="FiveNodes_2" presStyleLbl="node1" presStyleIdx="1" presStyleCnt="5">
-        <dgm:presLayoutVars>
-          <dgm:bulletEnabled val="1"/>
-        </dgm:presLayoutVars>
-      </dgm:prSet>
-      <dgm:spPr/>
-    </dgm:pt>
-    <dgm:pt modelId="{0A682BCD-AFB6-4576-92E0-79F6D0393C5F}" type="pres">
-      <dgm:prSet presAssocID="{AFA06E40-05B6-4A58-8888-F6805D97C799}" presName="FiveNodes_3" presStyleLbl="node1" presStyleIdx="2" presStyleCnt="5">
-        <dgm:presLayoutVars>
-          <dgm:bulletEnabled val="1"/>
-        </dgm:presLayoutVars>
-      </dgm:prSet>
-      <dgm:spPr/>
-    </dgm:pt>
-    <dgm:pt modelId="{81EF4838-EC31-4BC0-8FAC-4662007E087E}" type="pres">
-      <dgm:prSet presAssocID="{AFA06E40-05B6-4A58-8888-F6805D97C799}" presName="FiveNodes_4" presStyleLbl="node1" presStyleIdx="3" presStyleCnt="5">
-        <dgm:presLayoutVars>
-          <dgm:bulletEnabled val="1"/>
-        </dgm:presLayoutVars>
-      </dgm:prSet>
-      <dgm:spPr/>
-    </dgm:pt>
-    <dgm:pt modelId="{E684079E-DAFC-4B86-A4ED-F15FF67D9CB8}" type="pres">
-      <dgm:prSet presAssocID="{AFA06E40-05B6-4A58-8888-F6805D97C799}" presName="FiveNodes_5" presStyleLbl="node1" presStyleIdx="4" presStyleCnt="5">
-        <dgm:presLayoutVars>
-          <dgm:bulletEnabled val="1"/>
-        </dgm:presLayoutVars>
-      </dgm:prSet>
-      <dgm:spPr/>
-    </dgm:pt>
-    <dgm:pt modelId="{874DDB7A-FD83-43C9-968F-8348BBCA6509}" type="pres">
-      <dgm:prSet presAssocID="{AFA06E40-05B6-4A58-8888-F6805D97C799}" presName="FiveConn_1-2" presStyleLbl="fgAccFollowNode1" presStyleIdx="0" presStyleCnt="4">
-        <dgm:presLayoutVars>
-          <dgm:bulletEnabled val="1"/>
-        </dgm:presLayoutVars>
-      </dgm:prSet>
-      <dgm:spPr/>
-    </dgm:pt>
-    <dgm:pt modelId="{C3A9AD4A-4A63-4826-93F7-592791DE846D}" type="pres">
-      <dgm:prSet presAssocID="{AFA06E40-05B6-4A58-8888-F6805D97C799}" presName="FiveConn_2-3" presStyleLbl="fgAccFollowNode1" presStyleIdx="1" presStyleCnt="4">
-        <dgm:presLayoutVars>
-          <dgm:bulletEnabled val="1"/>
-        </dgm:presLayoutVars>
-      </dgm:prSet>
-      <dgm:spPr/>
-    </dgm:pt>
-    <dgm:pt modelId="{FC8814A9-5087-4FC1-98AD-8936EF459C53}" type="pres">
-      <dgm:prSet presAssocID="{AFA06E40-05B6-4A58-8888-F6805D97C799}" presName="FiveConn_3-4" presStyleLbl="fgAccFollowNode1" presStyleIdx="2" presStyleCnt="4">
-        <dgm:presLayoutVars>
-          <dgm:bulletEnabled val="1"/>
-        </dgm:presLayoutVars>
-      </dgm:prSet>
-      <dgm:spPr/>
-    </dgm:pt>
-    <dgm:pt modelId="{A8A03A5F-15D4-4DC3-9672-9F95E829AF08}" type="pres">
-      <dgm:prSet presAssocID="{AFA06E40-05B6-4A58-8888-F6805D97C799}" presName="FiveConn_4-5" presStyleLbl="fgAccFollowNode1" presStyleIdx="3" presStyleCnt="4">
-        <dgm:presLayoutVars>
-          <dgm:bulletEnabled val="1"/>
-        </dgm:presLayoutVars>
-      </dgm:prSet>
-      <dgm:spPr/>
-    </dgm:pt>
-    <dgm:pt modelId="{B6F0DF9E-889C-418F-8E14-BB664B3E38D3}" type="pres">
-      <dgm:prSet presAssocID="{AFA06E40-05B6-4A58-8888-F6805D97C799}" presName="FiveNodes_1_text" presStyleLbl="node1" presStyleIdx="4" presStyleCnt="5">
-        <dgm:presLayoutVars>
-          <dgm:bulletEnabled val="1"/>
-        </dgm:presLayoutVars>
-      </dgm:prSet>
-      <dgm:spPr/>
-    </dgm:pt>
-    <dgm:pt modelId="{B0C44F66-4221-4BB3-B944-EC96AC3AA9C9}" type="pres">
-      <dgm:prSet presAssocID="{AFA06E40-05B6-4A58-8888-F6805D97C799}" presName="FiveNodes_2_text" presStyleLbl="node1" presStyleIdx="4" presStyleCnt="5">
-        <dgm:presLayoutVars>
-          <dgm:bulletEnabled val="1"/>
-        </dgm:presLayoutVars>
-      </dgm:prSet>
-      <dgm:spPr/>
-    </dgm:pt>
-    <dgm:pt modelId="{126C9357-E122-4E99-930B-7BA2F6ACF03A}" type="pres">
-      <dgm:prSet presAssocID="{AFA06E40-05B6-4A58-8888-F6805D97C799}" presName="FiveNodes_3_text" presStyleLbl="node1" presStyleIdx="4" presStyleCnt="5">
-        <dgm:presLayoutVars>
-          <dgm:bulletEnabled val="1"/>
-        </dgm:presLayoutVars>
-      </dgm:prSet>
-      <dgm:spPr/>
-    </dgm:pt>
-    <dgm:pt modelId="{5994EB21-21EC-4FE1-B180-E900CD456DAD}" type="pres">
-      <dgm:prSet presAssocID="{AFA06E40-05B6-4A58-8888-F6805D97C799}" presName="FiveNodes_4_text" presStyleLbl="node1" presStyleIdx="4" presStyleCnt="5">
-        <dgm:presLayoutVars>
-          <dgm:bulletEnabled val="1"/>
-        </dgm:presLayoutVars>
-      </dgm:prSet>
-      <dgm:spPr/>
-    </dgm:pt>
-    <dgm:pt modelId="{B55742FB-C451-41D6-AF92-D28E0D776F15}" type="pres">
-      <dgm:prSet presAssocID="{AFA06E40-05B6-4A58-8888-F6805D97C799}" presName="FiveNodes_5_text" presStyleLbl="node1" presStyleIdx="4" presStyleCnt="5">
-        <dgm:presLayoutVars>
-          <dgm:bulletEnabled val="1"/>
-        </dgm:presLayoutVars>
-      </dgm:prSet>
-      <dgm:spPr/>
-    </dgm:pt>
-  </dgm:ptLst>
-  <dgm:cxnLst>
-    <dgm:cxn modelId="{3C575D05-452C-4FE7-918D-2A56612C1C33}" type="presOf" srcId="{02E3A216-183F-42E4-8124-17094EAC88F7}" destId="{874DDB7A-FD83-43C9-968F-8348BBCA6509}" srcOrd="0" destOrd="0" presId="urn:microsoft.com/office/officeart/2005/8/layout/vProcess5"/>
-    <dgm:cxn modelId="{A9654B09-BAED-41FB-99BD-73B94617EB81}" srcId="{AFA06E40-05B6-4A58-8888-F6805D97C799}" destId="{DA427EA4-A0BD-4D57-9B3D-966CA244AF0E}" srcOrd="3" destOrd="0" parTransId="{1ED9C636-85C2-481F-80B3-A2847AF36443}" sibTransId="{8156E576-885C-4201-A712-0701A264784A}"/>
-    <dgm:cxn modelId="{B7E16111-2943-4ED9-8307-B338ECF745EE}" type="presOf" srcId="{6E516B96-C1FF-4BAA-9C66-D1BFF1FD662D}" destId="{B6F0DF9E-889C-418F-8E14-BB664B3E38D3}" srcOrd="1" destOrd="0" presId="urn:microsoft.com/office/officeart/2005/8/layout/vProcess5"/>
-    <dgm:cxn modelId="{A6219515-26E0-464E-A0AA-4163C9AC129C}" type="presOf" srcId="{143D9803-C62C-4E2A-8849-1E63D1AB7902}" destId="{99F364CA-ABD3-4672-A607-FDB673856798}" srcOrd="0" destOrd="0" presId="urn:microsoft.com/office/officeart/2005/8/layout/vProcess5"/>
-    <dgm:cxn modelId="{0437D916-0008-4ED7-A960-85932ABE8077}" type="presOf" srcId="{96F8B810-8CFC-4B04-91F6-B0858CD0CF37}" destId="{B55742FB-C451-41D6-AF92-D28E0D776F15}" srcOrd="1" destOrd="0" presId="urn:microsoft.com/office/officeart/2005/8/layout/vProcess5"/>
-    <dgm:cxn modelId="{28B04A1D-C685-4E62-AA5D-A0ADEBCD971A}" type="presOf" srcId="{726C1A6F-FC3C-4357-AC79-6EF3B958A495}" destId="{126C9357-E122-4E99-930B-7BA2F6ACF03A}" srcOrd="1" destOrd="0" presId="urn:microsoft.com/office/officeart/2005/8/layout/vProcess5"/>
-    <dgm:cxn modelId="{90214139-4FA6-4731-A8B0-485D548537E2}" srcId="{AFA06E40-05B6-4A58-8888-F6805D97C799}" destId="{6E516B96-C1FF-4BAA-9C66-D1BFF1FD662D}" srcOrd="0" destOrd="0" parTransId="{0AB77FBB-0A9F-45D0-817A-459A7E9B3D8D}" sibTransId="{02E3A216-183F-42E4-8124-17094EAC88F7}"/>
-    <dgm:cxn modelId="{8AB85540-EFDA-4BE5-A89A-8E46EE1536F2}" srcId="{AFA06E40-05B6-4A58-8888-F6805D97C799}" destId="{726C1A6F-FC3C-4357-AC79-6EF3B958A495}" srcOrd="2" destOrd="0" parTransId="{E9AB789D-C74D-4DD3-A1DE-E1D7545DEE5E}" sibTransId="{CBFD414F-F12C-4918-8980-4E2C9D697315}"/>
-    <dgm:cxn modelId="{DB72D45F-3465-454F-A083-052721D42802}" type="presOf" srcId="{143D9803-C62C-4E2A-8849-1E63D1AB7902}" destId="{B0C44F66-4221-4BB3-B944-EC96AC3AA9C9}" srcOrd="1" destOrd="0" presId="urn:microsoft.com/office/officeart/2005/8/layout/vProcess5"/>
-    <dgm:cxn modelId="{29F1FD46-6944-4BEE-BACC-75F8ECB34DD2}" type="presOf" srcId="{726C1A6F-FC3C-4357-AC79-6EF3B958A495}" destId="{0A682BCD-AFB6-4576-92E0-79F6D0393C5F}" srcOrd="0" destOrd="0" presId="urn:microsoft.com/office/officeart/2005/8/layout/vProcess5"/>
-    <dgm:cxn modelId="{3C25A94E-0099-4B8E-85D0-D5DF0A8AF929}" type="presOf" srcId="{CBFD414F-F12C-4918-8980-4E2C9D697315}" destId="{FC8814A9-5087-4FC1-98AD-8936EF459C53}" srcOrd="0" destOrd="0" presId="urn:microsoft.com/office/officeart/2005/8/layout/vProcess5"/>
-    <dgm:cxn modelId="{C7EC3F7F-E346-4495-8D24-6BD472E89555}" type="presOf" srcId="{96F8B810-8CFC-4B04-91F6-B0858CD0CF37}" destId="{E684079E-DAFC-4B86-A4ED-F15FF67D9CB8}" srcOrd="0" destOrd="0" presId="urn:microsoft.com/office/officeart/2005/8/layout/vProcess5"/>
-    <dgm:cxn modelId="{4C9D9E8A-41B6-4B02-BA86-41BAA77945AD}" type="presOf" srcId="{AFA06E40-05B6-4A58-8888-F6805D97C799}" destId="{007CD930-5EE4-4AD9-B308-CBE994062CC2}" srcOrd="0" destOrd="0" presId="urn:microsoft.com/office/officeart/2005/8/layout/vProcess5"/>
-    <dgm:cxn modelId="{C7DB418E-825E-4A6C-9A3D-B9DF1D319697}" type="presOf" srcId="{DA427EA4-A0BD-4D57-9B3D-966CA244AF0E}" destId="{5994EB21-21EC-4FE1-B180-E900CD456DAD}" srcOrd="1" destOrd="0" presId="urn:microsoft.com/office/officeart/2005/8/layout/vProcess5"/>
-    <dgm:cxn modelId="{C6FDFBB6-4A47-48C5-A312-F35C40FC9100}" type="presOf" srcId="{8156E576-885C-4201-A712-0701A264784A}" destId="{A8A03A5F-15D4-4DC3-9672-9F95E829AF08}" srcOrd="0" destOrd="0" presId="urn:microsoft.com/office/officeart/2005/8/layout/vProcess5"/>
-    <dgm:cxn modelId="{D4ABF5C1-EC84-4CEC-87D5-8AB0235B21E0}" type="presOf" srcId="{DA427EA4-A0BD-4D57-9B3D-966CA244AF0E}" destId="{81EF4838-EC31-4BC0-8FAC-4662007E087E}" srcOrd="0" destOrd="0" presId="urn:microsoft.com/office/officeart/2005/8/layout/vProcess5"/>
-    <dgm:cxn modelId="{DB2CB8C7-53A6-412C-9B0E-3DD694489674}" type="presOf" srcId="{6E516B96-C1FF-4BAA-9C66-D1BFF1FD662D}" destId="{F3D9EFA8-8466-4AB8-BEF7-C5F49F946AEA}" srcOrd="0" destOrd="0" presId="urn:microsoft.com/office/officeart/2005/8/layout/vProcess5"/>
-    <dgm:cxn modelId="{62F0E0C7-7689-4370-8063-51FCDB4F736D}" srcId="{AFA06E40-05B6-4A58-8888-F6805D97C799}" destId="{143D9803-C62C-4E2A-8849-1E63D1AB7902}" srcOrd="1" destOrd="0" parTransId="{97FDB433-9427-4EE5-A8CA-77C6169E5FBD}" sibTransId="{2A82018F-9C8E-439F-AD8A-59E42816E60A}"/>
-    <dgm:cxn modelId="{1FDC5ECF-AD49-4B0E-A5F6-D8C63866DB82}" type="presOf" srcId="{2A82018F-9C8E-439F-AD8A-59E42816E60A}" destId="{C3A9AD4A-4A63-4826-93F7-592791DE846D}" srcOrd="0" destOrd="0" presId="urn:microsoft.com/office/officeart/2005/8/layout/vProcess5"/>
-    <dgm:cxn modelId="{03D655F9-641E-4007-B1C8-1A192E1A27E8}" srcId="{AFA06E40-05B6-4A58-8888-F6805D97C799}" destId="{96F8B810-8CFC-4B04-91F6-B0858CD0CF37}" srcOrd="4" destOrd="0" parTransId="{39F0F134-943F-4E9B-B521-BB3BFF05300E}" sibTransId="{3951ED3A-C731-4018-BF63-EFD48ADF0D6C}"/>
-    <dgm:cxn modelId="{A6F7EBC0-1B21-48FD-8D69-73F313DFB17D}" type="presParOf" srcId="{007CD930-5EE4-4AD9-B308-CBE994062CC2}" destId="{9549903E-00D6-4F12-9B83-D95EFF018961}" srcOrd="0" destOrd="0" presId="urn:microsoft.com/office/officeart/2005/8/layout/vProcess5"/>
-    <dgm:cxn modelId="{F225ACD3-881E-42D5-8825-46492F3C425C}" type="presParOf" srcId="{007CD930-5EE4-4AD9-B308-CBE994062CC2}" destId="{F3D9EFA8-8466-4AB8-BEF7-C5F49F946AEA}" srcOrd="1" destOrd="0" presId="urn:microsoft.com/office/officeart/2005/8/layout/vProcess5"/>
-    <dgm:cxn modelId="{0EC9E30F-A1B3-428C-A424-471D11ED7B1A}" type="presParOf" srcId="{007CD930-5EE4-4AD9-B308-CBE994062CC2}" destId="{99F364CA-ABD3-4672-A607-FDB673856798}" srcOrd="2" destOrd="0" presId="urn:microsoft.com/office/officeart/2005/8/layout/vProcess5"/>
-    <dgm:cxn modelId="{B59D8499-3BD3-4D58-9DE9-B21BEB48182A}" type="presParOf" srcId="{007CD930-5EE4-4AD9-B308-CBE994062CC2}" destId="{0A682BCD-AFB6-4576-92E0-79F6D0393C5F}" srcOrd="3" destOrd="0" presId="urn:microsoft.com/office/officeart/2005/8/layout/vProcess5"/>
-    <dgm:cxn modelId="{FD77AFA6-156C-4658-B503-2C0315EA22A4}" type="presParOf" srcId="{007CD930-5EE4-4AD9-B308-CBE994062CC2}" destId="{81EF4838-EC31-4BC0-8FAC-4662007E087E}" srcOrd="4" destOrd="0" presId="urn:microsoft.com/office/officeart/2005/8/layout/vProcess5"/>
-    <dgm:cxn modelId="{4121B23F-5621-4E34-8150-9DDDC0712141}" type="presParOf" srcId="{007CD930-5EE4-4AD9-B308-CBE994062CC2}" destId="{E684079E-DAFC-4B86-A4ED-F15FF67D9CB8}" srcOrd="5" destOrd="0" presId="urn:microsoft.com/office/officeart/2005/8/layout/vProcess5"/>
-    <dgm:cxn modelId="{F6FF0A57-BD4A-4FA3-B846-31A4E4A2C1F4}" type="presParOf" srcId="{007CD930-5EE4-4AD9-B308-CBE994062CC2}" destId="{874DDB7A-FD83-43C9-968F-8348BBCA6509}" srcOrd="6" destOrd="0" presId="urn:microsoft.com/office/officeart/2005/8/layout/vProcess5"/>
-    <dgm:cxn modelId="{D5DC45BD-DE09-46F8-B26A-4D9746FB81D2}" type="presParOf" srcId="{007CD930-5EE4-4AD9-B308-CBE994062CC2}" destId="{C3A9AD4A-4A63-4826-93F7-592791DE846D}" srcOrd="7" destOrd="0" presId="urn:microsoft.com/office/officeart/2005/8/layout/vProcess5"/>
-    <dgm:cxn modelId="{8E3A46AA-C099-410B-B511-3A6C471C5A95}" type="presParOf" srcId="{007CD930-5EE4-4AD9-B308-CBE994062CC2}" destId="{FC8814A9-5087-4FC1-98AD-8936EF459C53}" srcOrd="8" destOrd="0" presId="urn:microsoft.com/office/officeart/2005/8/layout/vProcess5"/>
-    <dgm:cxn modelId="{E04155F4-C030-4D0E-BE77-50224021F877}" type="presParOf" srcId="{007CD930-5EE4-4AD9-B308-CBE994062CC2}" destId="{A8A03A5F-15D4-4DC3-9672-9F95E829AF08}" srcOrd="9" destOrd="0" presId="urn:microsoft.com/office/officeart/2005/8/layout/vProcess5"/>
-    <dgm:cxn modelId="{13FF3013-D0AF-4788-BE90-952595D3A9E9}" type="presParOf" srcId="{007CD930-5EE4-4AD9-B308-CBE994062CC2}" destId="{B6F0DF9E-889C-418F-8E14-BB664B3E38D3}" srcOrd="10" destOrd="0" presId="urn:microsoft.com/office/officeart/2005/8/layout/vProcess5"/>
-    <dgm:cxn modelId="{0C8DBA1E-4A2C-4B47-BCD5-E14D0309F072}" type="presParOf" srcId="{007CD930-5EE4-4AD9-B308-CBE994062CC2}" destId="{B0C44F66-4221-4BB3-B944-EC96AC3AA9C9}" srcOrd="11" destOrd="0" presId="urn:microsoft.com/office/officeart/2005/8/layout/vProcess5"/>
-    <dgm:cxn modelId="{9ED92C0A-E0D9-4559-800D-E18606FC29C8}" type="presParOf" srcId="{007CD930-5EE4-4AD9-B308-CBE994062CC2}" destId="{126C9357-E122-4E99-930B-7BA2F6ACF03A}" srcOrd="12" destOrd="0" presId="urn:microsoft.com/office/officeart/2005/8/layout/vProcess5"/>
-    <dgm:cxn modelId="{76F21CE5-6954-4816-85F2-FF9787A0CFBA}" type="presParOf" srcId="{007CD930-5EE4-4AD9-B308-CBE994062CC2}" destId="{5994EB21-21EC-4FE1-B180-E900CD456DAD}" srcOrd="13" destOrd="0" presId="urn:microsoft.com/office/officeart/2005/8/layout/vProcess5"/>
-    <dgm:cxn modelId="{F9D06E9B-1454-44AE-ADCC-2A57E19A2869}" type="presParOf" srcId="{007CD930-5EE4-4AD9-B308-CBE994062CC2}" destId="{B55742FB-C451-41D6-AF92-D28E0D776F15}" srcOrd="14" destOrd="0" presId="urn:microsoft.com/office/officeart/2005/8/layout/vProcess5"/>
-  </dgm:cxnLst>
-  <dgm:bg/>
-  <dgm:whole/>
-  <dgm:extLst>
-    <a:ext uri="http://schemas.microsoft.com/office/drawing/2008/diagram">
-      <dsp:dataModelExt xmlns:dsp="http://schemas.microsoft.com/office/drawing/2008/diagram" relId="rId6" minVer="http://schemas.openxmlformats.org/drawingml/2006/diagram"/>
-    </a:ext>
-  </dgm:extLst>
-</dgm:dataModel>
-</file>
-
-<file path=ppt/diagrams/data4.xml><?xml version="1.0" encoding="utf-8"?>
-<dgm:dataModel xmlns:dgm="http://schemas.openxmlformats.org/drawingml/2006/diagram" xmlns:a="http://schemas.openxmlformats.org/drawingml/2006/main">
-  <dgm:ptLst>
     <dgm:pt modelId="{659B35B9-0520-4CBA-88D9-BFC3F4D1EF0A}" type="doc">
       <dgm:prSet loTypeId="urn:microsoft.com/office/officeart/2005/8/layout/cycle8" loCatId="cycle" qsTypeId="urn:microsoft.com/office/officeart/2005/8/quickstyle/simple1" qsCatId="simple" csTypeId="urn:microsoft.com/office/officeart/2005/8/colors/accent1_2" csCatId="accent1"/>
       <dgm:spPr/>
@@ -6728,6 +6358,381 @@
     <dgm:cxn modelId="{C8C76304-D0FF-4640-B167-88978C813793}" type="presParOf" srcId="{B03EF8E0-05DA-4998-93B6-54C1B935BAE6}" destId="{F8EB8BA7-F5BE-43B4-9FCD-1B70CB8AE4B4}" srcOrd="32" destOrd="0" presId="urn:microsoft.com/office/officeart/2005/8/layout/cycle8"/>
     <dgm:cxn modelId="{0FEB9369-B4A1-4B35-A9D0-CA13964EC100}" type="presParOf" srcId="{B03EF8E0-05DA-4998-93B6-54C1B935BAE6}" destId="{FBA44692-66E8-4AAF-A7B0-BE68E06E771A}" srcOrd="33" destOrd="0" presId="urn:microsoft.com/office/officeart/2005/8/layout/cycle8"/>
     <dgm:cxn modelId="{97A0722F-439D-4E42-9D1C-8F57C0E40222}" type="presParOf" srcId="{B03EF8E0-05DA-4998-93B6-54C1B935BAE6}" destId="{484852E1-501D-4F4D-B3B7-E7D7A2D64CCE}" srcOrd="34" destOrd="0" presId="urn:microsoft.com/office/officeart/2005/8/layout/cycle8"/>
+  </dgm:cxnLst>
+  <dgm:bg/>
+  <dgm:whole/>
+  <dgm:extLst>
+    <a:ext uri="http://schemas.microsoft.com/office/drawing/2008/diagram">
+      <dsp:dataModelExt xmlns:dsp="http://schemas.microsoft.com/office/drawing/2008/diagram" relId="rId6" minVer="http://schemas.openxmlformats.org/drawingml/2006/diagram"/>
+    </a:ext>
+  </dgm:extLst>
+</dgm:dataModel>
+</file>
+
+<file path=ppt/diagrams/data4.xml><?xml version="1.0" encoding="utf-8"?>
+<dgm:dataModel xmlns:dgm="http://schemas.openxmlformats.org/drawingml/2006/diagram" xmlns:a="http://schemas.openxmlformats.org/drawingml/2006/main">
+  <dgm:ptLst>
+    <dgm:pt modelId="{AFA06E40-05B6-4A58-8888-F6805D97C799}" type="doc">
+      <dgm:prSet loTypeId="urn:microsoft.com/office/officeart/2005/8/layout/vProcess5" loCatId="process" qsTypeId="urn:microsoft.com/office/officeart/2005/8/quickstyle/simple1" qsCatId="simple" csTypeId="urn:microsoft.com/office/officeart/2005/8/colors/accent1_2" csCatId="accent1"/>
+      <dgm:spPr/>
+      <dgm:t>
+        <a:bodyPr/>
+        <a:lstStyle/>
+        <a:p>
+          <a:endParaRPr lang="en-US"/>
+        </a:p>
+      </dgm:t>
+    </dgm:pt>
+    <dgm:pt modelId="{6E516B96-C1FF-4BAA-9C66-D1BFF1FD662D}">
+      <dgm:prSet/>
+      <dgm:spPr/>
+      <dgm:t>
+        <a:bodyPr/>
+        <a:lstStyle/>
+        <a:p>
+          <a:r>
+            <a:rPr lang="en-GB" b="1"/>
+            <a:t>Smart diagnostics</a:t>
+          </a:r>
+          <a:endParaRPr lang="en-US"/>
+        </a:p>
+      </dgm:t>
+    </dgm:pt>
+    <dgm:pt modelId="{0AB77FBB-0A9F-45D0-817A-459A7E9B3D8D}" type="parTrans" cxnId="{90214139-4FA6-4731-A8B0-485D548537E2}">
+      <dgm:prSet/>
+      <dgm:spPr/>
+      <dgm:t>
+        <a:bodyPr/>
+        <a:lstStyle/>
+        <a:p>
+          <a:endParaRPr lang="en-US"/>
+        </a:p>
+      </dgm:t>
+    </dgm:pt>
+    <dgm:pt modelId="{02E3A216-183F-42E4-8124-17094EAC88F7}" type="sibTrans" cxnId="{90214139-4FA6-4731-A8B0-485D548537E2}">
+      <dgm:prSet/>
+      <dgm:spPr/>
+      <dgm:t>
+        <a:bodyPr/>
+        <a:lstStyle/>
+        <a:p>
+          <a:endParaRPr lang="en-US"/>
+        </a:p>
+      </dgm:t>
+    </dgm:pt>
+    <dgm:pt modelId="{143D9803-C62C-4E2A-8849-1E63D1AB7902}">
+      <dgm:prSet/>
+      <dgm:spPr/>
+      <dgm:t>
+        <a:bodyPr/>
+        <a:lstStyle/>
+        <a:p>
+          <a:r>
+            <a:rPr lang="en-GB"/>
+            <a:t>Tracks user behaviour</a:t>
+          </a:r>
+          <a:endParaRPr lang="en-US"/>
+        </a:p>
+      </dgm:t>
+    </dgm:pt>
+    <dgm:pt modelId="{97FDB433-9427-4EE5-A8CA-77C6169E5FBD}" type="parTrans" cxnId="{62F0E0C7-7689-4370-8063-51FCDB4F736D}">
+      <dgm:prSet/>
+      <dgm:spPr/>
+      <dgm:t>
+        <a:bodyPr/>
+        <a:lstStyle/>
+        <a:p>
+          <a:endParaRPr lang="en-US"/>
+        </a:p>
+      </dgm:t>
+    </dgm:pt>
+    <dgm:pt modelId="{2A82018F-9C8E-439F-AD8A-59E42816E60A}" type="sibTrans" cxnId="{62F0E0C7-7689-4370-8063-51FCDB4F736D}">
+      <dgm:prSet/>
+      <dgm:spPr/>
+      <dgm:t>
+        <a:bodyPr/>
+        <a:lstStyle/>
+        <a:p>
+          <a:endParaRPr lang="en-US"/>
+        </a:p>
+      </dgm:t>
+    </dgm:pt>
+    <dgm:pt modelId="{726C1A6F-FC3C-4357-AC79-6EF3B958A495}">
+      <dgm:prSet/>
+      <dgm:spPr/>
+      <dgm:t>
+        <a:bodyPr/>
+        <a:lstStyle/>
+        <a:p>
+          <a:r>
+            <a:rPr lang="en-GB"/>
+            <a:t>Offers correct options automatically</a:t>
+          </a:r>
+          <a:endParaRPr lang="en-US"/>
+        </a:p>
+      </dgm:t>
+    </dgm:pt>
+    <dgm:pt modelId="{E9AB789D-C74D-4DD3-A1DE-E1D7545DEE5E}" type="parTrans" cxnId="{8AB85540-EFDA-4BE5-A89A-8E46EE1536F2}">
+      <dgm:prSet/>
+      <dgm:spPr/>
+      <dgm:t>
+        <a:bodyPr/>
+        <a:lstStyle/>
+        <a:p>
+          <a:endParaRPr lang="en-US"/>
+        </a:p>
+      </dgm:t>
+    </dgm:pt>
+    <dgm:pt modelId="{CBFD414F-F12C-4918-8980-4E2C9D697315}" type="sibTrans" cxnId="{8AB85540-EFDA-4BE5-A89A-8E46EE1536F2}">
+      <dgm:prSet/>
+      <dgm:spPr/>
+      <dgm:t>
+        <a:bodyPr/>
+        <a:lstStyle/>
+        <a:p>
+          <a:endParaRPr lang="en-US"/>
+        </a:p>
+      </dgm:t>
+    </dgm:pt>
+    <dgm:pt modelId="{DA427EA4-A0BD-4D57-9B3D-966CA244AF0E}">
+      <dgm:prSet/>
+      <dgm:spPr/>
+      <dgm:t>
+        <a:bodyPr/>
+        <a:lstStyle/>
+        <a:p>
+          <a:r>
+            <a:rPr lang="en-GB"/>
+            <a:t>Reduces confusion</a:t>
+          </a:r>
+          <a:endParaRPr lang="en-US"/>
+        </a:p>
+      </dgm:t>
+    </dgm:pt>
+    <dgm:pt modelId="{1ED9C636-85C2-481F-80B3-A2847AF36443}" type="parTrans" cxnId="{A9654B09-BAED-41FB-99BD-73B94617EB81}">
+      <dgm:prSet/>
+      <dgm:spPr/>
+      <dgm:t>
+        <a:bodyPr/>
+        <a:lstStyle/>
+        <a:p>
+          <a:endParaRPr lang="en-US"/>
+        </a:p>
+      </dgm:t>
+    </dgm:pt>
+    <dgm:pt modelId="{8156E576-885C-4201-A712-0701A264784A}" type="sibTrans" cxnId="{A9654B09-BAED-41FB-99BD-73B94617EB81}">
+      <dgm:prSet/>
+      <dgm:spPr/>
+      <dgm:t>
+        <a:bodyPr/>
+        <a:lstStyle/>
+        <a:p>
+          <a:endParaRPr lang="en-US"/>
+        </a:p>
+      </dgm:t>
+    </dgm:pt>
+    <dgm:pt modelId="{96F8B810-8CFC-4B04-91F6-B0858CD0CF37}">
+      <dgm:prSet/>
+      <dgm:spPr/>
+      <dgm:t>
+        <a:bodyPr/>
+        <a:lstStyle/>
+        <a:p>
+          <a:r>
+            <a:rPr lang="en-GB"/>
+            <a:t>Adapts to user patterns over time</a:t>
+          </a:r>
+          <a:endParaRPr lang="en-US"/>
+        </a:p>
+      </dgm:t>
+    </dgm:pt>
+    <dgm:pt modelId="{39F0F134-943F-4E9B-B521-BB3BFF05300E}" type="parTrans" cxnId="{03D655F9-641E-4007-B1C8-1A192E1A27E8}">
+      <dgm:prSet/>
+      <dgm:spPr/>
+      <dgm:t>
+        <a:bodyPr/>
+        <a:lstStyle/>
+        <a:p>
+          <a:endParaRPr lang="en-US"/>
+        </a:p>
+      </dgm:t>
+    </dgm:pt>
+    <dgm:pt modelId="{3951ED3A-C731-4018-BF63-EFD48ADF0D6C}" type="sibTrans" cxnId="{03D655F9-641E-4007-B1C8-1A192E1A27E8}">
+      <dgm:prSet/>
+      <dgm:spPr/>
+      <dgm:t>
+        <a:bodyPr/>
+        <a:lstStyle/>
+        <a:p>
+          <a:endParaRPr lang="en-US"/>
+        </a:p>
+      </dgm:t>
+    </dgm:pt>
+    <dgm:pt modelId="{007CD930-5EE4-4AD9-B308-CBE994062CC2}" type="pres">
+      <dgm:prSet presAssocID="{AFA06E40-05B6-4A58-8888-F6805D97C799}" presName="outerComposite" presStyleCnt="0">
+        <dgm:presLayoutVars>
+          <dgm:chMax val="5"/>
+          <dgm:dir/>
+          <dgm:resizeHandles val="exact"/>
+        </dgm:presLayoutVars>
+      </dgm:prSet>
+      <dgm:spPr/>
+    </dgm:pt>
+    <dgm:pt modelId="{9549903E-00D6-4F12-9B83-D95EFF018961}" type="pres">
+      <dgm:prSet presAssocID="{AFA06E40-05B6-4A58-8888-F6805D97C799}" presName="dummyMaxCanvas" presStyleCnt="0">
+        <dgm:presLayoutVars/>
+      </dgm:prSet>
+      <dgm:spPr/>
+    </dgm:pt>
+    <dgm:pt modelId="{F3D9EFA8-8466-4AB8-BEF7-C5F49F946AEA}" type="pres">
+      <dgm:prSet presAssocID="{AFA06E40-05B6-4A58-8888-F6805D97C799}" presName="FiveNodes_1" presStyleLbl="node1" presStyleIdx="0" presStyleCnt="5">
+        <dgm:presLayoutVars>
+          <dgm:bulletEnabled val="1"/>
+        </dgm:presLayoutVars>
+      </dgm:prSet>
+      <dgm:spPr/>
+    </dgm:pt>
+    <dgm:pt modelId="{99F364CA-ABD3-4672-A607-FDB673856798}" type="pres">
+      <dgm:prSet presAssocID="{AFA06E40-05B6-4A58-8888-F6805D97C799}" presName="FiveNodes_2" presStyleLbl="node1" presStyleIdx="1" presStyleCnt="5">
+        <dgm:presLayoutVars>
+          <dgm:bulletEnabled val="1"/>
+        </dgm:presLayoutVars>
+      </dgm:prSet>
+      <dgm:spPr/>
+    </dgm:pt>
+    <dgm:pt modelId="{0A682BCD-AFB6-4576-92E0-79F6D0393C5F}" type="pres">
+      <dgm:prSet presAssocID="{AFA06E40-05B6-4A58-8888-F6805D97C799}" presName="FiveNodes_3" presStyleLbl="node1" presStyleIdx="2" presStyleCnt="5">
+        <dgm:presLayoutVars>
+          <dgm:bulletEnabled val="1"/>
+        </dgm:presLayoutVars>
+      </dgm:prSet>
+      <dgm:spPr/>
+    </dgm:pt>
+    <dgm:pt modelId="{81EF4838-EC31-4BC0-8FAC-4662007E087E}" type="pres">
+      <dgm:prSet presAssocID="{AFA06E40-05B6-4A58-8888-F6805D97C799}" presName="FiveNodes_4" presStyleLbl="node1" presStyleIdx="3" presStyleCnt="5">
+        <dgm:presLayoutVars>
+          <dgm:bulletEnabled val="1"/>
+        </dgm:presLayoutVars>
+      </dgm:prSet>
+      <dgm:spPr/>
+    </dgm:pt>
+    <dgm:pt modelId="{E684079E-DAFC-4B86-A4ED-F15FF67D9CB8}" type="pres">
+      <dgm:prSet presAssocID="{AFA06E40-05B6-4A58-8888-F6805D97C799}" presName="FiveNodes_5" presStyleLbl="node1" presStyleIdx="4" presStyleCnt="5">
+        <dgm:presLayoutVars>
+          <dgm:bulletEnabled val="1"/>
+        </dgm:presLayoutVars>
+      </dgm:prSet>
+      <dgm:spPr/>
+    </dgm:pt>
+    <dgm:pt modelId="{874DDB7A-FD83-43C9-968F-8348BBCA6509}" type="pres">
+      <dgm:prSet presAssocID="{AFA06E40-05B6-4A58-8888-F6805D97C799}" presName="FiveConn_1-2" presStyleLbl="fgAccFollowNode1" presStyleIdx="0" presStyleCnt="4">
+        <dgm:presLayoutVars>
+          <dgm:bulletEnabled val="1"/>
+        </dgm:presLayoutVars>
+      </dgm:prSet>
+      <dgm:spPr/>
+    </dgm:pt>
+    <dgm:pt modelId="{C3A9AD4A-4A63-4826-93F7-592791DE846D}" type="pres">
+      <dgm:prSet presAssocID="{AFA06E40-05B6-4A58-8888-F6805D97C799}" presName="FiveConn_2-3" presStyleLbl="fgAccFollowNode1" presStyleIdx="1" presStyleCnt="4">
+        <dgm:presLayoutVars>
+          <dgm:bulletEnabled val="1"/>
+        </dgm:presLayoutVars>
+      </dgm:prSet>
+      <dgm:spPr/>
+    </dgm:pt>
+    <dgm:pt modelId="{FC8814A9-5087-4FC1-98AD-8936EF459C53}" type="pres">
+      <dgm:prSet presAssocID="{AFA06E40-05B6-4A58-8888-F6805D97C799}" presName="FiveConn_3-4" presStyleLbl="fgAccFollowNode1" presStyleIdx="2" presStyleCnt="4">
+        <dgm:presLayoutVars>
+          <dgm:bulletEnabled val="1"/>
+        </dgm:presLayoutVars>
+      </dgm:prSet>
+      <dgm:spPr/>
+    </dgm:pt>
+    <dgm:pt modelId="{A8A03A5F-15D4-4DC3-9672-9F95E829AF08}" type="pres">
+      <dgm:prSet presAssocID="{AFA06E40-05B6-4A58-8888-F6805D97C799}" presName="FiveConn_4-5" presStyleLbl="fgAccFollowNode1" presStyleIdx="3" presStyleCnt="4">
+        <dgm:presLayoutVars>
+          <dgm:bulletEnabled val="1"/>
+        </dgm:presLayoutVars>
+      </dgm:prSet>
+      <dgm:spPr/>
+    </dgm:pt>
+    <dgm:pt modelId="{B6F0DF9E-889C-418F-8E14-BB664B3E38D3}" type="pres">
+      <dgm:prSet presAssocID="{AFA06E40-05B6-4A58-8888-F6805D97C799}" presName="FiveNodes_1_text" presStyleLbl="node1" presStyleIdx="4" presStyleCnt="5">
+        <dgm:presLayoutVars>
+          <dgm:bulletEnabled val="1"/>
+        </dgm:presLayoutVars>
+      </dgm:prSet>
+      <dgm:spPr/>
+    </dgm:pt>
+    <dgm:pt modelId="{B0C44F66-4221-4BB3-B944-EC96AC3AA9C9}" type="pres">
+      <dgm:prSet presAssocID="{AFA06E40-05B6-4A58-8888-F6805D97C799}" presName="FiveNodes_2_text" presStyleLbl="node1" presStyleIdx="4" presStyleCnt="5">
+        <dgm:presLayoutVars>
+          <dgm:bulletEnabled val="1"/>
+        </dgm:presLayoutVars>
+      </dgm:prSet>
+      <dgm:spPr/>
+    </dgm:pt>
+    <dgm:pt modelId="{126C9357-E122-4E99-930B-7BA2F6ACF03A}" type="pres">
+      <dgm:prSet presAssocID="{AFA06E40-05B6-4A58-8888-F6805D97C799}" presName="FiveNodes_3_text" presStyleLbl="node1" presStyleIdx="4" presStyleCnt="5">
+        <dgm:presLayoutVars>
+          <dgm:bulletEnabled val="1"/>
+        </dgm:presLayoutVars>
+      </dgm:prSet>
+      <dgm:spPr/>
+    </dgm:pt>
+    <dgm:pt modelId="{5994EB21-21EC-4FE1-B180-E900CD456DAD}" type="pres">
+      <dgm:prSet presAssocID="{AFA06E40-05B6-4A58-8888-F6805D97C799}" presName="FiveNodes_4_text" presStyleLbl="node1" presStyleIdx="4" presStyleCnt="5">
+        <dgm:presLayoutVars>
+          <dgm:bulletEnabled val="1"/>
+        </dgm:presLayoutVars>
+      </dgm:prSet>
+      <dgm:spPr/>
+    </dgm:pt>
+    <dgm:pt modelId="{B55742FB-C451-41D6-AF92-D28E0D776F15}" type="pres">
+      <dgm:prSet presAssocID="{AFA06E40-05B6-4A58-8888-F6805D97C799}" presName="FiveNodes_5_text" presStyleLbl="node1" presStyleIdx="4" presStyleCnt="5">
+        <dgm:presLayoutVars>
+          <dgm:bulletEnabled val="1"/>
+        </dgm:presLayoutVars>
+      </dgm:prSet>
+      <dgm:spPr/>
+    </dgm:pt>
+  </dgm:ptLst>
+  <dgm:cxnLst>
+    <dgm:cxn modelId="{3C575D05-452C-4FE7-918D-2A56612C1C33}" type="presOf" srcId="{02E3A216-183F-42E4-8124-17094EAC88F7}" destId="{874DDB7A-FD83-43C9-968F-8348BBCA6509}" srcOrd="0" destOrd="0" presId="urn:microsoft.com/office/officeart/2005/8/layout/vProcess5"/>
+    <dgm:cxn modelId="{A9654B09-BAED-41FB-99BD-73B94617EB81}" srcId="{AFA06E40-05B6-4A58-8888-F6805D97C799}" destId="{DA427EA4-A0BD-4D57-9B3D-966CA244AF0E}" srcOrd="3" destOrd="0" parTransId="{1ED9C636-85C2-481F-80B3-A2847AF36443}" sibTransId="{8156E576-885C-4201-A712-0701A264784A}"/>
+    <dgm:cxn modelId="{B7E16111-2943-4ED9-8307-B338ECF745EE}" type="presOf" srcId="{6E516B96-C1FF-4BAA-9C66-D1BFF1FD662D}" destId="{B6F0DF9E-889C-418F-8E14-BB664B3E38D3}" srcOrd="1" destOrd="0" presId="urn:microsoft.com/office/officeart/2005/8/layout/vProcess5"/>
+    <dgm:cxn modelId="{A6219515-26E0-464E-A0AA-4163C9AC129C}" type="presOf" srcId="{143D9803-C62C-4E2A-8849-1E63D1AB7902}" destId="{99F364CA-ABD3-4672-A607-FDB673856798}" srcOrd="0" destOrd="0" presId="urn:microsoft.com/office/officeart/2005/8/layout/vProcess5"/>
+    <dgm:cxn modelId="{0437D916-0008-4ED7-A960-85932ABE8077}" type="presOf" srcId="{96F8B810-8CFC-4B04-91F6-B0858CD0CF37}" destId="{B55742FB-C451-41D6-AF92-D28E0D776F15}" srcOrd="1" destOrd="0" presId="urn:microsoft.com/office/officeart/2005/8/layout/vProcess5"/>
+    <dgm:cxn modelId="{28B04A1D-C685-4E62-AA5D-A0ADEBCD971A}" type="presOf" srcId="{726C1A6F-FC3C-4357-AC79-6EF3B958A495}" destId="{126C9357-E122-4E99-930B-7BA2F6ACF03A}" srcOrd="1" destOrd="0" presId="urn:microsoft.com/office/officeart/2005/8/layout/vProcess5"/>
+    <dgm:cxn modelId="{90214139-4FA6-4731-A8B0-485D548537E2}" srcId="{AFA06E40-05B6-4A58-8888-F6805D97C799}" destId="{6E516B96-C1FF-4BAA-9C66-D1BFF1FD662D}" srcOrd="0" destOrd="0" parTransId="{0AB77FBB-0A9F-45D0-817A-459A7E9B3D8D}" sibTransId="{02E3A216-183F-42E4-8124-17094EAC88F7}"/>
+    <dgm:cxn modelId="{8AB85540-EFDA-4BE5-A89A-8E46EE1536F2}" srcId="{AFA06E40-05B6-4A58-8888-F6805D97C799}" destId="{726C1A6F-FC3C-4357-AC79-6EF3B958A495}" srcOrd="2" destOrd="0" parTransId="{E9AB789D-C74D-4DD3-A1DE-E1D7545DEE5E}" sibTransId="{CBFD414F-F12C-4918-8980-4E2C9D697315}"/>
+    <dgm:cxn modelId="{DB72D45F-3465-454F-A083-052721D42802}" type="presOf" srcId="{143D9803-C62C-4E2A-8849-1E63D1AB7902}" destId="{B0C44F66-4221-4BB3-B944-EC96AC3AA9C9}" srcOrd="1" destOrd="0" presId="urn:microsoft.com/office/officeart/2005/8/layout/vProcess5"/>
+    <dgm:cxn modelId="{29F1FD46-6944-4BEE-BACC-75F8ECB34DD2}" type="presOf" srcId="{726C1A6F-FC3C-4357-AC79-6EF3B958A495}" destId="{0A682BCD-AFB6-4576-92E0-79F6D0393C5F}" srcOrd="0" destOrd="0" presId="urn:microsoft.com/office/officeart/2005/8/layout/vProcess5"/>
+    <dgm:cxn modelId="{3C25A94E-0099-4B8E-85D0-D5DF0A8AF929}" type="presOf" srcId="{CBFD414F-F12C-4918-8980-4E2C9D697315}" destId="{FC8814A9-5087-4FC1-98AD-8936EF459C53}" srcOrd="0" destOrd="0" presId="urn:microsoft.com/office/officeart/2005/8/layout/vProcess5"/>
+    <dgm:cxn modelId="{C7EC3F7F-E346-4495-8D24-6BD472E89555}" type="presOf" srcId="{96F8B810-8CFC-4B04-91F6-B0858CD0CF37}" destId="{E684079E-DAFC-4B86-A4ED-F15FF67D9CB8}" srcOrd="0" destOrd="0" presId="urn:microsoft.com/office/officeart/2005/8/layout/vProcess5"/>
+    <dgm:cxn modelId="{4C9D9E8A-41B6-4B02-BA86-41BAA77945AD}" type="presOf" srcId="{AFA06E40-05B6-4A58-8888-F6805D97C799}" destId="{007CD930-5EE4-4AD9-B308-CBE994062CC2}" srcOrd="0" destOrd="0" presId="urn:microsoft.com/office/officeart/2005/8/layout/vProcess5"/>
+    <dgm:cxn modelId="{C7DB418E-825E-4A6C-9A3D-B9DF1D319697}" type="presOf" srcId="{DA427EA4-A0BD-4D57-9B3D-966CA244AF0E}" destId="{5994EB21-21EC-4FE1-B180-E900CD456DAD}" srcOrd="1" destOrd="0" presId="urn:microsoft.com/office/officeart/2005/8/layout/vProcess5"/>
+    <dgm:cxn modelId="{C6FDFBB6-4A47-48C5-A312-F35C40FC9100}" type="presOf" srcId="{8156E576-885C-4201-A712-0701A264784A}" destId="{A8A03A5F-15D4-4DC3-9672-9F95E829AF08}" srcOrd="0" destOrd="0" presId="urn:microsoft.com/office/officeart/2005/8/layout/vProcess5"/>
+    <dgm:cxn modelId="{D4ABF5C1-EC84-4CEC-87D5-8AB0235B21E0}" type="presOf" srcId="{DA427EA4-A0BD-4D57-9B3D-966CA244AF0E}" destId="{81EF4838-EC31-4BC0-8FAC-4662007E087E}" srcOrd="0" destOrd="0" presId="urn:microsoft.com/office/officeart/2005/8/layout/vProcess5"/>
+    <dgm:cxn modelId="{DB2CB8C7-53A6-412C-9B0E-3DD694489674}" type="presOf" srcId="{6E516B96-C1FF-4BAA-9C66-D1BFF1FD662D}" destId="{F3D9EFA8-8466-4AB8-BEF7-C5F49F946AEA}" srcOrd="0" destOrd="0" presId="urn:microsoft.com/office/officeart/2005/8/layout/vProcess5"/>
+    <dgm:cxn modelId="{62F0E0C7-7689-4370-8063-51FCDB4F736D}" srcId="{AFA06E40-05B6-4A58-8888-F6805D97C799}" destId="{143D9803-C62C-4E2A-8849-1E63D1AB7902}" srcOrd="1" destOrd="0" parTransId="{97FDB433-9427-4EE5-A8CA-77C6169E5FBD}" sibTransId="{2A82018F-9C8E-439F-AD8A-59E42816E60A}"/>
+    <dgm:cxn modelId="{1FDC5ECF-AD49-4B0E-A5F6-D8C63866DB82}" type="presOf" srcId="{2A82018F-9C8E-439F-AD8A-59E42816E60A}" destId="{C3A9AD4A-4A63-4826-93F7-592791DE846D}" srcOrd="0" destOrd="0" presId="urn:microsoft.com/office/officeart/2005/8/layout/vProcess5"/>
+    <dgm:cxn modelId="{03D655F9-641E-4007-B1C8-1A192E1A27E8}" srcId="{AFA06E40-05B6-4A58-8888-F6805D97C799}" destId="{96F8B810-8CFC-4B04-91F6-B0858CD0CF37}" srcOrd="4" destOrd="0" parTransId="{39F0F134-943F-4E9B-B521-BB3BFF05300E}" sibTransId="{3951ED3A-C731-4018-BF63-EFD48ADF0D6C}"/>
+    <dgm:cxn modelId="{A6F7EBC0-1B21-48FD-8D69-73F313DFB17D}" type="presParOf" srcId="{007CD930-5EE4-4AD9-B308-CBE994062CC2}" destId="{9549903E-00D6-4F12-9B83-D95EFF018961}" srcOrd="0" destOrd="0" presId="urn:microsoft.com/office/officeart/2005/8/layout/vProcess5"/>
+    <dgm:cxn modelId="{F225ACD3-881E-42D5-8825-46492F3C425C}" type="presParOf" srcId="{007CD930-5EE4-4AD9-B308-CBE994062CC2}" destId="{F3D9EFA8-8466-4AB8-BEF7-C5F49F946AEA}" srcOrd="1" destOrd="0" presId="urn:microsoft.com/office/officeart/2005/8/layout/vProcess5"/>
+    <dgm:cxn modelId="{0EC9E30F-A1B3-428C-A424-471D11ED7B1A}" type="presParOf" srcId="{007CD930-5EE4-4AD9-B308-CBE994062CC2}" destId="{99F364CA-ABD3-4672-A607-FDB673856798}" srcOrd="2" destOrd="0" presId="urn:microsoft.com/office/officeart/2005/8/layout/vProcess5"/>
+    <dgm:cxn modelId="{B59D8499-3BD3-4D58-9DE9-B21BEB48182A}" type="presParOf" srcId="{007CD930-5EE4-4AD9-B308-CBE994062CC2}" destId="{0A682BCD-AFB6-4576-92E0-79F6D0393C5F}" srcOrd="3" destOrd="0" presId="urn:microsoft.com/office/officeart/2005/8/layout/vProcess5"/>
+    <dgm:cxn modelId="{FD77AFA6-156C-4658-B503-2C0315EA22A4}" type="presParOf" srcId="{007CD930-5EE4-4AD9-B308-CBE994062CC2}" destId="{81EF4838-EC31-4BC0-8FAC-4662007E087E}" srcOrd="4" destOrd="0" presId="urn:microsoft.com/office/officeart/2005/8/layout/vProcess5"/>
+    <dgm:cxn modelId="{4121B23F-5621-4E34-8150-9DDDC0712141}" type="presParOf" srcId="{007CD930-5EE4-4AD9-B308-CBE994062CC2}" destId="{E684079E-DAFC-4B86-A4ED-F15FF67D9CB8}" srcOrd="5" destOrd="0" presId="urn:microsoft.com/office/officeart/2005/8/layout/vProcess5"/>
+    <dgm:cxn modelId="{F6FF0A57-BD4A-4FA3-B846-31A4E4A2C1F4}" type="presParOf" srcId="{007CD930-5EE4-4AD9-B308-CBE994062CC2}" destId="{874DDB7A-FD83-43C9-968F-8348BBCA6509}" srcOrd="6" destOrd="0" presId="urn:microsoft.com/office/officeart/2005/8/layout/vProcess5"/>
+    <dgm:cxn modelId="{D5DC45BD-DE09-46F8-B26A-4D9746FB81D2}" type="presParOf" srcId="{007CD930-5EE4-4AD9-B308-CBE994062CC2}" destId="{C3A9AD4A-4A63-4826-93F7-592791DE846D}" srcOrd="7" destOrd="0" presId="urn:microsoft.com/office/officeart/2005/8/layout/vProcess5"/>
+    <dgm:cxn modelId="{8E3A46AA-C099-410B-B511-3A6C471C5A95}" type="presParOf" srcId="{007CD930-5EE4-4AD9-B308-CBE994062CC2}" destId="{FC8814A9-5087-4FC1-98AD-8936EF459C53}" srcOrd="8" destOrd="0" presId="urn:microsoft.com/office/officeart/2005/8/layout/vProcess5"/>
+    <dgm:cxn modelId="{E04155F4-C030-4D0E-BE77-50224021F877}" type="presParOf" srcId="{007CD930-5EE4-4AD9-B308-CBE994062CC2}" destId="{A8A03A5F-15D4-4DC3-9672-9F95E829AF08}" srcOrd="9" destOrd="0" presId="urn:microsoft.com/office/officeart/2005/8/layout/vProcess5"/>
+    <dgm:cxn modelId="{13FF3013-D0AF-4788-BE90-952595D3A9E9}" type="presParOf" srcId="{007CD930-5EE4-4AD9-B308-CBE994062CC2}" destId="{B6F0DF9E-889C-418F-8E14-BB664B3E38D3}" srcOrd="10" destOrd="0" presId="urn:microsoft.com/office/officeart/2005/8/layout/vProcess5"/>
+    <dgm:cxn modelId="{0C8DBA1E-4A2C-4B47-BCD5-E14D0309F072}" type="presParOf" srcId="{007CD930-5EE4-4AD9-B308-CBE994062CC2}" destId="{B0C44F66-4221-4BB3-B944-EC96AC3AA9C9}" srcOrd="11" destOrd="0" presId="urn:microsoft.com/office/officeart/2005/8/layout/vProcess5"/>
+    <dgm:cxn modelId="{9ED92C0A-E0D9-4559-800D-E18606FC29C8}" type="presParOf" srcId="{007CD930-5EE4-4AD9-B308-CBE994062CC2}" destId="{126C9357-E122-4E99-930B-7BA2F6ACF03A}" srcOrd="12" destOrd="0" presId="urn:microsoft.com/office/officeart/2005/8/layout/vProcess5"/>
+    <dgm:cxn modelId="{76F21CE5-6954-4816-85F2-FF9787A0CFBA}" type="presParOf" srcId="{007CD930-5EE4-4AD9-B308-CBE994062CC2}" destId="{5994EB21-21EC-4FE1-B180-E900CD456DAD}" srcOrd="13" destOrd="0" presId="urn:microsoft.com/office/officeart/2005/8/layout/vProcess5"/>
+    <dgm:cxn modelId="{F9D06E9B-1454-44AE-ADCC-2A57E19A2869}" type="presParOf" srcId="{007CD930-5EE4-4AD9-B308-CBE994062CC2}" destId="{B55742FB-C451-41D6-AF92-D28E0D776F15}" srcOrd="14" destOrd="0" presId="urn:microsoft.com/office/officeart/2005/8/layout/vProcess5"/>
   </dgm:cxnLst>
   <dgm:bg/>
   <dgm:whole/>
@@ -9858,743 +9863,6 @@
       <dsp:cNvGrpSpPr/>
     </dsp:nvGrpSpPr>
     <dsp:grpSpPr/>
-    <dsp:sp modelId="{F3D9EFA8-8466-4AB8-BEF7-C5F49F946AEA}">
-      <dsp:nvSpPr>
-        <dsp:cNvPr id="0" name=""/>
-        <dsp:cNvSpPr/>
-      </dsp:nvSpPr>
-      <dsp:spPr>
-        <a:xfrm>
-          <a:off x="0" y="0"/>
-          <a:ext cx="4107331" cy="678570"/>
-        </a:xfrm>
-        <a:prstGeom prst="roundRect">
-          <a:avLst>
-            <a:gd name="adj" fmla="val 10000"/>
-          </a:avLst>
-        </a:prstGeom>
-        <a:solidFill>
-          <a:schemeClr val="accent1">
-            <a:hueOff val="0"/>
-            <a:satOff val="0"/>
-            <a:lumOff val="0"/>
-            <a:alphaOff val="0"/>
-          </a:schemeClr>
-        </a:solidFill>
-        <a:ln w="19050" cap="flat" cmpd="sng" algn="ctr">
-          <a:solidFill>
-            <a:schemeClr val="lt1">
-              <a:hueOff val="0"/>
-              <a:satOff val="0"/>
-              <a:lumOff val="0"/>
-              <a:alphaOff val="0"/>
-            </a:schemeClr>
-          </a:solidFill>
-          <a:prstDash val="solid"/>
-          <a:miter lim="800000"/>
-        </a:ln>
-        <a:effectLst/>
-      </dsp:spPr>
-      <dsp:style>
-        <a:lnRef idx="2">
-          <a:scrgbClr r="0" g="0" b="0"/>
-        </a:lnRef>
-        <a:fillRef idx="1">
-          <a:scrgbClr r="0" g="0" b="0"/>
-        </a:fillRef>
-        <a:effectRef idx="0">
-          <a:scrgbClr r="0" g="0" b="0"/>
-        </a:effectRef>
-        <a:fontRef idx="minor">
-          <a:schemeClr val="lt1"/>
-        </a:fontRef>
-      </dsp:style>
-      <dsp:txBody>
-        <a:bodyPr spcFirstLastPara="0" vert="horz" wrap="square" lIns="64770" tIns="64770" rIns="64770" bIns="64770" numCol="1" spcCol="1270" anchor="ctr" anchorCtr="0">
-          <a:noAutofit/>
-        </a:bodyPr>
-        <a:lstStyle/>
-        <a:p>
-          <a:pPr marL="0" lvl="0" indent="0" algn="l" defTabSz="755650">
-            <a:lnSpc>
-              <a:spcPct val="90000"/>
-            </a:lnSpc>
-            <a:spcBef>
-              <a:spcPct val="0"/>
-            </a:spcBef>
-            <a:spcAft>
-              <a:spcPct val="35000"/>
-            </a:spcAft>
-            <a:buNone/>
-          </a:pPr>
-          <a:r>
-            <a:rPr lang="en-GB" sz="1700" b="1" kern="1200"/>
-            <a:t>Smart diagnostics</a:t>
-          </a:r>
-          <a:endParaRPr lang="en-US" sz="1700" kern="1200"/>
-        </a:p>
-      </dsp:txBody>
-      <dsp:txXfrm>
-        <a:off x="19875" y="19875"/>
-        <a:ext cx="3295707" cy="638820"/>
-      </dsp:txXfrm>
-    </dsp:sp>
-    <dsp:sp modelId="{99F364CA-ABD3-4672-A607-FDB673856798}">
-      <dsp:nvSpPr>
-        <dsp:cNvPr id="0" name=""/>
-        <dsp:cNvSpPr/>
-      </dsp:nvSpPr>
-      <dsp:spPr>
-        <a:xfrm>
-          <a:off x="306716" y="772816"/>
-          <a:ext cx="4107331" cy="678570"/>
-        </a:xfrm>
-        <a:prstGeom prst="roundRect">
-          <a:avLst>
-            <a:gd name="adj" fmla="val 10000"/>
-          </a:avLst>
-        </a:prstGeom>
-        <a:solidFill>
-          <a:schemeClr val="accent1">
-            <a:hueOff val="0"/>
-            <a:satOff val="0"/>
-            <a:lumOff val="0"/>
-            <a:alphaOff val="0"/>
-          </a:schemeClr>
-        </a:solidFill>
-        <a:ln w="19050" cap="flat" cmpd="sng" algn="ctr">
-          <a:solidFill>
-            <a:schemeClr val="lt1">
-              <a:hueOff val="0"/>
-              <a:satOff val="0"/>
-              <a:lumOff val="0"/>
-              <a:alphaOff val="0"/>
-            </a:schemeClr>
-          </a:solidFill>
-          <a:prstDash val="solid"/>
-          <a:miter lim="800000"/>
-        </a:ln>
-        <a:effectLst/>
-      </dsp:spPr>
-      <dsp:style>
-        <a:lnRef idx="2">
-          <a:scrgbClr r="0" g="0" b="0"/>
-        </a:lnRef>
-        <a:fillRef idx="1">
-          <a:scrgbClr r="0" g="0" b="0"/>
-        </a:fillRef>
-        <a:effectRef idx="0">
-          <a:scrgbClr r="0" g="0" b="0"/>
-        </a:effectRef>
-        <a:fontRef idx="minor">
-          <a:schemeClr val="lt1"/>
-        </a:fontRef>
-      </dsp:style>
-      <dsp:txBody>
-        <a:bodyPr spcFirstLastPara="0" vert="horz" wrap="square" lIns="64770" tIns="64770" rIns="64770" bIns="64770" numCol="1" spcCol="1270" anchor="ctr" anchorCtr="0">
-          <a:noAutofit/>
-        </a:bodyPr>
-        <a:lstStyle/>
-        <a:p>
-          <a:pPr marL="0" lvl="0" indent="0" algn="l" defTabSz="755650">
-            <a:lnSpc>
-              <a:spcPct val="90000"/>
-            </a:lnSpc>
-            <a:spcBef>
-              <a:spcPct val="0"/>
-            </a:spcBef>
-            <a:spcAft>
-              <a:spcPct val="35000"/>
-            </a:spcAft>
-            <a:buNone/>
-          </a:pPr>
-          <a:r>
-            <a:rPr lang="en-GB" sz="1700" kern="1200"/>
-            <a:t>Tracks user behaviour</a:t>
-          </a:r>
-          <a:endParaRPr lang="en-US" sz="1700" kern="1200"/>
-        </a:p>
-      </dsp:txBody>
-      <dsp:txXfrm>
-        <a:off x="326591" y="792691"/>
-        <a:ext cx="3319794" cy="638820"/>
-      </dsp:txXfrm>
-    </dsp:sp>
-    <dsp:sp modelId="{0A682BCD-AFB6-4576-92E0-79F6D0393C5F}">
-      <dsp:nvSpPr>
-        <dsp:cNvPr id="0" name=""/>
-        <dsp:cNvSpPr/>
-      </dsp:nvSpPr>
-      <dsp:spPr>
-        <a:xfrm>
-          <a:off x="613432" y="1545632"/>
-          <a:ext cx="4107331" cy="678570"/>
-        </a:xfrm>
-        <a:prstGeom prst="roundRect">
-          <a:avLst>
-            <a:gd name="adj" fmla="val 10000"/>
-          </a:avLst>
-        </a:prstGeom>
-        <a:solidFill>
-          <a:schemeClr val="accent1">
-            <a:hueOff val="0"/>
-            <a:satOff val="0"/>
-            <a:lumOff val="0"/>
-            <a:alphaOff val="0"/>
-          </a:schemeClr>
-        </a:solidFill>
-        <a:ln w="19050" cap="flat" cmpd="sng" algn="ctr">
-          <a:solidFill>
-            <a:schemeClr val="lt1">
-              <a:hueOff val="0"/>
-              <a:satOff val="0"/>
-              <a:lumOff val="0"/>
-              <a:alphaOff val="0"/>
-            </a:schemeClr>
-          </a:solidFill>
-          <a:prstDash val="solid"/>
-          <a:miter lim="800000"/>
-        </a:ln>
-        <a:effectLst/>
-      </dsp:spPr>
-      <dsp:style>
-        <a:lnRef idx="2">
-          <a:scrgbClr r="0" g="0" b="0"/>
-        </a:lnRef>
-        <a:fillRef idx="1">
-          <a:scrgbClr r="0" g="0" b="0"/>
-        </a:fillRef>
-        <a:effectRef idx="0">
-          <a:scrgbClr r="0" g="0" b="0"/>
-        </a:effectRef>
-        <a:fontRef idx="minor">
-          <a:schemeClr val="lt1"/>
-        </a:fontRef>
-      </dsp:style>
-      <dsp:txBody>
-        <a:bodyPr spcFirstLastPara="0" vert="horz" wrap="square" lIns="64770" tIns="64770" rIns="64770" bIns="64770" numCol="1" spcCol="1270" anchor="ctr" anchorCtr="0">
-          <a:noAutofit/>
-        </a:bodyPr>
-        <a:lstStyle/>
-        <a:p>
-          <a:pPr marL="0" lvl="0" indent="0" algn="l" defTabSz="755650">
-            <a:lnSpc>
-              <a:spcPct val="90000"/>
-            </a:lnSpc>
-            <a:spcBef>
-              <a:spcPct val="0"/>
-            </a:spcBef>
-            <a:spcAft>
-              <a:spcPct val="35000"/>
-            </a:spcAft>
-            <a:buNone/>
-          </a:pPr>
-          <a:r>
-            <a:rPr lang="en-GB" sz="1700" kern="1200"/>
-            <a:t>Offers correct options automatically</a:t>
-          </a:r>
-          <a:endParaRPr lang="en-US" sz="1700" kern="1200"/>
-        </a:p>
-      </dsp:txBody>
-      <dsp:txXfrm>
-        <a:off x="633307" y="1565507"/>
-        <a:ext cx="3319794" cy="638820"/>
-      </dsp:txXfrm>
-    </dsp:sp>
-    <dsp:sp modelId="{81EF4838-EC31-4BC0-8FAC-4662007E087E}">
-      <dsp:nvSpPr>
-        <dsp:cNvPr id="0" name=""/>
-        <dsp:cNvSpPr/>
-      </dsp:nvSpPr>
-      <dsp:spPr>
-        <a:xfrm>
-          <a:off x="920148" y="2318448"/>
-          <a:ext cx="4107331" cy="678570"/>
-        </a:xfrm>
-        <a:prstGeom prst="roundRect">
-          <a:avLst>
-            <a:gd name="adj" fmla="val 10000"/>
-          </a:avLst>
-        </a:prstGeom>
-        <a:solidFill>
-          <a:schemeClr val="accent1">
-            <a:hueOff val="0"/>
-            <a:satOff val="0"/>
-            <a:lumOff val="0"/>
-            <a:alphaOff val="0"/>
-          </a:schemeClr>
-        </a:solidFill>
-        <a:ln w="19050" cap="flat" cmpd="sng" algn="ctr">
-          <a:solidFill>
-            <a:schemeClr val="lt1">
-              <a:hueOff val="0"/>
-              <a:satOff val="0"/>
-              <a:lumOff val="0"/>
-              <a:alphaOff val="0"/>
-            </a:schemeClr>
-          </a:solidFill>
-          <a:prstDash val="solid"/>
-          <a:miter lim="800000"/>
-        </a:ln>
-        <a:effectLst/>
-      </dsp:spPr>
-      <dsp:style>
-        <a:lnRef idx="2">
-          <a:scrgbClr r="0" g="0" b="0"/>
-        </a:lnRef>
-        <a:fillRef idx="1">
-          <a:scrgbClr r="0" g="0" b="0"/>
-        </a:fillRef>
-        <a:effectRef idx="0">
-          <a:scrgbClr r="0" g="0" b="0"/>
-        </a:effectRef>
-        <a:fontRef idx="minor">
-          <a:schemeClr val="lt1"/>
-        </a:fontRef>
-      </dsp:style>
-      <dsp:txBody>
-        <a:bodyPr spcFirstLastPara="0" vert="horz" wrap="square" lIns="64770" tIns="64770" rIns="64770" bIns="64770" numCol="1" spcCol="1270" anchor="ctr" anchorCtr="0">
-          <a:noAutofit/>
-        </a:bodyPr>
-        <a:lstStyle/>
-        <a:p>
-          <a:pPr marL="0" lvl="0" indent="0" algn="l" defTabSz="755650">
-            <a:lnSpc>
-              <a:spcPct val="90000"/>
-            </a:lnSpc>
-            <a:spcBef>
-              <a:spcPct val="0"/>
-            </a:spcBef>
-            <a:spcAft>
-              <a:spcPct val="35000"/>
-            </a:spcAft>
-            <a:buNone/>
-          </a:pPr>
-          <a:r>
-            <a:rPr lang="en-GB" sz="1700" kern="1200"/>
-            <a:t>Reduces confusion</a:t>
-          </a:r>
-          <a:endParaRPr lang="en-US" sz="1700" kern="1200"/>
-        </a:p>
-      </dsp:txBody>
-      <dsp:txXfrm>
-        <a:off x="940023" y="2338323"/>
-        <a:ext cx="3319794" cy="638820"/>
-      </dsp:txXfrm>
-    </dsp:sp>
-    <dsp:sp modelId="{E684079E-DAFC-4B86-A4ED-F15FF67D9CB8}">
-      <dsp:nvSpPr>
-        <dsp:cNvPr id="0" name=""/>
-        <dsp:cNvSpPr/>
-      </dsp:nvSpPr>
-      <dsp:spPr>
-        <a:xfrm>
-          <a:off x="1226865" y="3091264"/>
-          <a:ext cx="4107331" cy="678570"/>
-        </a:xfrm>
-        <a:prstGeom prst="roundRect">
-          <a:avLst>
-            <a:gd name="adj" fmla="val 10000"/>
-          </a:avLst>
-        </a:prstGeom>
-        <a:solidFill>
-          <a:schemeClr val="accent1">
-            <a:hueOff val="0"/>
-            <a:satOff val="0"/>
-            <a:lumOff val="0"/>
-            <a:alphaOff val="0"/>
-          </a:schemeClr>
-        </a:solidFill>
-        <a:ln w="19050" cap="flat" cmpd="sng" algn="ctr">
-          <a:solidFill>
-            <a:schemeClr val="lt1">
-              <a:hueOff val="0"/>
-              <a:satOff val="0"/>
-              <a:lumOff val="0"/>
-              <a:alphaOff val="0"/>
-            </a:schemeClr>
-          </a:solidFill>
-          <a:prstDash val="solid"/>
-          <a:miter lim="800000"/>
-        </a:ln>
-        <a:effectLst/>
-      </dsp:spPr>
-      <dsp:style>
-        <a:lnRef idx="2">
-          <a:scrgbClr r="0" g="0" b="0"/>
-        </a:lnRef>
-        <a:fillRef idx="1">
-          <a:scrgbClr r="0" g="0" b="0"/>
-        </a:fillRef>
-        <a:effectRef idx="0">
-          <a:scrgbClr r="0" g="0" b="0"/>
-        </a:effectRef>
-        <a:fontRef idx="minor">
-          <a:schemeClr val="lt1"/>
-        </a:fontRef>
-      </dsp:style>
-      <dsp:txBody>
-        <a:bodyPr spcFirstLastPara="0" vert="horz" wrap="square" lIns="64770" tIns="64770" rIns="64770" bIns="64770" numCol="1" spcCol="1270" anchor="ctr" anchorCtr="0">
-          <a:noAutofit/>
-        </a:bodyPr>
-        <a:lstStyle/>
-        <a:p>
-          <a:pPr marL="0" lvl="0" indent="0" algn="l" defTabSz="755650">
-            <a:lnSpc>
-              <a:spcPct val="90000"/>
-            </a:lnSpc>
-            <a:spcBef>
-              <a:spcPct val="0"/>
-            </a:spcBef>
-            <a:spcAft>
-              <a:spcPct val="35000"/>
-            </a:spcAft>
-            <a:buNone/>
-          </a:pPr>
-          <a:r>
-            <a:rPr lang="en-GB" sz="1700" kern="1200"/>
-            <a:t>Adapts to user patterns over time</a:t>
-          </a:r>
-          <a:endParaRPr lang="en-US" sz="1700" kern="1200"/>
-        </a:p>
-      </dsp:txBody>
-      <dsp:txXfrm>
-        <a:off x="1246740" y="3111139"/>
-        <a:ext cx="3319794" cy="638820"/>
-      </dsp:txXfrm>
-    </dsp:sp>
-    <dsp:sp modelId="{874DDB7A-FD83-43C9-968F-8348BBCA6509}">
-      <dsp:nvSpPr>
-        <dsp:cNvPr id="0" name=""/>
-        <dsp:cNvSpPr/>
-      </dsp:nvSpPr>
-      <dsp:spPr>
-        <a:xfrm>
-          <a:off x="3666260" y="495733"/>
-          <a:ext cx="441070" cy="441070"/>
-        </a:xfrm>
-        <a:prstGeom prst="downArrow">
-          <a:avLst>
-            <a:gd name="adj1" fmla="val 55000"/>
-            <a:gd name="adj2" fmla="val 45000"/>
-          </a:avLst>
-        </a:prstGeom>
-        <a:solidFill>
-          <a:schemeClr val="accent1">
-            <a:alpha val="90000"/>
-            <a:tint val="40000"/>
-            <a:hueOff val="0"/>
-            <a:satOff val="0"/>
-            <a:lumOff val="0"/>
-            <a:alphaOff val="0"/>
-          </a:schemeClr>
-        </a:solidFill>
-        <a:ln w="19050" cap="flat" cmpd="sng" algn="ctr">
-          <a:solidFill>
-            <a:schemeClr val="accent1">
-              <a:alpha val="90000"/>
-              <a:tint val="40000"/>
-              <a:hueOff val="0"/>
-              <a:satOff val="0"/>
-              <a:lumOff val="0"/>
-              <a:alphaOff val="0"/>
-            </a:schemeClr>
-          </a:solidFill>
-          <a:prstDash val="solid"/>
-          <a:miter lim="800000"/>
-        </a:ln>
-        <a:effectLst/>
-      </dsp:spPr>
-      <dsp:style>
-        <a:lnRef idx="2">
-          <a:scrgbClr r="0" g="0" b="0"/>
-        </a:lnRef>
-        <a:fillRef idx="1">
-          <a:scrgbClr r="0" g="0" b="0"/>
-        </a:fillRef>
-        <a:effectRef idx="0">
-          <a:scrgbClr r="0" g="0" b="0"/>
-        </a:effectRef>
-        <a:fontRef idx="minor"/>
-      </dsp:style>
-      <dsp:txBody>
-        <a:bodyPr spcFirstLastPara="0" vert="horz" wrap="square" lIns="25400" tIns="25400" rIns="25400" bIns="25400" numCol="1" spcCol="1270" anchor="ctr" anchorCtr="0">
-          <a:noAutofit/>
-        </a:bodyPr>
-        <a:lstStyle/>
-        <a:p>
-          <a:pPr marL="0" lvl="0" indent="0" algn="ctr" defTabSz="889000">
-            <a:lnSpc>
-              <a:spcPct val="90000"/>
-            </a:lnSpc>
-            <a:spcBef>
-              <a:spcPct val="0"/>
-            </a:spcBef>
-            <a:spcAft>
-              <a:spcPct val="35000"/>
-            </a:spcAft>
-            <a:buNone/>
-          </a:pPr>
-          <a:endParaRPr lang="en-US" sz="2000" kern="1200"/>
-        </a:p>
-      </dsp:txBody>
-      <dsp:txXfrm>
-        <a:off x="3765501" y="495733"/>
-        <a:ext cx="242588" cy="331905"/>
-      </dsp:txXfrm>
-    </dsp:sp>
-    <dsp:sp modelId="{C3A9AD4A-4A63-4826-93F7-592791DE846D}">
-      <dsp:nvSpPr>
-        <dsp:cNvPr id="0" name=""/>
-        <dsp:cNvSpPr/>
-      </dsp:nvSpPr>
-      <dsp:spPr>
-        <a:xfrm>
-          <a:off x="3972977" y="1268549"/>
-          <a:ext cx="441070" cy="441070"/>
-        </a:xfrm>
-        <a:prstGeom prst="downArrow">
-          <a:avLst>
-            <a:gd name="adj1" fmla="val 55000"/>
-            <a:gd name="adj2" fmla="val 45000"/>
-          </a:avLst>
-        </a:prstGeom>
-        <a:solidFill>
-          <a:schemeClr val="accent1">
-            <a:alpha val="90000"/>
-            <a:tint val="40000"/>
-            <a:hueOff val="0"/>
-            <a:satOff val="0"/>
-            <a:lumOff val="0"/>
-            <a:alphaOff val="0"/>
-          </a:schemeClr>
-        </a:solidFill>
-        <a:ln w="19050" cap="flat" cmpd="sng" algn="ctr">
-          <a:solidFill>
-            <a:schemeClr val="accent1">
-              <a:alpha val="90000"/>
-              <a:tint val="40000"/>
-              <a:hueOff val="0"/>
-              <a:satOff val="0"/>
-              <a:lumOff val="0"/>
-              <a:alphaOff val="0"/>
-            </a:schemeClr>
-          </a:solidFill>
-          <a:prstDash val="solid"/>
-          <a:miter lim="800000"/>
-        </a:ln>
-        <a:effectLst/>
-      </dsp:spPr>
-      <dsp:style>
-        <a:lnRef idx="2">
-          <a:scrgbClr r="0" g="0" b="0"/>
-        </a:lnRef>
-        <a:fillRef idx="1">
-          <a:scrgbClr r="0" g="0" b="0"/>
-        </a:fillRef>
-        <a:effectRef idx="0">
-          <a:scrgbClr r="0" g="0" b="0"/>
-        </a:effectRef>
-        <a:fontRef idx="minor"/>
-      </dsp:style>
-      <dsp:txBody>
-        <a:bodyPr spcFirstLastPara="0" vert="horz" wrap="square" lIns="25400" tIns="25400" rIns="25400" bIns="25400" numCol="1" spcCol="1270" anchor="ctr" anchorCtr="0">
-          <a:noAutofit/>
-        </a:bodyPr>
-        <a:lstStyle/>
-        <a:p>
-          <a:pPr marL="0" lvl="0" indent="0" algn="ctr" defTabSz="889000">
-            <a:lnSpc>
-              <a:spcPct val="90000"/>
-            </a:lnSpc>
-            <a:spcBef>
-              <a:spcPct val="0"/>
-            </a:spcBef>
-            <a:spcAft>
-              <a:spcPct val="35000"/>
-            </a:spcAft>
-            <a:buNone/>
-          </a:pPr>
-          <a:endParaRPr lang="en-US" sz="2000" kern="1200"/>
-        </a:p>
-      </dsp:txBody>
-      <dsp:txXfrm>
-        <a:off x="4072218" y="1268549"/>
-        <a:ext cx="242588" cy="331905"/>
-      </dsp:txXfrm>
-    </dsp:sp>
-    <dsp:sp modelId="{FC8814A9-5087-4FC1-98AD-8936EF459C53}">
-      <dsp:nvSpPr>
-        <dsp:cNvPr id="0" name=""/>
-        <dsp:cNvSpPr/>
-      </dsp:nvSpPr>
-      <dsp:spPr>
-        <a:xfrm>
-          <a:off x="4279693" y="2030056"/>
-          <a:ext cx="441070" cy="441070"/>
-        </a:xfrm>
-        <a:prstGeom prst="downArrow">
-          <a:avLst>
-            <a:gd name="adj1" fmla="val 55000"/>
-            <a:gd name="adj2" fmla="val 45000"/>
-          </a:avLst>
-        </a:prstGeom>
-        <a:solidFill>
-          <a:schemeClr val="accent1">
-            <a:alpha val="90000"/>
-            <a:tint val="40000"/>
-            <a:hueOff val="0"/>
-            <a:satOff val="0"/>
-            <a:lumOff val="0"/>
-            <a:alphaOff val="0"/>
-          </a:schemeClr>
-        </a:solidFill>
-        <a:ln w="19050" cap="flat" cmpd="sng" algn="ctr">
-          <a:solidFill>
-            <a:schemeClr val="accent1">
-              <a:alpha val="90000"/>
-              <a:tint val="40000"/>
-              <a:hueOff val="0"/>
-              <a:satOff val="0"/>
-              <a:lumOff val="0"/>
-              <a:alphaOff val="0"/>
-            </a:schemeClr>
-          </a:solidFill>
-          <a:prstDash val="solid"/>
-          <a:miter lim="800000"/>
-        </a:ln>
-        <a:effectLst/>
-      </dsp:spPr>
-      <dsp:style>
-        <a:lnRef idx="2">
-          <a:scrgbClr r="0" g="0" b="0"/>
-        </a:lnRef>
-        <a:fillRef idx="1">
-          <a:scrgbClr r="0" g="0" b="0"/>
-        </a:fillRef>
-        <a:effectRef idx="0">
-          <a:scrgbClr r="0" g="0" b="0"/>
-        </a:effectRef>
-        <a:fontRef idx="minor"/>
-      </dsp:style>
-      <dsp:txBody>
-        <a:bodyPr spcFirstLastPara="0" vert="horz" wrap="square" lIns="25400" tIns="25400" rIns="25400" bIns="25400" numCol="1" spcCol="1270" anchor="ctr" anchorCtr="0">
-          <a:noAutofit/>
-        </a:bodyPr>
-        <a:lstStyle/>
-        <a:p>
-          <a:pPr marL="0" lvl="0" indent="0" algn="ctr" defTabSz="889000">
-            <a:lnSpc>
-              <a:spcPct val="90000"/>
-            </a:lnSpc>
-            <a:spcBef>
-              <a:spcPct val="0"/>
-            </a:spcBef>
-            <a:spcAft>
-              <a:spcPct val="35000"/>
-            </a:spcAft>
-            <a:buNone/>
-          </a:pPr>
-          <a:endParaRPr lang="en-US" sz="2000" kern="1200"/>
-        </a:p>
-      </dsp:txBody>
-      <dsp:txXfrm>
-        <a:off x="4378934" y="2030056"/>
-        <a:ext cx="242588" cy="331905"/>
-      </dsp:txXfrm>
-    </dsp:sp>
-    <dsp:sp modelId="{A8A03A5F-15D4-4DC3-9672-9F95E829AF08}">
-      <dsp:nvSpPr>
-        <dsp:cNvPr id="0" name=""/>
-        <dsp:cNvSpPr/>
-      </dsp:nvSpPr>
-      <dsp:spPr>
-        <a:xfrm>
-          <a:off x="4586409" y="2810411"/>
-          <a:ext cx="441070" cy="441070"/>
-        </a:xfrm>
-        <a:prstGeom prst="downArrow">
-          <a:avLst>
-            <a:gd name="adj1" fmla="val 55000"/>
-            <a:gd name="adj2" fmla="val 45000"/>
-          </a:avLst>
-        </a:prstGeom>
-        <a:solidFill>
-          <a:schemeClr val="accent1">
-            <a:alpha val="90000"/>
-            <a:tint val="40000"/>
-            <a:hueOff val="0"/>
-            <a:satOff val="0"/>
-            <a:lumOff val="0"/>
-            <a:alphaOff val="0"/>
-          </a:schemeClr>
-        </a:solidFill>
-        <a:ln w="19050" cap="flat" cmpd="sng" algn="ctr">
-          <a:solidFill>
-            <a:schemeClr val="accent1">
-              <a:alpha val="90000"/>
-              <a:tint val="40000"/>
-              <a:hueOff val="0"/>
-              <a:satOff val="0"/>
-              <a:lumOff val="0"/>
-              <a:alphaOff val="0"/>
-            </a:schemeClr>
-          </a:solidFill>
-          <a:prstDash val="solid"/>
-          <a:miter lim="800000"/>
-        </a:ln>
-        <a:effectLst/>
-      </dsp:spPr>
-      <dsp:style>
-        <a:lnRef idx="2">
-          <a:scrgbClr r="0" g="0" b="0"/>
-        </a:lnRef>
-        <a:fillRef idx="1">
-          <a:scrgbClr r="0" g="0" b="0"/>
-        </a:fillRef>
-        <a:effectRef idx="0">
-          <a:scrgbClr r="0" g="0" b="0"/>
-        </a:effectRef>
-        <a:fontRef idx="minor"/>
-      </dsp:style>
-      <dsp:txBody>
-        <a:bodyPr spcFirstLastPara="0" vert="horz" wrap="square" lIns="25400" tIns="25400" rIns="25400" bIns="25400" numCol="1" spcCol="1270" anchor="ctr" anchorCtr="0">
-          <a:noAutofit/>
-        </a:bodyPr>
-        <a:lstStyle/>
-        <a:p>
-          <a:pPr marL="0" lvl="0" indent="0" algn="ctr" defTabSz="889000">
-            <a:lnSpc>
-              <a:spcPct val="90000"/>
-            </a:lnSpc>
-            <a:spcBef>
-              <a:spcPct val="0"/>
-            </a:spcBef>
-            <a:spcAft>
-              <a:spcPct val="35000"/>
-            </a:spcAft>
-            <a:buNone/>
-          </a:pPr>
-          <a:endParaRPr lang="en-US" sz="2000" kern="1200"/>
-        </a:p>
-      </dsp:txBody>
-      <dsp:txXfrm>
-        <a:off x="4685650" y="2810411"/>
-        <a:ext cx="242588" cy="331905"/>
-      </dsp:txXfrm>
-    </dsp:sp>
-  </dsp:spTree>
-</dsp:drawing>
-</file>
-
-<file path=ppt/diagrams/drawing4.xml><?xml version="1.0" encoding="utf-8"?>
-<dsp:drawing xmlns:dgm="http://schemas.openxmlformats.org/drawingml/2006/diagram" xmlns:dsp="http://schemas.microsoft.com/office/drawing/2008/diagram" xmlns:a="http://schemas.openxmlformats.org/drawingml/2006/main">
-  <dsp:spTree>
-    <dsp:nvGrpSpPr>
-      <dsp:cNvPr id="0" name=""/>
-      <dsp:cNvGrpSpPr/>
-    </dsp:nvGrpSpPr>
-    <dsp:grpSpPr/>
     <dsp:sp modelId="{6C11E06E-F6D2-4F09-B136-18340D7EE6BC}">
       <dsp:nvSpPr>
         <dsp:cNvPr id="0" name=""/>
@@ -11468,6 +10736,743 @@
           <a:schemeClr val="lt1"/>
         </a:fontRef>
       </dsp:style>
+    </dsp:sp>
+  </dsp:spTree>
+</dsp:drawing>
+</file>
+
+<file path=ppt/diagrams/drawing4.xml><?xml version="1.0" encoding="utf-8"?>
+<dsp:drawing xmlns:dgm="http://schemas.openxmlformats.org/drawingml/2006/diagram" xmlns:dsp="http://schemas.microsoft.com/office/drawing/2008/diagram" xmlns:a="http://schemas.openxmlformats.org/drawingml/2006/main">
+  <dsp:spTree>
+    <dsp:nvGrpSpPr>
+      <dsp:cNvPr id="0" name=""/>
+      <dsp:cNvGrpSpPr/>
+    </dsp:nvGrpSpPr>
+    <dsp:grpSpPr/>
+    <dsp:sp modelId="{F3D9EFA8-8466-4AB8-BEF7-C5F49F946AEA}">
+      <dsp:nvSpPr>
+        <dsp:cNvPr id="0" name=""/>
+        <dsp:cNvSpPr/>
+      </dsp:nvSpPr>
+      <dsp:spPr>
+        <a:xfrm>
+          <a:off x="0" y="0"/>
+          <a:ext cx="4107331" cy="678570"/>
+        </a:xfrm>
+        <a:prstGeom prst="roundRect">
+          <a:avLst>
+            <a:gd name="adj" fmla="val 10000"/>
+          </a:avLst>
+        </a:prstGeom>
+        <a:solidFill>
+          <a:schemeClr val="accent1">
+            <a:hueOff val="0"/>
+            <a:satOff val="0"/>
+            <a:lumOff val="0"/>
+            <a:alphaOff val="0"/>
+          </a:schemeClr>
+        </a:solidFill>
+        <a:ln w="19050" cap="flat" cmpd="sng" algn="ctr">
+          <a:solidFill>
+            <a:schemeClr val="lt1">
+              <a:hueOff val="0"/>
+              <a:satOff val="0"/>
+              <a:lumOff val="0"/>
+              <a:alphaOff val="0"/>
+            </a:schemeClr>
+          </a:solidFill>
+          <a:prstDash val="solid"/>
+          <a:miter lim="800000"/>
+        </a:ln>
+        <a:effectLst/>
+      </dsp:spPr>
+      <dsp:style>
+        <a:lnRef idx="2">
+          <a:scrgbClr r="0" g="0" b="0"/>
+        </a:lnRef>
+        <a:fillRef idx="1">
+          <a:scrgbClr r="0" g="0" b="0"/>
+        </a:fillRef>
+        <a:effectRef idx="0">
+          <a:scrgbClr r="0" g="0" b="0"/>
+        </a:effectRef>
+        <a:fontRef idx="minor">
+          <a:schemeClr val="lt1"/>
+        </a:fontRef>
+      </dsp:style>
+      <dsp:txBody>
+        <a:bodyPr spcFirstLastPara="0" vert="horz" wrap="square" lIns="64770" tIns="64770" rIns="64770" bIns="64770" numCol="1" spcCol="1270" anchor="ctr" anchorCtr="0">
+          <a:noAutofit/>
+        </a:bodyPr>
+        <a:lstStyle/>
+        <a:p>
+          <a:pPr marL="0" lvl="0" indent="0" algn="l" defTabSz="755650">
+            <a:lnSpc>
+              <a:spcPct val="90000"/>
+            </a:lnSpc>
+            <a:spcBef>
+              <a:spcPct val="0"/>
+            </a:spcBef>
+            <a:spcAft>
+              <a:spcPct val="35000"/>
+            </a:spcAft>
+            <a:buNone/>
+          </a:pPr>
+          <a:r>
+            <a:rPr lang="en-GB" sz="1700" b="1" kern="1200"/>
+            <a:t>Smart diagnostics</a:t>
+          </a:r>
+          <a:endParaRPr lang="en-US" sz="1700" kern="1200"/>
+        </a:p>
+      </dsp:txBody>
+      <dsp:txXfrm>
+        <a:off x="19875" y="19875"/>
+        <a:ext cx="3295707" cy="638820"/>
+      </dsp:txXfrm>
+    </dsp:sp>
+    <dsp:sp modelId="{99F364CA-ABD3-4672-A607-FDB673856798}">
+      <dsp:nvSpPr>
+        <dsp:cNvPr id="0" name=""/>
+        <dsp:cNvSpPr/>
+      </dsp:nvSpPr>
+      <dsp:spPr>
+        <a:xfrm>
+          <a:off x="306716" y="772816"/>
+          <a:ext cx="4107331" cy="678570"/>
+        </a:xfrm>
+        <a:prstGeom prst="roundRect">
+          <a:avLst>
+            <a:gd name="adj" fmla="val 10000"/>
+          </a:avLst>
+        </a:prstGeom>
+        <a:solidFill>
+          <a:schemeClr val="accent1">
+            <a:hueOff val="0"/>
+            <a:satOff val="0"/>
+            <a:lumOff val="0"/>
+            <a:alphaOff val="0"/>
+          </a:schemeClr>
+        </a:solidFill>
+        <a:ln w="19050" cap="flat" cmpd="sng" algn="ctr">
+          <a:solidFill>
+            <a:schemeClr val="lt1">
+              <a:hueOff val="0"/>
+              <a:satOff val="0"/>
+              <a:lumOff val="0"/>
+              <a:alphaOff val="0"/>
+            </a:schemeClr>
+          </a:solidFill>
+          <a:prstDash val="solid"/>
+          <a:miter lim="800000"/>
+        </a:ln>
+        <a:effectLst/>
+      </dsp:spPr>
+      <dsp:style>
+        <a:lnRef idx="2">
+          <a:scrgbClr r="0" g="0" b="0"/>
+        </a:lnRef>
+        <a:fillRef idx="1">
+          <a:scrgbClr r="0" g="0" b="0"/>
+        </a:fillRef>
+        <a:effectRef idx="0">
+          <a:scrgbClr r="0" g="0" b="0"/>
+        </a:effectRef>
+        <a:fontRef idx="minor">
+          <a:schemeClr val="lt1"/>
+        </a:fontRef>
+      </dsp:style>
+      <dsp:txBody>
+        <a:bodyPr spcFirstLastPara="0" vert="horz" wrap="square" lIns="64770" tIns="64770" rIns="64770" bIns="64770" numCol="1" spcCol="1270" anchor="ctr" anchorCtr="0">
+          <a:noAutofit/>
+        </a:bodyPr>
+        <a:lstStyle/>
+        <a:p>
+          <a:pPr marL="0" lvl="0" indent="0" algn="l" defTabSz="755650">
+            <a:lnSpc>
+              <a:spcPct val="90000"/>
+            </a:lnSpc>
+            <a:spcBef>
+              <a:spcPct val="0"/>
+            </a:spcBef>
+            <a:spcAft>
+              <a:spcPct val="35000"/>
+            </a:spcAft>
+            <a:buNone/>
+          </a:pPr>
+          <a:r>
+            <a:rPr lang="en-GB" sz="1700" kern="1200"/>
+            <a:t>Tracks user behaviour</a:t>
+          </a:r>
+          <a:endParaRPr lang="en-US" sz="1700" kern="1200"/>
+        </a:p>
+      </dsp:txBody>
+      <dsp:txXfrm>
+        <a:off x="326591" y="792691"/>
+        <a:ext cx="3319794" cy="638820"/>
+      </dsp:txXfrm>
+    </dsp:sp>
+    <dsp:sp modelId="{0A682BCD-AFB6-4576-92E0-79F6D0393C5F}">
+      <dsp:nvSpPr>
+        <dsp:cNvPr id="0" name=""/>
+        <dsp:cNvSpPr/>
+      </dsp:nvSpPr>
+      <dsp:spPr>
+        <a:xfrm>
+          <a:off x="613432" y="1545632"/>
+          <a:ext cx="4107331" cy="678570"/>
+        </a:xfrm>
+        <a:prstGeom prst="roundRect">
+          <a:avLst>
+            <a:gd name="adj" fmla="val 10000"/>
+          </a:avLst>
+        </a:prstGeom>
+        <a:solidFill>
+          <a:schemeClr val="accent1">
+            <a:hueOff val="0"/>
+            <a:satOff val="0"/>
+            <a:lumOff val="0"/>
+            <a:alphaOff val="0"/>
+          </a:schemeClr>
+        </a:solidFill>
+        <a:ln w="19050" cap="flat" cmpd="sng" algn="ctr">
+          <a:solidFill>
+            <a:schemeClr val="lt1">
+              <a:hueOff val="0"/>
+              <a:satOff val="0"/>
+              <a:lumOff val="0"/>
+              <a:alphaOff val="0"/>
+            </a:schemeClr>
+          </a:solidFill>
+          <a:prstDash val="solid"/>
+          <a:miter lim="800000"/>
+        </a:ln>
+        <a:effectLst/>
+      </dsp:spPr>
+      <dsp:style>
+        <a:lnRef idx="2">
+          <a:scrgbClr r="0" g="0" b="0"/>
+        </a:lnRef>
+        <a:fillRef idx="1">
+          <a:scrgbClr r="0" g="0" b="0"/>
+        </a:fillRef>
+        <a:effectRef idx="0">
+          <a:scrgbClr r="0" g="0" b="0"/>
+        </a:effectRef>
+        <a:fontRef idx="minor">
+          <a:schemeClr val="lt1"/>
+        </a:fontRef>
+      </dsp:style>
+      <dsp:txBody>
+        <a:bodyPr spcFirstLastPara="0" vert="horz" wrap="square" lIns="64770" tIns="64770" rIns="64770" bIns="64770" numCol="1" spcCol="1270" anchor="ctr" anchorCtr="0">
+          <a:noAutofit/>
+        </a:bodyPr>
+        <a:lstStyle/>
+        <a:p>
+          <a:pPr marL="0" lvl="0" indent="0" algn="l" defTabSz="755650">
+            <a:lnSpc>
+              <a:spcPct val="90000"/>
+            </a:lnSpc>
+            <a:spcBef>
+              <a:spcPct val="0"/>
+            </a:spcBef>
+            <a:spcAft>
+              <a:spcPct val="35000"/>
+            </a:spcAft>
+            <a:buNone/>
+          </a:pPr>
+          <a:r>
+            <a:rPr lang="en-GB" sz="1700" kern="1200"/>
+            <a:t>Offers correct options automatically</a:t>
+          </a:r>
+          <a:endParaRPr lang="en-US" sz="1700" kern="1200"/>
+        </a:p>
+      </dsp:txBody>
+      <dsp:txXfrm>
+        <a:off x="633307" y="1565507"/>
+        <a:ext cx="3319794" cy="638820"/>
+      </dsp:txXfrm>
+    </dsp:sp>
+    <dsp:sp modelId="{81EF4838-EC31-4BC0-8FAC-4662007E087E}">
+      <dsp:nvSpPr>
+        <dsp:cNvPr id="0" name=""/>
+        <dsp:cNvSpPr/>
+      </dsp:nvSpPr>
+      <dsp:spPr>
+        <a:xfrm>
+          <a:off x="920148" y="2318448"/>
+          <a:ext cx="4107331" cy="678570"/>
+        </a:xfrm>
+        <a:prstGeom prst="roundRect">
+          <a:avLst>
+            <a:gd name="adj" fmla="val 10000"/>
+          </a:avLst>
+        </a:prstGeom>
+        <a:solidFill>
+          <a:schemeClr val="accent1">
+            <a:hueOff val="0"/>
+            <a:satOff val="0"/>
+            <a:lumOff val="0"/>
+            <a:alphaOff val="0"/>
+          </a:schemeClr>
+        </a:solidFill>
+        <a:ln w="19050" cap="flat" cmpd="sng" algn="ctr">
+          <a:solidFill>
+            <a:schemeClr val="lt1">
+              <a:hueOff val="0"/>
+              <a:satOff val="0"/>
+              <a:lumOff val="0"/>
+              <a:alphaOff val="0"/>
+            </a:schemeClr>
+          </a:solidFill>
+          <a:prstDash val="solid"/>
+          <a:miter lim="800000"/>
+        </a:ln>
+        <a:effectLst/>
+      </dsp:spPr>
+      <dsp:style>
+        <a:lnRef idx="2">
+          <a:scrgbClr r="0" g="0" b="0"/>
+        </a:lnRef>
+        <a:fillRef idx="1">
+          <a:scrgbClr r="0" g="0" b="0"/>
+        </a:fillRef>
+        <a:effectRef idx="0">
+          <a:scrgbClr r="0" g="0" b="0"/>
+        </a:effectRef>
+        <a:fontRef idx="minor">
+          <a:schemeClr val="lt1"/>
+        </a:fontRef>
+      </dsp:style>
+      <dsp:txBody>
+        <a:bodyPr spcFirstLastPara="0" vert="horz" wrap="square" lIns="64770" tIns="64770" rIns="64770" bIns="64770" numCol="1" spcCol="1270" anchor="ctr" anchorCtr="0">
+          <a:noAutofit/>
+        </a:bodyPr>
+        <a:lstStyle/>
+        <a:p>
+          <a:pPr marL="0" lvl="0" indent="0" algn="l" defTabSz="755650">
+            <a:lnSpc>
+              <a:spcPct val="90000"/>
+            </a:lnSpc>
+            <a:spcBef>
+              <a:spcPct val="0"/>
+            </a:spcBef>
+            <a:spcAft>
+              <a:spcPct val="35000"/>
+            </a:spcAft>
+            <a:buNone/>
+          </a:pPr>
+          <a:r>
+            <a:rPr lang="en-GB" sz="1700" kern="1200"/>
+            <a:t>Reduces confusion</a:t>
+          </a:r>
+          <a:endParaRPr lang="en-US" sz="1700" kern="1200"/>
+        </a:p>
+      </dsp:txBody>
+      <dsp:txXfrm>
+        <a:off x="940023" y="2338323"/>
+        <a:ext cx="3319794" cy="638820"/>
+      </dsp:txXfrm>
+    </dsp:sp>
+    <dsp:sp modelId="{E684079E-DAFC-4B86-A4ED-F15FF67D9CB8}">
+      <dsp:nvSpPr>
+        <dsp:cNvPr id="0" name=""/>
+        <dsp:cNvSpPr/>
+      </dsp:nvSpPr>
+      <dsp:spPr>
+        <a:xfrm>
+          <a:off x="1226865" y="3091264"/>
+          <a:ext cx="4107331" cy="678570"/>
+        </a:xfrm>
+        <a:prstGeom prst="roundRect">
+          <a:avLst>
+            <a:gd name="adj" fmla="val 10000"/>
+          </a:avLst>
+        </a:prstGeom>
+        <a:solidFill>
+          <a:schemeClr val="accent1">
+            <a:hueOff val="0"/>
+            <a:satOff val="0"/>
+            <a:lumOff val="0"/>
+            <a:alphaOff val="0"/>
+          </a:schemeClr>
+        </a:solidFill>
+        <a:ln w="19050" cap="flat" cmpd="sng" algn="ctr">
+          <a:solidFill>
+            <a:schemeClr val="lt1">
+              <a:hueOff val="0"/>
+              <a:satOff val="0"/>
+              <a:lumOff val="0"/>
+              <a:alphaOff val="0"/>
+            </a:schemeClr>
+          </a:solidFill>
+          <a:prstDash val="solid"/>
+          <a:miter lim="800000"/>
+        </a:ln>
+        <a:effectLst/>
+      </dsp:spPr>
+      <dsp:style>
+        <a:lnRef idx="2">
+          <a:scrgbClr r="0" g="0" b="0"/>
+        </a:lnRef>
+        <a:fillRef idx="1">
+          <a:scrgbClr r="0" g="0" b="0"/>
+        </a:fillRef>
+        <a:effectRef idx="0">
+          <a:scrgbClr r="0" g="0" b="0"/>
+        </a:effectRef>
+        <a:fontRef idx="minor">
+          <a:schemeClr val="lt1"/>
+        </a:fontRef>
+      </dsp:style>
+      <dsp:txBody>
+        <a:bodyPr spcFirstLastPara="0" vert="horz" wrap="square" lIns="64770" tIns="64770" rIns="64770" bIns="64770" numCol="1" spcCol="1270" anchor="ctr" anchorCtr="0">
+          <a:noAutofit/>
+        </a:bodyPr>
+        <a:lstStyle/>
+        <a:p>
+          <a:pPr marL="0" lvl="0" indent="0" algn="l" defTabSz="755650">
+            <a:lnSpc>
+              <a:spcPct val="90000"/>
+            </a:lnSpc>
+            <a:spcBef>
+              <a:spcPct val="0"/>
+            </a:spcBef>
+            <a:spcAft>
+              <a:spcPct val="35000"/>
+            </a:spcAft>
+            <a:buNone/>
+          </a:pPr>
+          <a:r>
+            <a:rPr lang="en-GB" sz="1700" kern="1200"/>
+            <a:t>Adapts to user patterns over time</a:t>
+          </a:r>
+          <a:endParaRPr lang="en-US" sz="1700" kern="1200"/>
+        </a:p>
+      </dsp:txBody>
+      <dsp:txXfrm>
+        <a:off x="1246740" y="3111139"/>
+        <a:ext cx="3319794" cy="638820"/>
+      </dsp:txXfrm>
+    </dsp:sp>
+    <dsp:sp modelId="{874DDB7A-FD83-43C9-968F-8348BBCA6509}">
+      <dsp:nvSpPr>
+        <dsp:cNvPr id="0" name=""/>
+        <dsp:cNvSpPr/>
+      </dsp:nvSpPr>
+      <dsp:spPr>
+        <a:xfrm>
+          <a:off x="3666260" y="495733"/>
+          <a:ext cx="441070" cy="441070"/>
+        </a:xfrm>
+        <a:prstGeom prst="downArrow">
+          <a:avLst>
+            <a:gd name="adj1" fmla="val 55000"/>
+            <a:gd name="adj2" fmla="val 45000"/>
+          </a:avLst>
+        </a:prstGeom>
+        <a:solidFill>
+          <a:schemeClr val="accent1">
+            <a:alpha val="90000"/>
+            <a:tint val="40000"/>
+            <a:hueOff val="0"/>
+            <a:satOff val="0"/>
+            <a:lumOff val="0"/>
+            <a:alphaOff val="0"/>
+          </a:schemeClr>
+        </a:solidFill>
+        <a:ln w="19050" cap="flat" cmpd="sng" algn="ctr">
+          <a:solidFill>
+            <a:schemeClr val="accent1">
+              <a:alpha val="90000"/>
+              <a:tint val="40000"/>
+              <a:hueOff val="0"/>
+              <a:satOff val="0"/>
+              <a:lumOff val="0"/>
+              <a:alphaOff val="0"/>
+            </a:schemeClr>
+          </a:solidFill>
+          <a:prstDash val="solid"/>
+          <a:miter lim="800000"/>
+        </a:ln>
+        <a:effectLst/>
+      </dsp:spPr>
+      <dsp:style>
+        <a:lnRef idx="2">
+          <a:scrgbClr r="0" g="0" b="0"/>
+        </a:lnRef>
+        <a:fillRef idx="1">
+          <a:scrgbClr r="0" g="0" b="0"/>
+        </a:fillRef>
+        <a:effectRef idx="0">
+          <a:scrgbClr r="0" g="0" b="0"/>
+        </a:effectRef>
+        <a:fontRef idx="minor"/>
+      </dsp:style>
+      <dsp:txBody>
+        <a:bodyPr spcFirstLastPara="0" vert="horz" wrap="square" lIns="25400" tIns="25400" rIns="25400" bIns="25400" numCol="1" spcCol="1270" anchor="ctr" anchorCtr="0">
+          <a:noAutofit/>
+        </a:bodyPr>
+        <a:lstStyle/>
+        <a:p>
+          <a:pPr marL="0" lvl="0" indent="0" algn="ctr" defTabSz="889000">
+            <a:lnSpc>
+              <a:spcPct val="90000"/>
+            </a:lnSpc>
+            <a:spcBef>
+              <a:spcPct val="0"/>
+            </a:spcBef>
+            <a:spcAft>
+              <a:spcPct val="35000"/>
+            </a:spcAft>
+            <a:buNone/>
+          </a:pPr>
+          <a:endParaRPr lang="en-US" sz="2000" kern="1200"/>
+        </a:p>
+      </dsp:txBody>
+      <dsp:txXfrm>
+        <a:off x="3765501" y="495733"/>
+        <a:ext cx="242588" cy="331905"/>
+      </dsp:txXfrm>
+    </dsp:sp>
+    <dsp:sp modelId="{C3A9AD4A-4A63-4826-93F7-592791DE846D}">
+      <dsp:nvSpPr>
+        <dsp:cNvPr id="0" name=""/>
+        <dsp:cNvSpPr/>
+      </dsp:nvSpPr>
+      <dsp:spPr>
+        <a:xfrm>
+          <a:off x="3972977" y="1268549"/>
+          <a:ext cx="441070" cy="441070"/>
+        </a:xfrm>
+        <a:prstGeom prst="downArrow">
+          <a:avLst>
+            <a:gd name="adj1" fmla="val 55000"/>
+            <a:gd name="adj2" fmla="val 45000"/>
+          </a:avLst>
+        </a:prstGeom>
+        <a:solidFill>
+          <a:schemeClr val="accent1">
+            <a:alpha val="90000"/>
+            <a:tint val="40000"/>
+            <a:hueOff val="0"/>
+            <a:satOff val="0"/>
+            <a:lumOff val="0"/>
+            <a:alphaOff val="0"/>
+          </a:schemeClr>
+        </a:solidFill>
+        <a:ln w="19050" cap="flat" cmpd="sng" algn="ctr">
+          <a:solidFill>
+            <a:schemeClr val="accent1">
+              <a:alpha val="90000"/>
+              <a:tint val="40000"/>
+              <a:hueOff val="0"/>
+              <a:satOff val="0"/>
+              <a:lumOff val="0"/>
+              <a:alphaOff val="0"/>
+            </a:schemeClr>
+          </a:solidFill>
+          <a:prstDash val="solid"/>
+          <a:miter lim="800000"/>
+        </a:ln>
+        <a:effectLst/>
+      </dsp:spPr>
+      <dsp:style>
+        <a:lnRef idx="2">
+          <a:scrgbClr r="0" g="0" b="0"/>
+        </a:lnRef>
+        <a:fillRef idx="1">
+          <a:scrgbClr r="0" g="0" b="0"/>
+        </a:fillRef>
+        <a:effectRef idx="0">
+          <a:scrgbClr r="0" g="0" b="0"/>
+        </a:effectRef>
+        <a:fontRef idx="minor"/>
+      </dsp:style>
+      <dsp:txBody>
+        <a:bodyPr spcFirstLastPara="0" vert="horz" wrap="square" lIns="25400" tIns="25400" rIns="25400" bIns="25400" numCol="1" spcCol="1270" anchor="ctr" anchorCtr="0">
+          <a:noAutofit/>
+        </a:bodyPr>
+        <a:lstStyle/>
+        <a:p>
+          <a:pPr marL="0" lvl="0" indent="0" algn="ctr" defTabSz="889000">
+            <a:lnSpc>
+              <a:spcPct val="90000"/>
+            </a:lnSpc>
+            <a:spcBef>
+              <a:spcPct val="0"/>
+            </a:spcBef>
+            <a:spcAft>
+              <a:spcPct val="35000"/>
+            </a:spcAft>
+            <a:buNone/>
+          </a:pPr>
+          <a:endParaRPr lang="en-US" sz="2000" kern="1200"/>
+        </a:p>
+      </dsp:txBody>
+      <dsp:txXfrm>
+        <a:off x="4072218" y="1268549"/>
+        <a:ext cx="242588" cy="331905"/>
+      </dsp:txXfrm>
+    </dsp:sp>
+    <dsp:sp modelId="{FC8814A9-5087-4FC1-98AD-8936EF459C53}">
+      <dsp:nvSpPr>
+        <dsp:cNvPr id="0" name=""/>
+        <dsp:cNvSpPr/>
+      </dsp:nvSpPr>
+      <dsp:spPr>
+        <a:xfrm>
+          <a:off x="4279693" y="2030056"/>
+          <a:ext cx="441070" cy="441070"/>
+        </a:xfrm>
+        <a:prstGeom prst="downArrow">
+          <a:avLst>
+            <a:gd name="adj1" fmla="val 55000"/>
+            <a:gd name="adj2" fmla="val 45000"/>
+          </a:avLst>
+        </a:prstGeom>
+        <a:solidFill>
+          <a:schemeClr val="accent1">
+            <a:alpha val="90000"/>
+            <a:tint val="40000"/>
+            <a:hueOff val="0"/>
+            <a:satOff val="0"/>
+            <a:lumOff val="0"/>
+            <a:alphaOff val="0"/>
+          </a:schemeClr>
+        </a:solidFill>
+        <a:ln w="19050" cap="flat" cmpd="sng" algn="ctr">
+          <a:solidFill>
+            <a:schemeClr val="accent1">
+              <a:alpha val="90000"/>
+              <a:tint val="40000"/>
+              <a:hueOff val="0"/>
+              <a:satOff val="0"/>
+              <a:lumOff val="0"/>
+              <a:alphaOff val="0"/>
+            </a:schemeClr>
+          </a:solidFill>
+          <a:prstDash val="solid"/>
+          <a:miter lim="800000"/>
+        </a:ln>
+        <a:effectLst/>
+      </dsp:spPr>
+      <dsp:style>
+        <a:lnRef idx="2">
+          <a:scrgbClr r="0" g="0" b="0"/>
+        </a:lnRef>
+        <a:fillRef idx="1">
+          <a:scrgbClr r="0" g="0" b="0"/>
+        </a:fillRef>
+        <a:effectRef idx="0">
+          <a:scrgbClr r="0" g="0" b="0"/>
+        </a:effectRef>
+        <a:fontRef idx="minor"/>
+      </dsp:style>
+      <dsp:txBody>
+        <a:bodyPr spcFirstLastPara="0" vert="horz" wrap="square" lIns="25400" tIns="25400" rIns="25400" bIns="25400" numCol="1" spcCol="1270" anchor="ctr" anchorCtr="0">
+          <a:noAutofit/>
+        </a:bodyPr>
+        <a:lstStyle/>
+        <a:p>
+          <a:pPr marL="0" lvl="0" indent="0" algn="ctr" defTabSz="889000">
+            <a:lnSpc>
+              <a:spcPct val="90000"/>
+            </a:lnSpc>
+            <a:spcBef>
+              <a:spcPct val="0"/>
+            </a:spcBef>
+            <a:spcAft>
+              <a:spcPct val="35000"/>
+            </a:spcAft>
+            <a:buNone/>
+          </a:pPr>
+          <a:endParaRPr lang="en-US" sz="2000" kern="1200"/>
+        </a:p>
+      </dsp:txBody>
+      <dsp:txXfrm>
+        <a:off x="4378934" y="2030056"/>
+        <a:ext cx="242588" cy="331905"/>
+      </dsp:txXfrm>
+    </dsp:sp>
+    <dsp:sp modelId="{A8A03A5F-15D4-4DC3-9672-9F95E829AF08}">
+      <dsp:nvSpPr>
+        <dsp:cNvPr id="0" name=""/>
+        <dsp:cNvSpPr/>
+      </dsp:nvSpPr>
+      <dsp:spPr>
+        <a:xfrm>
+          <a:off x="4586409" y="2810411"/>
+          <a:ext cx="441070" cy="441070"/>
+        </a:xfrm>
+        <a:prstGeom prst="downArrow">
+          <a:avLst>
+            <a:gd name="adj1" fmla="val 55000"/>
+            <a:gd name="adj2" fmla="val 45000"/>
+          </a:avLst>
+        </a:prstGeom>
+        <a:solidFill>
+          <a:schemeClr val="accent1">
+            <a:alpha val="90000"/>
+            <a:tint val="40000"/>
+            <a:hueOff val="0"/>
+            <a:satOff val="0"/>
+            <a:lumOff val="0"/>
+            <a:alphaOff val="0"/>
+          </a:schemeClr>
+        </a:solidFill>
+        <a:ln w="19050" cap="flat" cmpd="sng" algn="ctr">
+          <a:solidFill>
+            <a:schemeClr val="accent1">
+              <a:alpha val="90000"/>
+              <a:tint val="40000"/>
+              <a:hueOff val="0"/>
+              <a:satOff val="0"/>
+              <a:lumOff val="0"/>
+              <a:alphaOff val="0"/>
+            </a:schemeClr>
+          </a:solidFill>
+          <a:prstDash val="solid"/>
+          <a:miter lim="800000"/>
+        </a:ln>
+        <a:effectLst/>
+      </dsp:spPr>
+      <dsp:style>
+        <a:lnRef idx="2">
+          <a:scrgbClr r="0" g="0" b="0"/>
+        </a:lnRef>
+        <a:fillRef idx="1">
+          <a:scrgbClr r="0" g="0" b="0"/>
+        </a:fillRef>
+        <a:effectRef idx="0">
+          <a:scrgbClr r="0" g="0" b="0"/>
+        </a:effectRef>
+        <a:fontRef idx="minor"/>
+      </dsp:style>
+      <dsp:txBody>
+        <a:bodyPr spcFirstLastPara="0" vert="horz" wrap="square" lIns="25400" tIns="25400" rIns="25400" bIns="25400" numCol="1" spcCol="1270" anchor="ctr" anchorCtr="0">
+          <a:noAutofit/>
+        </a:bodyPr>
+        <a:lstStyle/>
+        <a:p>
+          <a:pPr marL="0" lvl="0" indent="0" algn="ctr" defTabSz="889000">
+            <a:lnSpc>
+              <a:spcPct val="90000"/>
+            </a:lnSpc>
+            <a:spcBef>
+              <a:spcPct val="0"/>
+            </a:spcBef>
+            <a:spcAft>
+              <a:spcPct val="35000"/>
+            </a:spcAft>
+            <a:buNone/>
+          </a:pPr>
+          <a:endParaRPr lang="en-US" sz="2000" kern="1200"/>
+        </a:p>
+      </dsp:txBody>
+      <dsp:txXfrm>
+        <a:off x="4685650" y="2810411"/>
+        <a:ext cx="242588" cy="331905"/>
+      </dsp:txXfrm>
     </dsp:sp>
   </dsp:spTree>
 </dsp:drawing>
@@ -15102,1232 +15107,6 @@
 </file>
 
 <file path=ppt/diagrams/layout3.xml><?xml version="1.0" encoding="utf-8"?>
-<dgm:layoutDef xmlns:dgm="http://schemas.openxmlformats.org/drawingml/2006/diagram" xmlns:a="http://schemas.openxmlformats.org/drawingml/2006/main" uniqueId="urn:microsoft.com/office/officeart/2005/8/layout/vProcess5">
-  <dgm:title val=""/>
-  <dgm:desc val=""/>
-  <dgm:catLst>
-    <dgm:cat type="process" pri="14000"/>
-  </dgm:catLst>
-  <dgm:sampData>
-    <dgm:dataModel>
-      <dgm:ptLst>
-        <dgm:pt modelId="0" type="doc"/>
-        <dgm:pt modelId="1">
-          <dgm:prSet phldr="1"/>
-        </dgm:pt>
-        <dgm:pt modelId="2">
-          <dgm:prSet phldr="1"/>
-        </dgm:pt>
-        <dgm:pt modelId="3">
-          <dgm:prSet phldr="1"/>
-        </dgm:pt>
-      </dgm:ptLst>
-      <dgm:cxnLst>
-        <dgm:cxn modelId="5" srcId="0" destId="1" srcOrd="0" destOrd="0"/>
-        <dgm:cxn modelId="6" srcId="0" destId="2" srcOrd="1" destOrd="0"/>
-        <dgm:cxn modelId="7" srcId="0" destId="3" srcOrd="2" destOrd="0"/>
-      </dgm:cxnLst>
-      <dgm:bg/>
-      <dgm:whole/>
-    </dgm:dataModel>
-  </dgm:sampData>
-  <dgm:styleData>
-    <dgm:dataModel>
-      <dgm:ptLst>
-        <dgm:pt modelId="0" type="doc"/>
-        <dgm:pt modelId="1"/>
-        <dgm:pt modelId="2"/>
-      </dgm:ptLst>
-      <dgm:cxnLst>
-        <dgm:cxn modelId="3" srcId="0" destId="1" srcOrd="0" destOrd="0"/>
-        <dgm:cxn modelId="4" srcId="0" destId="2" srcOrd="1" destOrd="0"/>
-      </dgm:cxnLst>
-      <dgm:bg/>
-      <dgm:whole/>
-    </dgm:dataModel>
-  </dgm:styleData>
-  <dgm:clrData>
-    <dgm:dataModel>
-      <dgm:ptLst>
-        <dgm:pt modelId="0" type="doc"/>
-        <dgm:pt modelId="1"/>
-        <dgm:pt modelId="2"/>
-        <dgm:pt modelId="3"/>
-        <dgm:pt modelId="4"/>
-      </dgm:ptLst>
-      <dgm:cxnLst>
-        <dgm:cxn modelId="6" srcId="0" destId="1" srcOrd="0" destOrd="0"/>
-        <dgm:cxn modelId="7" srcId="0" destId="2" srcOrd="1" destOrd="0"/>
-        <dgm:cxn modelId="8" srcId="0" destId="3" srcOrd="2" destOrd="0"/>
-        <dgm:cxn modelId="9" srcId="0" destId="4" srcOrd="3" destOrd="0"/>
-      </dgm:cxnLst>
-      <dgm:bg/>
-      <dgm:whole/>
-    </dgm:dataModel>
-  </dgm:clrData>
-  <dgm:layoutNode name="outerComposite">
-    <dgm:varLst>
-      <dgm:chMax val="5"/>
-      <dgm:dir/>
-      <dgm:resizeHandles val="exact"/>
-    </dgm:varLst>
-    <dgm:alg type="composite"/>
-    <dgm:shape xmlns:r="http://schemas.openxmlformats.org/officeDocument/2006/relationships" r:blip="">
-      <dgm:adjLst/>
-    </dgm:shape>
-    <dgm:presOf/>
-    <dgm:choose name="Name0">
-      <dgm:if name="Name1" func="var" arg="dir" op="equ" val="norm">
-        <dgm:constrLst>
-          <dgm:constr type="primFontSz" for="ch" ptType="node" op="equ" val="65"/>
-          <dgm:constr type="w" for="ch" forName="dummyMaxCanvas" refType="w"/>
-          <dgm:constr type="h" for="ch" forName="dummyMaxCanvas" refType="h"/>
-          <dgm:constr type="w" for="ch" forName="OneNode_1" refType="w"/>
-          <dgm:constr type="h" for="ch" forName="OneNode_1" refType="h" fact="0.5"/>
-          <dgm:constr type="ctrY" for="ch" forName="OneNode_1" refType="h" fact="0.5"/>
-          <dgm:constr type="w" for="ch" forName="TwoNodes_1" refType="w" fact="0.85"/>
-          <dgm:constr type="h" for="ch" forName="TwoNodes_1" refType="h" fact="0.45"/>
-          <dgm:constr type="t" for="ch" forName="TwoNodes_1"/>
-          <dgm:constr type="l" for="ch" forName="TwoNodes_1"/>
-          <dgm:constr type="w" for="ch" forName="TwoNodes_2" refType="w" fact="0.85"/>
-          <dgm:constr type="h" for="ch" forName="TwoNodes_2" refType="h" fact="0.45"/>
-          <dgm:constr type="b" for="ch" forName="TwoNodes_2" refType="h"/>
-          <dgm:constr type="r" for="ch" forName="TwoNodes_2" refType="w"/>
-          <dgm:constr type="w" for="ch" forName="TwoConn_1-2" refType="h" refFor="ch" refForName="TwoNodes_1" fact="0.65"/>
-          <dgm:constr type="h" for="ch" forName="TwoConn_1-2" refType="h" refFor="ch" refForName="TwoNodes_1" fact="0.65"/>
-          <dgm:constr type="ctrY" for="ch" forName="TwoConn_1-2" refType="h" fact="0.5"/>
-          <dgm:constr type="r" for="ch" forName="TwoConn_1-2" refType="r" refFor="ch" refForName="TwoNodes_1"/>
-          <dgm:constr type="r" for="ch" forName="TwoNodes_1_text" refType="l" refFor="ch" refForName="TwoConn_1-2"/>
-          <dgm:constr type="rOff" for="ch" forName="TwoNodes_1_text" refType="w" refFor="ch" refForName="TwoConn_1-2" fact="-0.5"/>
-          <dgm:constr type="t" for="ch" forName="TwoNodes_1_text" refType="t" refFor="ch" refForName="TwoNodes_1"/>
-          <dgm:constr type="b" for="ch" forName="TwoNodes_1_text" refType="b" refFor="ch" refForName="TwoNodes_1"/>
-          <dgm:constr type="l" for="ch" forName="TwoNodes_1_text" refType="l" refFor="ch" refForName="TwoNodes_1"/>
-          <dgm:constr type="r" for="ch" forName="TwoNodes_2_text" refType="l" refFor="ch" refForName="TwoConn_1-2"/>
-          <dgm:constr type="t" for="ch" forName="TwoNodes_2_text" refType="t" refFor="ch" refForName="TwoNodes_2"/>
-          <dgm:constr type="b" for="ch" forName="TwoNodes_2_text" refType="b" refFor="ch" refForName="TwoNodes_2"/>
-          <dgm:constr type="l" for="ch" forName="TwoNodes_2_text" refType="l" refFor="ch" refForName="TwoNodes_2"/>
-          <dgm:constr type="w" for="ch" forName="ThreeNodes_1" refType="w" fact="0.85"/>
-          <dgm:constr type="h" for="ch" forName="ThreeNodes_1" refType="h" fact="0.3"/>
-          <dgm:constr type="t" for="ch" forName="ThreeNodes_1"/>
-          <dgm:constr type="l" for="ch" forName="ThreeNodes_1"/>
-          <dgm:constr type="w" for="ch" forName="ThreeNodes_2" refType="w" fact="0.85"/>
-          <dgm:constr type="h" for="ch" forName="ThreeNodes_2" refType="h" fact="0.3"/>
-          <dgm:constr type="ctrY" for="ch" forName="ThreeNodes_2" refType="h" fact="0.5"/>
-          <dgm:constr type="ctrX" for="ch" forName="ThreeNodes_2" refType="w" fact="0.5"/>
-          <dgm:constr type="w" for="ch" forName="ThreeNodes_3" refType="w" fact="0.85"/>
-          <dgm:constr type="h" for="ch" forName="ThreeNodes_3" refType="h" fact="0.3"/>
-          <dgm:constr type="b" for="ch" forName="ThreeNodes_3" refType="h"/>
-          <dgm:constr type="r" for="ch" forName="ThreeNodes_3" refType="w"/>
-          <dgm:constr type="w" for="ch" forName="ThreeConn_1-2" refType="h" refFor="ch" refForName="ThreeNodes_1" fact="0.65"/>
-          <dgm:constr type="h" for="ch" forName="ThreeConn_1-2" refType="h" refFor="ch" refForName="ThreeNodes_1" fact="0.65"/>
-          <dgm:constr type="ctrY" for="ch" forName="ThreeConn_1-2" refType="h" fact="0.325"/>
-          <dgm:constr type="r" for="ch" forName="ThreeConn_1-2" refType="r" refFor="ch" refForName="ThreeNodes_1"/>
-          <dgm:constr type="w" for="ch" forName="ThreeConn_2-3" refType="h" refFor="ch" refForName="ThreeNodes_2" fact="0.65"/>
-          <dgm:constr type="h" for="ch" forName="ThreeConn_2-3" refType="h" refFor="ch" refForName="ThreeNodes_2" fact="0.65"/>
-          <dgm:constr type="ctrY" for="ch" forName="ThreeConn_2-3" refType="h" fact="0.673"/>
-          <dgm:constr type="r" for="ch" forName="ThreeConn_2-3" refType="r" refFor="ch" refForName="ThreeNodes_2"/>
-          <dgm:constr type="r" for="ch" forName="ThreeNodes_1_text" refType="l" refFor="ch" refForName="ThreeConn_1-2"/>
-          <dgm:constr type="rOff" for="ch" forName="ThreeNodes_1_text" refType="w" refFor="ch" refForName="ThreeConn_1-2" fact="-0.57"/>
-          <dgm:constr type="t" for="ch" forName="ThreeNodes_1_text" refType="t" refFor="ch" refForName="ThreeNodes_1"/>
-          <dgm:constr type="b" for="ch" forName="ThreeNodes_1_text" refType="b" refFor="ch" refForName="ThreeNodes_1"/>
-          <dgm:constr type="l" for="ch" forName="ThreeNodes_1_text" refType="l" refFor="ch" refForName="ThreeNodes_1"/>
-          <dgm:constr type="r" for="ch" forName="ThreeNodes_2_text" refType="l" refFor="ch" refForName="ThreeConn_1-2"/>
-          <dgm:constr type="t" for="ch" forName="ThreeNodes_2_text" refType="t" refFor="ch" refForName="ThreeNodes_2"/>
-          <dgm:constr type="b" for="ch" forName="ThreeNodes_2_text" refType="b" refFor="ch" refForName="ThreeNodes_2"/>
-          <dgm:constr type="l" for="ch" forName="ThreeNodes_2_text" refType="l" refFor="ch" refForName="ThreeNodes_2"/>
-          <dgm:constr type="r" for="ch" forName="ThreeNodes_3_text" refType="l" refFor="ch" refForName="ThreeConn_2-3"/>
-          <dgm:constr type="t" for="ch" forName="ThreeNodes_3_text" refType="t" refFor="ch" refForName="ThreeNodes_3"/>
-          <dgm:constr type="b" for="ch" forName="ThreeNodes_3_text" refType="b" refFor="ch" refForName="ThreeNodes_3"/>
-          <dgm:constr type="l" for="ch" forName="ThreeNodes_3_text" refType="l" refFor="ch" refForName="ThreeNodes_3"/>
-          <dgm:constr type="w" for="ch" forName="FourNodes_1" refType="w" fact="0.8"/>
-          <dgm:constr type="h" for="ch" forName="FourNodes_1" refType="h" fact="0.22"/>
-          <dgm:constr type="t" for="ch" forName="FourNodes_1"/>
-          <dgm:constr type="l" for="ch" forName="FourNodes_1"/>
-          <dgm:constr type="w" for="ch" forName="FourNodes_2" refType="w" fact="0.8"/>
-          <dgm:constr type="h" for="ch" forName="FourNodes_2" refType="h" fact="0.22"/>
-          <dgm:constr type="ctrY" for="ch" forName="FourNodes_2" refType="h" fact="0.37"/>
-          <dgm:constr type="ctrX" for="ch" forName="FourNodes_2" refType="w" fact="0.467"/>
-          <dgm:constr type="w" for="ch" forName="FourNodes_3" refType="w" fact="0.8"/>
-          <dgm:constr type="h" for="ch" forName="FourNodes_3" refType="h" fact="0.22"/>
-          <dgm:constr type="ctrY" for="ch" forName="FourNodes_3" refType="h" fact="0.63"/>
-          <dgm:constr type="ctrX" for="ch" forName="FourNodes_3" refType="w" fact="0.533"/>
-          <dgm:constr type="w" for="ch" forName="FourNodes_4" refType="w" fact="0.8"/>
-          <dgm:constr type="h" for="ch" forName="FourNodes_4" refType="h" fact="0.22"/>
-          <dgm:constr type="b" for="ch" forName="FourNodes_4" refType="h"/>
-          <dgm:constr type="r" for="ch" forName="FourNodes_4" refType="w"/>
-          <dgm:constr type="w" for="ch" forName="FourConn_1-2" refType="h" refFor="ch" refForName="FourNodes_1" fact="0.65"/>
-          <dgm:constr type="h" for="ch" forName="FourConn_1-2" refType="h" refFor="ch" refForName="FourNodes_1" fact="0.65"/>
-          <dgm:constr type="ctrY" for="ch" forName="FourConn_1-2" refType="h" fact="0.24"/>
-          <dgm:constr type="r" for="ch" forName="FourConn_1-2" refType="r" refFor="ch" refForName="FourNodes_1"/>
-          <dgm:constr type="w" for="ch" forName="FourConn_2-3" refType="h" refFor="ch" refForName="FourNodes_2" fact="0.65"/>
-          <dgm:constr type="h" for="ch" forName="FourConn_2-3" refType="h" refFor="ch" refForName="FourNodes_2" fact="0.65"/>
-          <dgm:constr type="ctrY" for="ch" forName="FourConn_2-3" refType="h" fact="0.5"/>
-          <dgm:constr type="r" for="ch" forName="FourConn_2-3" refType="r" refFor="ch" refForName="FourNodes_2"/>
-          <dgm:constr type="w" for="ch" forName="FourConn_3-4" refType="h" refFor="ch" refForName="FourNodes_3" fact="0.65"/>
-          <dgm:constr type="h" for="ch" forName="FourConn_3-4" refType="h" refFor="ch" refForName="FourNodes_3" fact="0.65"/>
-          <dgm:constr type="ctrY" for="ch" forName="FourConn_3-4" refType="h" fact="0.76"/>
-          <dgm:constr type="r" for="ch" forName="FourConn_3-4" refType="r" refFor="ch" refForName="FourNodes_3"/>
-          <dgm:constr type="r" for="ch" forName="FourNodes_1_text" refType="l" refFor="ch" refForName="FourConn_1-2"/>
-          <dgm:constr type="rOff" for="ch" forName="FourNodes_1_text" refType="w" refFor="ch" refForName="FourConn_1-2" fact="-0.7"/>
-          <dgm:constr type="t" for="ch" forName="FourNodes_1_text" refType="t" refFor="ch" refForName="FourNodes_1"/>
-          <dgm:constr type="b" for="ch" forName="FourNodes_1_text" refType="b" refFor="ch" refForName="FourNodes_1"/>
-          <dgm:constr type="l" for="ch" forName="FourNodes_1_text" refType="l" refFor="ch" refForName="FourNodes_1"/>
-          <dgm:constr type="r" for="ch" forName="FourNodes_2_text" refType="l" refFor="ch" refForName="FourConn_1-2"/>
-          <dgm:constr type="t" for="ch" forName="FourNodes_2_text" refType="t" refFor="ch" refForName="FourNodes_2"/>
-          <dgm:constr type="b" for="ch" forName="FourNodes_2_text" refType="b" refFor="ch" refForName="FourNodes_2"/>
-          <dgm:constr type="l" for="ch" forName="FourNodes_2_text" refType="l" refFor="ch" refForName="FourNodes_2"/>
-          <dgm:constr type="r" for="ch" forName="FourNodes_3_text" refType="l" refFor="ch" refForName="FourConn_2-3"/>
-          <dgm:constr type="t" for="ch" forName="FourNodes_3_text" refType="t" refFor="ch" refForName="FourNodes_3"/>
-          <dgm:constr type="b" for="ch" forName="FourNodes_3_text" refType="b" refFor="ch" refForName="FourNodes_3"/>
-          <dgm:constr type="l" for="ch" forName="FourNodes_3_text" refType="l" refFor="ch" refForName="FourNodes_3"/>
-          <dgm:constr type="r" for="ch" forName="FourNodes_4_text" refType="l" refFor="ch" refForName="FourConn_3-4"/>
-          <dgm:constr type="t" for="ch" forName="FourNodes_4_text" refType="t" refFor="ch" refForName="FourNodes_4"/>
-          <dgm:constr type="b" for="ch" forName="FourNodes_4_text" refType="b" refFor="ch" refForName="FourNodes_4"/>
-          <dgm:constr type="l" for="ch" forName="FourNodes_4_text" refType="l" refFor="ch" refForName="FourNodes_4"/>
-          <dgm:constr type="w" for="ch" forName="FiveNodes_1" refType="w" fact="0.77"/>
-          <dgm:constr type="h" for="ch" forName="FiveNodes_1" refType="h" fact="0.18"/>
-          <dgm:constr type="t" for="ch" forName="FiveNodes_1"/>
-          <dgm:constr type="l" for="ch" forName="FiveNodes_1"/>
-          <dgm:constr type="w" for="ch" forName="FiveNodes_2" refType="w" fact="0.77"/>
-          <dgm:constr type="h" for="ch" forName="FiveNodes_2" refType="h" fact="0.18"/>
-          <dgm:constr type="ctrY" for="ch" forName="FiveNodes_2" refType="h" fact="0.295"/>
-          <dgm:constr type="ctrX" for="ch" forName="FiveNodes_2" refType="w" fact="0.4425"/>
-          <dgm:constr type="w" for="ch" forName="FiveNodes_3" refType="w" fact="0.77"/>
-          <dgm:constr type="h" for="ch" forName="FiveNodes_3" refType="h" fact="0.18"/>
-          <dgm:constr type="ctrY" for="ch" forName="FiveNodes_3" refType="h" fact="0.5"/>
-          <dgm:constr type="ctrX" for="ch" forName="FiveNodes_3" refType="w" fact="0.5"/>
-          <dgm:constr type="w" for="ch" forName="FiveNodes_4" refType="w" fact="0.77"/>
-          <dgm:constr type="h" for="ch" forName="FiveNodes_4" refType="h" fact="0.18"/>
-          <dgm:constr type="ctrY" for="ch" forName="FiveNodes_4" refType="h" fact="0.705"/>
-          <dgm:constr type="ctrX" for="ch" forName="FiveNodes_4" refType="w" fact="0.5575"/>
-          <dgm:constr type="w" for="ch" forName="FiveNodes_5" refType="w" fact="0.77"/>
-          <dgm:constr type="h" for="ch" forName="FiveNodes_5" refType="h" fact="0.18"/>
-          <dgm:constr type="b" for="ch" forName="FiveNodes_5" refType="h"/>
-          <dgm:constr type="r" for="ch" forName="FiveNodes_5" refType="w"/>
-          <dgm:constr type="w" for="ch" forName="FiveConn_1-2" refType="h" refFor="ch" refForName="FiveNodes_1" fact="0.65"/>
-          <dgm:constr type="h" for="ch" forName="FiveConn_1-2" refType="h" refFor="ch" refForName="FiveNodes_1" fact="0.65"/>
-          <dgm:constr type="ctrY" for="ch" forName="FiveConn_1-2" refType="h" fact="0.19"/>
-          <dgm:constr type="r" for="ch" forName="FiveConn_1-2" refType="r" refFor="ch" refForName="FiveNodes_1"/>
-          <dgm:constr type="w" for="ch" forName="FiveConn_2-3" refType="h" refFor="ch" refForName="FiveNodes_2" fact="0.65"/>
-          <dgm:constr type="h" for="ch" forName="FiveConn_2-3" refType="h" refFor="ch" refForName="FiveNodes_2" fact="0.65"/>
-          <dgm:constr type="ctrY" for="ch" forName="FiveConn_2-3" refType="h" fact="0.395"/>
-          <dgm:constr type="r" for="ch" forName="FiveConn_2-3" refType="r" refFor="ch" refForName="FiveNodes_2"/>
-          <dgm:constr type="w" for="ch" forName="FiveConn_3-4" refType="h" refFor="ch" refForName="FiveNodes_3" fact="0.65"/>
-          <dgm:constr type="h" for="ch" forName="FiveConn_3-4" refType="h" refFor="ch" refForName="FiveNodes_3" fact="0.65"/>
-          <dgm:constr type="ctrY" for="ch" forName="FiveConn_3-4" refType="h" fact="0.597"/>
-          <dgm:constr type="r" for="ch" forName="FiveConn_3-4" refType="r" refFor="ch" refForName="FiveNodes_3"/>
-          <dgm:constr type="w" for="ch" forName="FiveConn_4-5" refType="h" refFor="ch" refForName="FiveNodes_4" fact="0.65"/>
-          <dgm:constr type="h" for="ch" forName="FiveConn_4-5" refType="h" refFor="ch" refForName="FiveNodes_4" fact="0.65"/>
-          <dgm:constr type="ctrY" for="ch" forName="FiveConn_4-5" refType="h" fact="0.804"/>
-          <dgm:constr type="r" for="ch" forName="FiveConn_4-5" refType="r" refFor="ch" refForName="FiveNodes_4"/>
-          <dgm:constr type="r" for="ch" forName="FiveNodes_1_text" refType="l" refFor="ch" refForName="FiveConn_1-2"/>
-          <dgm:constr type="rOff" for="ch" forName="FiveNodes_1_text" refType="w" refFor="ch" refForName="FiveConn_1-2" fact="-0.75"/>
-          <dgm:constr type="t" for="ch" forName="FiveNodes_1_text" refType="t" refFor="ch" refForName="FiveNodes_1"/>
-          <dgm:constr type="b" for="ch" forName="FiveNodes_1_text" refType="b" refFor="ch" refForName="FiveNodes_1"/>
-          <dgm:constr type="l" for="ch" forName="FiveNodes_1_text" refType="l" refFor="ch" refForName="FiveNodes_1"/>
-          <dgm:constr type="r" for="ch" forName="FiveNodes_2_text" refType="l" refFor="ch" refForName="FiveConn_1-2"/>
-          <dgm:constr type="t" for="ch" forName="FiveNodes_2_text" refType="t" refFor="ch" refForName="FiveNodes_2"/>
-          <dgm:constr type="b" for="ch" forName="FiveNodes_2_text" refType="b" refFor="ch" refForName="FiveNodes_2"/>
-          <dgm:constr type="l" for="ch" forName="FiveNodes_2_text" refType="l" refFor="ch" refForName="FiveNodes_2"/>
-          <dgm:constr type="r" for="ch" forName="FiveNodes_3_text" refType="l" refFor="ch" refForName="FiveConn_2-3"/>
-          <dgm:constr type="t" for="ch" forName="FiveNodes_3_text" refType="t" refFor="ch" refForName="FiveNodes_3"/>
-          <dgm:constr type="b" for="ch" forName="FiveNodes_3_text" refType="b" refFor="ch" refForName="FiveNodes_3"/>
-          <dgm:constr type="l" for="ch" forName="FiveNodes_3_text" refType="l" refFor="ch" refForName="FiveNodes_3"/>
-          <dgm:constr type="r" for="ch" forName="FiveNodes_4_text" refType="l" refFor="ch" refForName="FiveConn_3-4"/>
-          <dgm:constr type="t" for="ch" forName="FiveNodes_4_text" refType="t" refFor="ch" refForName="FiveNodes_4"/>
-          <dgm:constr type="b" for="ch" forName="FiveNodes_4_text" refType="b" refFor="ch" refForName="FiveNodes_4"/>
-          <dgm:constr type="l" for="ch" forName="FiveNodes_4_text" refType="l" refFor="ch" refForName="FiveNodes_4"/>
-          <dgm:constr type="r" for="ch" forName="FiveNodes_5_text" refType="l" refFor="ch" refForName="FiveConn_4-5"/>
-          <dgm:constr type="t" for="ch" forName="FiveNodes_5_text" refType="t" refFor="ch" refForName="FiveNodes_5"/>
-          <dgm:constr type="b" for="ch" forName="FiveNodes_5_text" refType="b" refFor="ch" refForName="FiveNodes_5"/>
-          <dgm:constr type="l" for="ch" forName="FiveNodes_5_text" refType="l" refFor="ch" refForName="FiveNodes_5"/>
-        </dgm:constrLst>
-      </dgm:if>
-      <dgm:else name="Name2">
-        <dgm:constrLst>
-          <dgm:constr type="primFontSz" for="ch" ptType="node" op="equ" val="65"/>
-          <dgm:constr type="w" for="ch" forName="dummyMaxCanvas" refType="w"/>
-          <dgm:constr type="h" for="ch" forName="dummyMaxCanvas" refType="h"/>
-          <dgm:constr type="w" for="ch" forName="OneNode_1" refType="w"/>
-          <dgm:constr type="h" for="ch" forName="OneNode_1" refType="h" fact="0.5"/>
-          <dgm:constr type="ctrY" for="ch" forName="OneNode_1" refType="h" fact="0.5"/>
-          <dgm:constr type="w" for="ch" forName="TwoNodes_1" refType="w" fact="0.85"/>
-          <dgm:constr type="h" for="ch" forName="TwoNodes_1" refType="h" fact="0.45"/>
-          <dgm:constr type="t" for="ch" forName="TwoNodes_1"/>
-          <dgm:constr type="r" for="ch" forName="TwoNodes_1" refType="w"/>
-          <dgm:constr type="w" for="ch" forName="TwoNodes_2" refType="w" fact="0.85"/>
-          <dgm:constr type="h" for="ch" forName="TwoNodes_2" refType="h" fact="0.45"/>
-          <dgm:constr type="b" for="ch" forName="TwoNodes_2" refType="h"/>
-          <dgm:constr type="l" for="ch" forName="TwoNodes_2"/>
-          <dgm:constr type="w" for="ch" forName="TwoConn_1-2" refType="h" refFor="ch" refForName="TwoNodes_1" fact="0.65"/>
-          <dgm:constr type="h" for="ch" forName="TwoConn_1-2" refType="h" refFor="ch" refForName="TwoNodes_1" fact="0.65"/>
-          <dgm:constr type="ctrY" for="ch" forName="TwoConn_1-2" refType="h" fact="0.5"/>
-          <dgm:constr type="l" for="ch" forName="TwoConn_1-2" refType="l" refFor="ch" refForName="TwoNodes_1"/>
-          <dgm:constr type="l" for="ch" forName="TwoNodes_1_text" refType="r" refFor="ch" refForName="TwoConn_1-2"/>
-          <dgm:constr type="lOff" for="ch" forName="TwoNodes_1_text" refType="w" refFor="ch" refForName="TwoConn_1-2" fact="0.5"/>
-          <dgm:constr type="t" for="ch" forName="TwoNodes_1_text" refType="t" refFor="ch" refForName="TwoNodes_1"/>
-          <dgm:constr type="b" for="ch" forName="TwoNodes_1_text" refType="b" refFor="ch" refForName="TwoNodes_1"/>
-          <dgm:constr type="r" for="ch" forName="TwoNodes_1_text" refType="r" refFor="ch" refForName="TwoNodes_1"/>
-          <dgm:constr type="l" for="ch" forName="TwoNodes_2_text" refType="r" refFor="ch" refForName="TwoConn_1-2"/>
-          <dgm:constr type="t" for="ch" forName="TwoNodes_2_text" refType="t" refFor="ch" refForName="TwoNodes_2"/>
-          <dgm:constr type="b" for="ch" forName="TwoNodes_2_text" refType="b" refFor="ch" refForName="TwoNodes_2"/>
-          <dgm:constr type="r" for="ch" forName="TwoNodes_2_text" refType="r" refFor="ch" refForName="TwoNodes_2"/>
-          <dgm:constr type="w" for="ch" forName="ThreeNodes_1" refType="w" fact="0.85"/>
-          <dgm:constr type="h" for="ch" forName="ThreeNodes_1" refType="h" fact="0.3"/>
-          <dgm:constr type="t" for="ch" forName="ThreeNodes_1"/>
-          <dgm:constr type="r" for="ch" forName="ThreeNodes_1" refType="w"/>
-          <dgm:constr type="w" for="ch" forName="ThreeNodes_2" refType="w" fact="0.85"/>
-          <dgm:constr type="h" for="ch" forName="ThreeNodes_2" refType="h" fact="0.3"/>
-          <dgm:constr type="ctrY" for="ch" forName="ThreeNodes_2" refType="h" fact="0.5"/>
-          <dgm:constr type="ctrX" for="ch" forName="ThreeNodes_2" refType="w" fact="0.5"/>
-          <dgm:constr type="w" for="ch" forName="ThreeNodes_3" refType="w" fact="0.85"/>
-          <dgm:constr type="h" for="ch" forName="ThreeNodes_3" refType="h" fact="0.3"/>
-          <dgm:constr type="b" for="ch" forName="ThreeNodes_3" refType="h"/>
-          <dgm:constr type="l" for="ch" forName="ThreeNodes_3"/>
-          <dgm:constr type="w" for="ch" forName="ThreeConn_1-2" refType="h" refFor="ch" refForName="ThreeNodes_1" fact="0.65"/>
-          <dgm:constr type="h" for="ch" forName="ThreeConn_1-2" refType="h" refFor="ch" refForName="ThreeNodes_1" fact="0.65"/>
-          <dgm:constr type="ctrY" for="ch" forName="ThreeConn_1-2" refType="h" fact="0.325"/>
-          <dgm:constr type="l" for="ch" forName="ThreeConn_1-2" refType="l" refFor="ch" refForName="ThreeNodes_1"/>
-          <dgm:constr type="w" for="ch" forName="ThreeConn_2-3" refType="h" refFor="ch" refForName="ThreeNodes_2" fact="0.65"/>
-          <dgm:constr type="h" for="ch" forName="ThreeConn_2-3" refType="h" refFor="ch" refForName="ThreeNodes_2" fact="0.65"/>
-          <dgm:constr type="ctrY" for="ch" forName="ThreeConn_2-3" refType="h" fact="0.673"/>
-          <dgm:constr type="l" for="ch" forName="ThreeConn_2-3" refType="l" refFor="ch" refForName="ThreeNodes_2"/>
-          <dgm:constr type="l" for="ch" forName="ThreeNodes_1_text" refType="r" refFor="ch" refForName="ThreeConn_1-2"/>
-          <dgm:constr type="lOff" for="ch" forName="ThreeNodes_1_text" refType="w" refFor="ch" refForName="ThreeConn_1-2" fact="0.55"/>
-          <dgm:constr type="t" for="ch" forName="ThreeNodes_1_text" refType="t" refFor="ch" refForName="ThreeNodes_1"/>
-          <dgm:constr type="b" for="ch" forName="ThreeNodes_1_text" refType="b" refFor="ch" refForName="ThreeNodes_1"/>
-          <dgm:constr type="r" for="ch" forName="ThreeNodes_1_text" refType="r" refFor="ch" refForName="ThreeNodes_1"/>
-          <dgm:constr type="l" for="ch" forName="ThreeNodes_2_text" refType="r" refFor="ch" refForName="ThreeConn_1-2"/>
-          <dgm:constr type="t" for="ch" forName="ThreeNodes_2_text" refType="t" refFor="ch" refForName="ThreeNodes_2"/>
-          <dgm:constr type="b" for="ch" forName="ThreeNodes_2_text" refType="b" refFor="ch" refForName="ThreeNodes_2"/>
-          <dgm:constr type="r" for="ch" forName="ThreeNodes_2_text" refType="r" refFor="ch" refForName="ThreeNodes_2"/>
-          <dgm:constr type="l" for="ch" forName="ThreeNodes_3_text" refType="r" refFor="ch" refForName="ThreeConn_2-3"/>
-          <dgm:constr type="t" for="ch" forName="ThreeNodes_3_text" refType="t" refFor="ch" refForName="ThreeNodes_3"/>
-          <dgm:constr type="b" for="ch" forName="ThreeNodes_3_text" refType="b" refFor="ch" refForName="ThreeNodes_3"/>
-          <dgm:constr type="r" for="ch" forName="ThreeNodes_3_text" refType="r" refFor="ch" refForName="ThreeNodes_3"/>
-          <dgm:constr type="w" for="ch" forName="FourNodes_1" refType="w" fact="0.8"/>
-          <dgm:constr type="h" for="ch" forName="FourNodes_1" refType="h" fact="0.22"/>
-          <dgm:constr type="t" for="ch" forName="FourNodes_1"/>
-          <dgm:constr type="r" for="ch" forName="FourNodes_1" refType="w"/>
-          <dgm:constr type="w" for="ch" forName="FourNodes_2" refType="w" fact="0.8"/>
-          <dgm:constr type="h" for="ch" forName="FourNodes_2" refType="h" fact="0.22"/>
-          <dgm:constr type="ctrY" for="ch" forName="FourNodes_2" refType="h" fact="0.37"/>
-          <dgm:constr type="ctrX" for="ch" forName="FourNodes_2" refType="w" fact="0.533"/>
-          <dgm:constr type="w" for="ch" forName="FourNodes_3" refType="w" fact="0.8"/>
-          <dgm:constr type="h" for="ch" forName="FourNodes_3" refType="h" fact="0.22"/>
-          <dgm:constr type="ctrY" for="ch" forName="FourNodes_3" refType="h" fact="0.63"/>
-          <dgm:constr type="ctrX" for="ch" forName="FourNodes_3" refType="w" fact="0.467"/>
-          <dgm:constr type="w" for="ch" forName="FourNodes_4" refType="w" fact="0.8"/>
-          <dgm:constr type="h" for="ch" forName="FourNodes_4" refType="h" fact="0.22"/>
-          <dgm:constr type="b" for="ch" forName="FourNodes_4" refType="h"/>
-          <dgm:constr type="l" for="ch" forName="FourNodes_4"/>
-          <dgm:constr type="w" for="ch" forName="FourConn_1-2" refType="h" refFor="ch" refForName="FourNodes_1" fact="0.65"/>
-          <dgm:constr type="h" for="ch" forName="FourConn_1-2" refType="h" refFor="ch" refForName="FourNodes_1" fact="0.65"/>
-          <dgm:constr type="ctrY" for="ch" forName="FourConn_1-2" refType="h" fact="0.24"/>
-          <dgm:constr type="l" for="ch" forName="FourConn_1-2" refType="l" refFor="ch" refForName="FourNodes_1"/>
-          <dgm:constr type="w" for="ch" forName="FourConn_2-3" refType="h" refFor="ch" refForName="FourNodes_2" fact="0.65"/>
-          <dgm:constr type="h" for="ch" forName="FourConn_2-3" refType="h" refFor="ch" refForName="FourNodes_2" fact="0.65"/>
-          <dgm:constr type="ctrY" for="ch" forName="FourConn_2-3" refType="h" fact="0.5"/>
-          <dgm:constr type="l" for="ch" forName="FourConn_2-3" refType="l" refFor="ch" refForName="FourNodes_2"/>
-          <dgm:constr type="w" for="ch" forName="FourConn_3-4" refType="h" refFor="ch" refForName="FourNodes_3" fact="0.65"/>
-          <dgm:constr type="h" for="ch" forName="FourConn_3-4" refType="h" refFor="ch" refForName="FourNodes_3" fact="0.65"/>
-          <dgm:constr type="ctrY" for="ch" forName="FourConn_3-4" refType="h" fact="0.76"/>
-          <dgm:constr type="l" for="ch" forName="FourConn_3-4" refType="l" refFor="ch" refForName="FourNodes_3"/>
-          <dgm:constr type="l" for="ch" forName="FourNodes_1_text" refType="r" refFor="ch" refForName="FourConn_1-2"/>
-          <dgm:constr type="lOff" for="ch" forName="FourNodes_1_text" refType="w" refFor="ch" refForName="FourConn_1-2" fact="0.69"/>
-          <dgm:constr type="t" for="ch" forName="FourNodes_1_text" refType="t" refFor="ch" refForName="FourNodes_1"/>
-          <dgm:constr type="b" for="ch" forName="FourNodes_1_text" refType="b" refFor="ch" refForName="FourNodes_1"/>
-          <dgm:constr type="r" for="ch" forName="FourNodes_1_text" refType="r" refFor="ch" refForName="FourNodes_1"/>
-          <dgm:constr type="l" for="ch" forName="FourNodes_2_text" refType="r" refFor="ch" refForName="FourConn_1-2"/>
-          <dgm:constr type="t" for="ch" forName="FourNodes_2_text" refType="t" refFor="ch" refForName="FourNodes_2"/>
-          <dgm:constr type="b" for="ch" forName="FourNodes_2_text" refType="b" refFor="ch" refForName="FourNodes_2"/>
-          <dgm:constr type="r" for="ch" forName="FourNodes_2_text" refType="r" refFor="ch" refForName="FourNodes_2"/>
-          <dgm:constr type="l" for="ch" forName="FourNodes_3_text" refType="r" refFor="ch" refForName="FourConn_2-3"/>
-          <dgm:constr type="t" for="ch" forName="FourNodes_3_text" refType="t" refFor="ch" refForName="FourNodes_3"/>
-          <dgm:constr type="b" for="ch" forName="FourNodes_3_text" refType="b" refFor="ch" refForName="FourNodes_3"/>
-          <dgm:constr type="r" for="ch" forName="FourNodes_3_text" refType="r" refFor="ch" refForName="FourNodes_3"/>
-          <dgm:constr type="l" for="ch" forName="FourNodes_4_text" refType="r" refFor="ch" refForName="FourConn_3-4"/>
-          <dgm:constr type="t" for="ch" forName="FourNodes_4_text" refType="t" refFor="ch" refForName="FourNodes_4"/>
-          <dgm:constr type="b" for="ch" forName="FourNodes_4_text" refType="b" refFor="ch" refForName="FourNodes_4"/>
-          <dgm:constr type="r" for="ch" forName="FourNodes_4_text" refType="r" refFor="ch" refForName="FourNodes_4"/>
-          <dgm:constr type="w" for="ch" forName="FiveNodes_1" refType="w" fact="0.77"/>
-          <dgm:constr type="h" for="ch" forName="FiveNodes_1" refType="h" fact="0.18"/>
-          <dgm:constr type="t" for="ch" forName="FiveNodes_1"/>
-          <dgm:constr type="r" for="ch" forName="FiveNodes_1" refType="w"/>
-          <dgm:constr type="w" for="ch" forName="FiveNodes_2" refType="w" fact="0.77"/>
-          <dgm:constr type="h" for="ch" forName="FiveNodes_2" refType="h" fact="0.18"/>
-          <dgm:constr type="ctrY" for="ch" forName="FiveNodes_2" refType="h" fact="0.295"/>
-          <dgm:constr type="ctrX" for="ch" forName="FiveNodes_2" refType="w" fact="0.5575"/>
-          <dgm:constr type="w" for="ch" forName="FiveNodes_3" refType="w" fact="0.77"/>
-          <dgm:constr type="h" for="ch" forName="FiveNodes_3" refType="h" fact="0.18"/>
-          <dgm:constr type="ctrY" for="ch" forName="FiveNodes_3" refType="h" fact="0.5"/>
-          <dgm:constr type="ctrX" for="ch" forName="FiveNodes_3" refType="w" fact="0.5"/>
-          <dgm:constr type="w" for="ch" forName="FiveNodes_4" refType="w" fact="0.77"/>
-          <dgm:constr type="h" for="ch" forName="FiveNodes_4" refType="h" fact="0.18"/>
-          <dgm:constr type="ctrY" for="ch" forName="FiveNodes_4" refType="h" fact="0.705"/>
-          <dgm:constr type="ctrX" for="ch" forName="FiveNodes_4" refType="w" fact="0.4425"/>
-          <dgm:constr type="w" for="ch" forName="FiveNodes_5" refType="w" fact="0.77"/>
-          <dgm:constr type="h" for="ch" forName="FiveNodes_5" refType="h" fact="0.18"/>
-          <dgm:constr type="b" for="ch" forName="FiveNodes_5" refType="h"/>
-          <dgm:constr type="l" for="ch" forName="FiveNodes_5"/>
-          <dgm:constr type="w" for="ch" forName="FiveConn_1-2" refType="h" refFor="ch" refForName="FiveNodes_1" fact="0.65"/>
-          <dgm:constr type="h" for="ch" forName="FiveConn_1-2" refType="h" refFor="ch" refForName="FiveNodes_1" fact="0.65"/>
-          <dgm:constr type="ctrY" for="ch" forName="FiveConn_1-2" refType="h" fact="0.19"/>
-          <dgm:constr type="l" for="ch" forName="FiveConn_1-2" refType="l" refFor="ch" refForName="FiveNodes_1"/>
-          <dgm:constr type="w" for="ch" forName="FiveConn_2-3" refType="h" refFor="ch" refForName="FiveNodes_2" fact="0.65"/>
-          <dgm:constr type="h" for="ch" forName="FiveConn_2-3" refType="h" refFor="ch" refForName="FiveNodes_2" fact="0.65"/>
-          <dgm:constr type="ctrY" for="ch" forName="FiveConn_2-3" refType="h" fact="0.395"/>
-          <dgm:constr type="l" for="ch" forName="FiveConn_2-3" refType="l" refFor="ch" refForName="FiveNodes_2"/>
-          <dgm:constr type="w" for="ch" forName="FiveConn_3-4" refType="h" refFor="ch" refForName="FiveNodes_3" fact="0.65"/>
-          <dgm:constr type="h" for="ch" forName="FiveConn_3-4" refType="h" refFor="ch" refForName="FiveNodes_3" fact="0.65"/>
-          <dgm:constr type="ctrY" for="ch" forName="FiveConn_3-4" refType="h" fact="0.597"/>
-          <dgm:constr type="l" for="ch" forName="FiveConn_3-4" refType="l" refFor="ch" refForName="FiveNodes_3"/>
-          <dgm:constr type="w" for="ch" forName="FiveConn_4-5" refType="h" refFor="ch" refForName="FiveNodes_4" fact="0.65"/>
-          <dgm:constr type="h" for="ch" forName="FiveConn_4-5" refType="h" refFor="ch" refForName="FiveNodes_4" fact="0.65"/>
-          <dgm:constr type="ctrY" for="ch" forName="FiveConn_4-5" refType="h" fact="0.804"/>
-          <dgm:constr type="l" for="ch" forName="FiveConn_4-5" refType="l" refFor="ch" refForName="FiveNodes_4"/>
-          <dgm:constr type="l" for="ch" forName="FiveNodes_1_text" refType="r" refFor="ch" refForName="FiveConn_1-2"/>
-          <dgm:constr type="lOff" for="ch" forName="FiveNodes_1_text" refType="w" refFor="ch" refForName="FiveConn_1-2" fact="0.73"/>
-          <dgm:constr type="t" for="ch" forName="FiveNodes_1_text" refType="t" refFor="ch" refForName="FiveNodes_1"/>
-          <dgm:constr type="b" for="ch" forName="FiveNodes_1_text" refType="b" refFor="ch" refForName="FiveNodes_1"/>
-          <dgm:constr type="r" for="ch" forName="FiveNodes_1_text" refType="r" refFor="ch" refForName="FiveNodes_1"/>
-          <dgm:constr type="l" for="ch" forName="FiveNodes_2_text" refType="r" refFor="ch" refForName="FiveConn_1-2"/>
-          <dgm:constr type="t" for="ch" forName="FiveNodes_2_text" refType="t" refFor="ch" refForName="FiveNodes_2"/>
-          <dgm:constr type="b" for="ch" forName="FiveNodes_2_text" refType="b" refFor="ch" refForName="FiveNodes_2"/>
-          <dgm:constr type="r" for="ch" forName="FiveNodes_2_text" refType="r" refFor="ch" refForName="FiveNodes_2"/>
-          <dgm:constr type="l" for="ch" forName="FiveNodes_3_text" refType="r" refFor="ch" refForName="FiveConn_2-3"/>
-          <dgm:constr type="t" for="ch" forName="FiveNodes_3_text" refType="t" refFor="ch" refForName="FiveNodes_3"/>
-          <dgm:constr type="b" for="ch" forName="FiveNodes_3_text" refType="b" refFor="ch" refForName="FiveNodes_3"/>
-          <dgm:constr type="r" for="ch" forName="FiveNodes_3_text" refType="r" refFor="ch" refForName="FiveNodes_3"/>
-          <dgm:constr type="l" for="ch" forName="FiveNodes_4_text" refType="r" refFor="ch" refForName="FiveConn_3-4"/>
-          <dgm:constr type="t" for="ch" forName="FiveNodes_4_text" refType="t" refFor="ch" refForName="FiveNodes_4"/>
-          <dgm:constr type="b" for="ch" forName="FiveNodes_4_text" refType="b" refFor="ch" refForName="FiveNodes_4"/>
-          <dgm:constr type="r" for="ch" forName="FiveNodes_4_text" refType="r" refFor="ch" refForName="FiveNodes_4"/>
-          <dgm:constr type="l" for="ch" forName="FiveNodes_5_text" refType="r" refFor="ch" refForName="FiveConn_4-5"/>
-          <dgm:constr type="t" for="ch" forName="FiveNodes_5_text" refType="t" refFor="ch" refForName="FiveNodes_5"/>
-          <dgm:constr type="b" for="ch" forName="FiveNodes_5_text" refType="b" refFor="ch" refForName="FiveNodes_5"/>
-          <dgm:constr type="r" for="ch" forName="FiveNodes_5_text" refType="r" refFor="ch" refForName="FiveNodes_5"/>
-        </dgm:constrLst>
-      </dgm:else>
-    </dgm:choose>
-    <dgm:ruleLst/>
-    <dgm:layoutNode name="dummyMaxCanvas">
-      <dgm:varLst/>
-      <dgm:alg type="sp"/>
-      <dgm:shape xmlns:r="http://schemas.openxmlformats.org/officeDocument/2006/relationships" r:blip="">
-        <dgm:adjLst/>
-      </dgm:shape>
-      <dgm:presOf/>
-      <dgm:constrLst/>
-      <dgm:ruleLst/>
-    </dgm:layoutNode>
-    <dgm:choose name="Name3">
-      <dgm:if name="Name4" axis="ch" ptType="node" func="cnt" op="equ" val="1">
-        <dgm:layoutNode name="OneNode_1">
-          <dgm:varLst>
-            <dgm:bulletEnabled val="1"/>
-          </dgm:varLst>
-          <dgm:alg type="tx"/>
-          <dgm:shape xmlns:r="http://schemas.openxmlformats.org/officeDocument/2006/relationships" type="roundRect" r:blip="">
-            <dgm:adjLst>
-              <dgm:adj idx="1" val="0.1"/>
-            </dgm:adjLst>
-          </dgm:shape>
-          <dgm:presOf axis="ch desOrSelf" ptType="node node" st="1 1" cnt="1 0"/>
-          <dgm:constrLst>
-            <dgm:constr type="lMarg" refType="primFontSz" fact="0.3"/>
-            <dgm:constr type="rMarg" refType="primFontSz" fact="0.3"/>
-            <dgm:constr type="tMarg" refType="primFontSz" fact="0.3"/>
-            <dgm:constr type="bMarg" refType="primFontSz" fact="0.3"/>
-          </dgm:constrLst>
-          <dgm:ruleLst>
-            <dgm:rule type="primFontSz" val="5" fact="NaN" max="NaN"/>
-          </dgm:ruleLst>
-        </dgm:layoutNode>
-      </dgm:if>
-      <dgm:else name="Name5">
-        <dgm:choose name="Name6">
-          <dgm:if name="Name7" axis="ch" ptType="node" func="cnt" op="equ" val="2">
-            <dgm:layoutNode name="TwoNodes_1">
-              <dgm:varLst>
-                <dgm:bulletEnabled val="1"/>
-              </dgm:varLst>
-              <dgm:alg type="sp"/>
-              <dgm:shape xmlns:r="http://schemas.openxmlformats.org/officeDocument/2006/relationships" type="roundRect" r:blip="">
-                <dgm:adjLst>
-                  <dgm:adj idx="1" val="0.1"/>
-                </dgm:adjLst>
-              </dgm:shape>
-              <dgm:presOf axis="ch desOrSelf" ptType="node node" st="1 1" cnt="1 0"/>
-              <dgm:constrLst/>
-              <dgm:ruleLst/>
-            </dgm:layoutNode>
-            <dgm:layoutNode name="TwoNodes_2">
-              <dgm:varLst>
-                <dgm:bulletEnabled val="1"/>
-              </dgm:varLst>
-              <dgm:alg type="sp"/>
-              <dgm:shape xmlns:r="http://schemas.openxmlformats.org/officeDocument/2006/relationships" type="roundRect" r:blip="">
-                <dgm:adjLst>
-                  <dgm:adj idx="1" val="0.1"/>
-                </dgm:adjLst>
-              </dgm:shape>
-              <dgm:presOf axis="ch desOrSelf" ptType="node node" st="2 1" cnt="1 0"/>
-              <dgm:constrLst/>
-              <dgm:ruleLst/>
-            </dgm:layoutNode>
-            <dgm:layoutNode name="TwoConn_1-2" styleLbl="fgAccFollowNode1">
-              <dgm:varLst>
-                <dgm:bulletEnabled val="1"/>
-              </dgm:varLst>
-              <dgm:alg type="tx"/>
-              <dgm:shape xmlns:r="http://schemas.openxmlformats.org/officeDocument/2006/relationships" type="downArrow" r:blip="">
-                <dgm:adjLst>
-                  <dgm:adj idx="1" val="0.55"/>
-                  <dgm:adj idx="2" val="0.45"/>
-                </dgm:adjLst>
-              </dgm:shape>
-              <dgm:presOf axis="ch" ptType="sibTrans" cnt="1"/>
-              <dgm:constrLst>
-                <dgm:constr type="lMarg" refType="primFontSz" fact="0.1"/>
-                <dgm:constr type="rMarg" refType="primFontSz" fact="0.1"/>
-                <dgm:constr type="tMarg" refType="primFontSz" fact="0.1"/>
-                <dgm:constr type="bMarg" refType="primFontSz" fact="0.1"/>
-              </dgm:constrLst>
-              <dgm:ruleLst>
-                <dgm:rule type="primFontSz" val="5" fact="NaN" max="NaN"/>
-              </dgm:ruleLst>
-            </dgm:layoutNode>
-            <dgm:layoutNode name="TwoNodes_1_text">
-              <dgm:varLst>
-                <dgm:bulletEnabled val="1"/>
-              </dgm:varLst>
-              <dgm:alg type="tx">
-                <dgm:param type="parTxLTRAlign" val="l"/>
-                <dgm:param type="txAnchorVertCh" val="mid"/>
-              </dgm:alg>
-              <dgm:shape xmlns:r="http://schemas.openxmlformats.org/officeDocument/2006/relationships" type="roundRect" r:blip="" hideGeom="1">
-                <dgm:adjLst>
-                  <dgm:adj idx="1" val="0.1"/>
-                </dgm:adjLst>
-              </dgm:shape>
-              <dgm:presOf axis="ch desOrSelf" ptType="node node" st="1 1" cnt="1 0"/>
-              <dgm:constrLst>
-                <dgm:constr type="lMarg" refType="primFontSz" fact="0.3"/>
-                <dgm:constr type="rMarg" refType="primFontSz" fact="0.3"/>
-                <dgm:constr type="tMarg" refType="primFontSz" fact="0.3"/>
-                <dgm:constr type="bMarg" refType="primFontSz" fact="0.3"/>
-              </dgm:constrLst>
-              <dgm:ruleLst>
-                <dgm:rule type="primFontSz" val="5" fact="NaN" max="NaN"/>
-              </dgm:ruleLst>
-            </dgm:layoutNode>
-            <dgm:layoutNode name="TwoNodes_2_text">
-              <dgm:varLst>
-                <dgm:bulletEnabled val="1"/>
-              </dgm:varLst>
-              <dgm:alg type="tx">
-                <dgm:param type="parTxLTRAlign" val="l"/>
-                <dgm:param type="txAnchorVertCh" val="mid"/>
-              </dgm:alg>
-              <dgm:shape xmlns:r="http://schemas.openxmlformats.org/officeDocument/2006/relationships" type="roundRect" r:blip="" hideGeom="1">
-                <dgm:adjLst>
-                  <dgm:adj idx="1" val="0.1"/>
-                </dgm:adjLst>
-              </dgm:shape>
-              <dgm:presOf axis="ch desOrSelf" ptType="node node" st="2 1" cnt="1 0"/>
-              <dgm:constrLst>
-                <dgm:constr type="lMarg" refType="primFontSz" fact="0.3"/>
-                <dgm:constr type="rMarg" refType="primFontSz" fact="0.3"/>
-                <dgm:constr type="tMarg" refType="primFontSz" fact="0.3"/>
-                <dgm:constr type="bMarg" refType="primFontSz" fact="0.3"/>
-              </dgm:constrLst>
-              <dgm:ruleLst>
-                <dgm:rule type="primFontSz" val="5" fact="NaN" max="NaN"/>
-              </dgm:ruleLst>
-            </dgm:layoutNode>
-          </dgm:if>
-          <dgm:else name="Name8">
-            <dgm:choose name="Name9">
-              <dgm:if name="Name10" axis="ch" ptType="node" func="cnt" op="equ" val="3">
-                <dgm:layoutNode name="ThreeNodes_1">
-                  <dgm:varLst>
-                    <dgm:bulletEnabled val="1"/>
-                  </dgm:varLst>
-                  <dgm:alg type="sp"/>
-                  <dgm:shape xmlns:r="http://schemas.openxmlformats.org/officeDocument/2006/relationships" type="roundRect" r:blip="">
-                    <dgm:adjLst>
-                      <dgm:adj idx="1" val="0.1"/>
-                    </dgm:adjLst>
-                  </dgm:shape>
-                  <dgm:presOf axis="ch desOrSelf" ptType="node node" st="1 1" cnt="1 0"/>
-                  <dgm:constrLst/>
-                  <dgm:ruleLst/>
-                </dgm:layoutNode>
-                <dgm:layoutNode name="ThreeNodes_2">
-                  <dgm:varLst>
-                    <dgm:bulletEnabled val="1"/>
-                  </dgm:varLst>
-                  <dgm:alg type="sp"/>
-                  <dgm:shape xmlns:r="http://schemas.openxmlformats.org/officeDocument/2006/relationships" type="roundRect" r:blip="">
-                    <dgm:adjLst>
-                      <dgm:adj idx="1" val="0.1"/>
-                    </dgm:adjLst>
-                  </dgm:shape>
-                  <dgm:presOf axis="ch desOrSelf" ptType="node node" st="2 1" cnt="1 0"/>
-                  <dgm:constrLst/>
-                  <dgm:ruleLst/>
-                </dgm:layoutNode>
-                <dgm:layoutNode name="ThreeNodes_3">
-                  <dgm:varLst>
-                    <dgm:bulletEnabled val="1"/>
-                  </dgm:varLst>
-                  <dgm:alg type="sp"/>
-                  <dgm:shape xmlns:r="http://schemas.openxmlformats.org/officeDocument/2006/relationships" type="roundRect" r:blip="">
-                    <dgm:adjLst>
-                      <dgm:adj idx="1" val="0.1"/>
-                    </dgm:adjLst>
-                  </dgm:shape>
-                  <dgm:presOf axis="ch desOrSelf" ptType="node node" st="3 1" cnt="1 0"/>
-                  <dgm:constrLst/>
-                  <dgm:ruleLst/>
-                </dgm:layoutNode>
-                <dgm:layoutNode name="ThreeConn_1-2" styleLbl="fgAccFollowNode1">
-                  <dgm:varLst>
-                    <dgm:bulletEnabled val="1"/>
-                  </dgm:varLst>
-                  <dgm:alg type="tx"/>
-                  <dgm:shape xmlns:r="http://schemas.openxmlformats.org/officeDocument/2006/relationships" type="downArrow" r:blip="">
-                    <dgm:adjLst>
-                      <dgm:adj idx="1" val="0.55"/>
-                      <dgm:adj idx="2" val="0.45"/>
-                    </dgm:adjLst>
-                  </dgm:shape>
-                  <dgm:presOf axis="ch" ptType="sibTrans" cnt="1"/>
-                  <dgm:constrLst>
-                    <dgm:constr type="lMarg" refType="primFontSz" fact="0.1"/>
-                    <dgm:constr type="rMarg" refType="primFontSz" fact="0.1"/>
-                    <dgm:constr type="tMarg" refType="primFontSz" fact="0.1"/>
-                    <dgm:constr type="bMarg" refType="primFontSz" fact="0.1"/>
-                  </dgm:constrLst>
-                  <dgm:ruleLst>
-                    <dgm:rule type="primFontSz" val="5" fact="NaN" max="NaN"/>
-                  </dgm:ruleLst>
-                </dgm:layoutNode>
-                <dgm:layoutNode name="ThreeConn_2-3" styleLbl="fgAccFollowNode1">
-                  <dgm:varLst>
-                    <dgm:bulletEnabled val="1"/>
-                  </dgm:varLst>
-                  <dgm:alg type="tx"/>
-                  <dgm:shape xmlns:r="http://schemas.openxmlformats.org/officeDocument/2006/relationships" type="downArrow" r:blip="">
-                    <dgm:adjLst>
-                      <dgm:adj idx="1" val="0.55"/>
-                      <dgm:adj idx="2" val="0.45"/>
-                    </dgm:adjLst>
-                  </dgm:shape>
-                  <dgm:presOf axis="ch" ptType="sibTrans" st="2" cnt="1"/>
-                  <dgm:constrLst>
-                    <dgm:constr type="lMarg" refType="primFontSz" fact="0.1"/>
-                    <dgm:constr type="rMarg" refType="primFontSz" fact="0.1"/>
-                    <dgm:constr type="tMarg" refType="primFontSz" fact="0.1"/>
-                    <dgm:constr type="bMarg" refType="primFontSz" fact="0.1"/>
-                  </dgm:constrLst>
-                  <dgm:ruleLst>
-                    <dgm:rule type="primFontSz" val="5" fact="NaN" max="NaN"/>
-                  </dgm:ruleLst>
-                </dgm:layoutNode>
-                <dgm:layoutNode name="ThreeNodes_1_text">
-                  <dgm:varLst>
-                    <dgm:bulletEnabled val="1"/>
-                  </dgm:varLst>
-                  <dgm:alg type="tx">
-                    <dgm:param type="parTxLTRAlign" val="l"/>
-                    <dgm:param type="txAnchorVertCh" val="mid"/>
-                  </dgm:alg>
-                  <dgm:shape xmlns:r="http://schemas.openxmlformats.org/officeDocument/2006/relationships" type="roundRect" r:blip="" hideGeom="1">
-                    <dgm:adjLst>
-                      <dgm:adj idx="1" val="0.1"/>
-                    </dgm:adjLst>
-                  </dgm:shape>
-                  <dgm:presOf axis="ch desOrSelf" ptType="node node" st="1 1" cnt="1 0"/>
-                  <dgm:constrLst>
-                    <dgm:constr type="lMarg" refType="primFontSz" fact="0.3"/>
-                    <dgm:constr type="rMarg" refType="primFontSz" fact="0.3"/>
-                    <dgm:constr type="tMarg" refType="primFontSz" fact="0.3"/>
-                    <dgm:constr type="bMarg" refType="primFontSz" fact="0.3"/>
-                  </dgm:constrLst>
-                  <dgm:ruleLst>
-                    <dgm:rule type="primFontSz" val="5" fact="NaN" max="NaN"/>
-                  </dgm:ruleLst>
-                </dgm:layoutNode>
-                <dgm:layoutNode name="ThreeNodes_2_text">
-                  <dgm:varLst>
-                    <dgm:bulletEnabled val="1"/>
-                  </dgm:varLst>
-                  <dgm:alg type="tx">
-                    <dgm:param type="parTxLTRAlign" val="l"/>
-                    <dgm:param type="txAnchorVertCh" val="mid"/>
-                  </dgm:alg>
-                  <dgm:shape xmlns:r="http://schemas.openxmlformats.org/officeDocument/2006/relationships" type="roundRect" r:blip="" hideGeom="1">
-                    <dgm:adjLst>
-                      <dgm:adj idx="1" val="0.1"/>
-                    </dgm:adjLst>
-                  </dgm:shape>
-                  <dgm:presOf axis="ch desOrSelf" ptType="node node" st="2 1" cnt="1 0"/>
-                  <dgm:constrLst>
-                    <dgm:constr type="lMarg" refType="primFontSz" fact="0.3"/>
-                    <dgm:constr type="rMarg" refType="primFontSz" fact="0.3"/>
-                    <dgm:constr type="tMarg" refType="primFontSz" fact="0.3"/>
-                    <dgm:constr type="bMarg" refType="primFontSz" fact="0.3"/>
-                  </dgm:constrLst>
-                  <dgm:ruleLst>
-                    <dgm:rule type="primFontSz" val="5" fact="NaN" max="NaN"/>
-                  </dgm:ruleLst>
-                </dgm:layoutNode>
-                <dgm:layoutNode name="ThreeNodes_3_text">
-                  <dgm:varLst>
-                    <dgm:bulletEnabled val="1"/>
-                  </dgm:varLst>
-                  <dgm:alg type="tx">
-                    <dgm:param type="parTxLTRAlign" val="l"/>
-                    <dgm:param type="txAnchorVertCh" val="mid"/>
-                  </dgm:alg>
-                  <dgm:shape xmlns:r="http://schemas.openxmlformats.org/officeDocument/2006/relationships" type="roundRect" r:blip="" hideGeom="1">
-                    <dgm:adjLst>
-                      <dgm:adj idx="1" val="0.1"/>
-                    </dgm:adjLst>
-                  </dgm:shape>
-                  <dgm:presOf axis="ch desOrSelf" ptType="node node" st="3 1" cnt="1 0"/>
-                  <dgm:constrLst>
-                    <dgm:constr type="lMarg" refType="primFontSz" fact="0.3"/>
-                    <dgm:constr type="rMarg" refType="primFontSz" fact="0.3"/>
-                    <dgm:constr type="tMarg" refType="primFontSz" fact="0.3"/>
-                    <dgm:constr type="bMarg" refType="primFontSz" fact="0.3"/>
-                  </dgm:constrLst>
-                  <dgm:ruleLst>
-                    <dgm:rule type="primFontSz" val="5" fact="NaN" max="NaN"/>
-                  </dgm:ruleLst>
-                </dgm:layoutNode>
-              </dgm:if>
-              <dgm:else name="Name11">
-                <dgm:choose name="Name12">
-                  <dgm:if name="Name13" axis="ch" ptType="node" func="cnt" op="equ" val="4">
-                    <dgm:layoutNode name="FourNodes_1">
-                      <dgm:varLst>
-                        <dgm:bulletEnabled val="1"/>
-                      </dgm:varLst>
-                      <dgm:alg type="sp"/>
-                      <dgm:shape xmlns:r="http://schemas.openxmlformats.org/officeDocument/2006/relationships" type="roundRect" r:blip="">
-                        <dgm:adjLst>
-                          <dgm:adj idx="1" val="0.1"/>
-                        </dgm:adjLst>
-                      </dgm:shape>
-                      <dgm:presOf axis="ch desOrSelf" ptType="node node" st="1 1" cnt="1 0"/>
-                      <dgm:constrLst/>
-                      <dgm:ruleLst/>
-                    </dgm:layoutNode>
-                    <dgm:layoutNode name="FourNodes_2">
-                      <dgm:varLst>
-                        <dgm:bulletEnabled val="1"/>
-                      </dgm:varLst>
-                      <dgm:alg type="sp"/>
-                      <dgm:shape xmlns:r="http://schemas.openxmlformats.org/officeDocument/2006/relationships" type="roundRect" r:blip="">
-                        <dgm:adjLst>
-                          <dgm:adj idx="1" val="0.1"/>
-                        </dgm:adjLst>
-                      </dgm:shape>
-                      <dgm:presOf axis="ch desOrSelf" ptType="node node" st="2 1" cnt="1 0"/>
-                      <dgm:constrLst/>
-                      <dgm:ruleLst/>
-                    </dgm:layoutNode>
-                    <dgm:layoutNode name="FourNodes_3">
-                      <dgm:varLst>
-                        <dgm:bulletEnabled val="1"/>
-                      </dgm:varLst>
-                      <dgm:alg type="sp"/>
-                      <dgm:shape xmlns:r="http://schemas.openxmlformats.org/officeDocument/2006/relationships" type="roundRect" r:blip="">
-                        <dgm:adjLst>
-                          <dgm:adj idx="1" val="0.1"/>
-                        </dgm:adjLst>
-                      </dgm:shape>
-                      <dgm:presOf axis="ch desOrSelf" ptType="node node" st="3 1" cnt="1 0"/>
-                      <dgm:constrLst/>
-                      <dgm:ruleLst/>
-                    </dgm:layoutNode>
-                    <dgm:layoutNode name="FourNodes_4">
-                      <dgm:varLst>
-                        <dgm:bulletEnabled val="1"/>
-                      </dgm:varLst>
-                      <dgm:alg type="sp"/>
-                      <dgm:shape xmlns:r="http://schemas.openxmlformats.org/officeDocument/2006/relationships" type="roundRect" r:blip="">
-                        <dgm:adjLst>
-                          <dgm:adj idx="1" val="0.1"/>
-                        </dgm:adjLst>
-                      </dgm:shape>
-                      <dgm:presOf axis="ch desOrSelf" ptType="node node" st="4 1" cnt="1 0"/>
-                      <dgm:constrLst/>
-                      <dgm:ruleLst/>
-                    </dgm:layoutNode>
-                    <dgm:layoutNode name="FourConn_1-2" styleLbl="fgAccFollowNode1">
-                      <dgm:varLst>
-                        <dgm:bulletEnabled val="1"/>
-                      </dgm:varLst>
-                      <dgm:alg type="tx"/>
-                      <dgm:shape xmlns:r="http://schemas.openxmlformats.org/officeDocument/2006/relationships" type="downArrow" r:blip="">
-                        <dgm:adjLst>
-                          <dgm:adj idx="1" val="0.55"/>
-                          <dgm:adj idx="2" val="0.45"/>
-                        </dgm:adjLst>
-                      </dgm:shape>
-                      <dgm:presOf axis="ch" ptType="sibTrans" cnt="1"/>
-                      <dgm:constrLst>
-                        <dgm:constr type="lMarg" refType="primFontSz" fact="0.1"/>
-                        <dgm:constr type="rMarg" refType="primFontSz" fact="0.1"/>
-                        <dgm:constr type="tMarg" refType="primFontSz" fact="0.1"/>
-                        <dgm:constr type="bMarg" refType="primFontSz" fact="0.1"/>
-                      </dgm:constrLst>
-                      <dgm:ruleLst>
-                        <dgm:rule type="primFontSz" val="5" fact="NaN" max="NaN"/>
-                      </dgm:ruleLst>
-                    </dgm:layoutNode>
-                    <dgm:layoutNode name="FourConn_2-3" styleLbl="fgAccFollowNode1">
-                      <dgm:varLst>
-                        <dgm:bulletEnabled val="1"/>
-                      </dgm:varLst>
-                      <dgm:alg type="tx"/>
-                      <dgm:shape xmlns:r="http://schemas.openxmlformats.org/officeDocument/2006/relationships" type="downArrow" r:blip="">
-                        <dgm:adjLst>
-                          <dgm:adj idx="1" val="0.55"/>
-                          <dgm:adj idx="2" val="0.45"/>
-                        </dgm:adjLst>
-                      </dgm:shape>
-                      <dgm:presOf axis="ch" ptType="sibTrans" st="2" cnt="1"/>
-                      <dgm:constrLst>
-                        <dgm:constr type="lMarg" refType="primFontSz" fact="0.1"/>
-                        <dgm:constr type="rMarg" refType="primFontSz" fact="0.1"/>
-                        <dgm:constr type="tMarg" refType="primFontSz" fact="0.1"/>
-                        <dgm:constr type="bMarg" refType="primFontSz" fact="0.1"/>
-                      </dgm:constrLst>
-                      <dgm:ruleLst>
-                        <dgm:rule type="primFontSz" val="5" fact="NaN" max="NaN"/>
-                      </dgm:ruleLst>
-                    </dgm:layoutNode>
-                    <dgm:layoutNode name="FourConn_3-4" styleLbl="fgAccFollowNode1">
-                      <dgm:varLst>
-                        <dgm:bulletEnabled val="1"/>
-                      </dgm:varLst>
-                      <dgm:alg type="tx"/>
-                      <dgm:shape xmlns:r="http://schemas.openxmlformats.org/officeDocument/2006/relationships" type="downArrow" r:blip="">
-                        <dgm:adjLst>
-                          <dgm:adj idx="1" val="0.55"/>
-                          <dgm:adj idx="2" val="0.45"/>
-                        </dgm:adjLst>
-                      </dgm:shape>
-                      <dgm:presOf axis="ch" ptType="sibTrans" st="3" cnt="1"/>
-                      <dgm:constrLst>
-                        <dgm:constr type="lMarg" refType="primFontSz" fact="0.1"/>
-                        <dgm:constr type="rMarg" refType="primFontSz" fact="0.1"/>
-                        <dgm:constr type="tMarg" refType="primFontSz" fact="0.1"/>
-                        <dgm:constr type="bMarg" refType="primFontSz" fact="0.1"/>
-                      </dgm:constrLst>
-                      <dgm:ruleLst>
-                        <dgm:rule type="primFontSz" val="5" fact="NaN" max="NaN"/>
-                      </dgm:ruleLst>
-                    </dgm:layoutNode>
-                    <dgm:layoutNode name="FourNodes_1_text">
-                      <dgm:varLst>
-                        <dgm:bulletEnabled val="1"/>
-                      </dgm:varLst>
-                      <dgm:alg type="tx">
-                        <dgm:param type="parTxLTRAlign" val="l"/>
-                        <dgm:param type="txAnchorVertCh" val="mid"/>
-                      </dgm:alg>
-                      <dgm:shape xmlns:r="http://schemas.openxmlformats.org/officeDocument/2006/relationships" type="roundRect" r:blip="" hideGeom="1">
-                        <dgm:adjLst>
-                          <dgm:adj idx="1" val="0.1"/>
-                        </dgm:adjLst>
-                      </dgm:shape>
-                      <dgm:presOf axis="ch desOrSelf" ptType="node node" st="1 1" cnt="1 0"/>
-                      <dgm:constrLst>
-                        <dgm:constr type="lMarg" refType="primFontSz" fact="0.3"/>
-                        <dgm:constr type="rMarg" refType="primFontSz" fact="0.3"/>
-                        <dgm:constr type="tMarg" refType="primFontSz" fact="0.3"/>
-                        <dgm:constr type="bMarg" refType="primFontSz" fact="0.3"/>
-                      </dgm:constrLst>
-                      <dgm:ruleLst>
-                        <dgm:rule type="primFontSz" val="5" fact="NaN" max="NaN"/>
-                      </dgm:ruleLst>
-                    </dgm:layoutNode>
-                    <dgm:layoutNode name="FourNodes_2_text">
-                      <dgm:varLst>
-                        <dgm:bulletEnabled val="1"/>
-                      </dgm:varLst>
-                      <dgm:alg type="tx">
-                        <dgm:param type="parTxLTRAlign" val="l"/>
-                        <dgm:param type="txAnchorVertCh" val="mid"/>
-                      </dgm:alg>
-                      <dgm:shape xmlns:r="http://schemas.openxmlformats.org/officeDocument/2006/relationships" type="roundRect" r:blip="" hideGeom="1">
-                        <dgm:adjLst>
-                          <dgm:adj idx="1" val="0.1"/>
-                        </dgm:adjLst>
-                      </dgm:shape>
-                      <dgm:presOf axis="ch desOrSelf" ptType="node node" st="2 1" cnt="1 0"/>
-                      <dgm:constrLst>
-                        <dgm:constr type="lMarg" refType="primFontSz" fact="0.3"/>
-                        <dgm:constr type="rMarg" refType="primFontSz" fact="0.3"/>
-                        <dgm:constr type="tMarg" refType="primFontSz" fact="0.3"/>
-                        <dgm:constr type="bMarg" refType="primFontSz" fact="0.3"/>
-                      </dgm:constrLst>
-                      <dgm:ruleLst>
-                        <dgm:rule type="primFontSz" val="5" fact="NaN" max="NaN"/>
-                      </dgm:ruleLst>
-                    </dgm:layoutNode>
-                    <dgm:layoutNode name="FourNodes_3_text">
-                      <dgm:varLst>
-                        <dgm:bulletEnabled val="1"/>
-                      </dgm:varLst>
-                      <dgm:alg type="tx">
-                        <dgm:param type="parTxLTRAlign" val="l"/>
-                        <dgm:param type="txAnchorVertCh" val="mid"/>
-                      </dgm:alg>
-                      <dgm:shape xmlns:r="http://schemas.openxmlformats.org/officeDocument/2006/relationships" type="roundRect" r:blip="" hideGeom="1">
-                        <dgm:adjLst>
-                          <dgm:adj idx="1" val="0.1"/>
-                        </dgm:adjLst>
-                      </dgm:shape>
-                      <dgm:presOf axis="ch desOrSelf" ptType="node node" st="3 1" cnt="1 0"/>
-                      <dgm:constrLst>
-                        <dgm:constr type="lMarg" refType="primFontSz" fact="0.3"/>
-                        <dgm:constr type="rMarg" refType="primFontSz" fact="0.3"/>
-                        <dgm:constr type="tMarg" refType="primFontSz" fact="0.3"/>
-                        <dgm:constr type="bMarg" refType="primFontSz" fact="0.3"/>
-                      </dgm:constrLst>
-                      <dgm:ruleLst>
-                        <dgm:rule type="primFontSz" val="5" fact="NaN" max="NaN"/>
-                      </dgm:ruleLst>
-                    </dgm:layoutNode>
-                    <dgm:layoutNode name="FourNodes_4_text">
-                      <dgm:varLst>
-                        <dgm:bulletEnabled val="1"/>
-                      </dgm:varLst>
-                      <dgm:alg type="tx">
-                        <dgm:param type="parTxLTRAlign" val="l"/>
-                        <dgm:param type="txAnchorVertCh" val="mid"/>
-                      </dgm:alg>
-                      <dgm:shape xmlns:r="http://schemas.openxmlformats.org/officeDocument/2006/relationships" type="roundRect" r:blip="" hideGeom="1">
-                        <dgm:adjLst>
-                          <dgm:adj idx="1" val="0.1"/>
-                        </dgm:adjLst>
-                      </dgm:shape>
-                      <dgm:presOf axis="ch desOrSelf" ptType="node node" st="4 1" cnt="1 0"/>
-                      <dgm:constrLst>
-                        <dgm:constr type="lMarg" refType="primFontSz" fact="0.3"/>
-                        <dgm:constr type="rMarg" refType="primFontSz" fact="0.3"/>
-                        <dgm:constr type="tMarg" refType="primFontSz" fact="0.3"/>
-                        <dgm:constr type="bMarg" refType="primFontSz" fact="0.3"/>
-                      </dgm:constrLst>
-                      <dgm:ruleLst>
-                        <dgm:rule type="primFontSz" val="5" fact="NaN" max="NaN"/>
-                      </dgm:ruleLst>
-                    </dgm:layoutNode>
-                  </dgm:if>
-                  <dgm:else name="Name14">
-                    <dgm:choose name="Name15">
-                      <dgm:if name="Name16" axis="ch" ptType="node" func="cnt" op="gte" val="5">
-                        <dgm:layoutNode name="FiveNodes_1">
-                          <dgm:varLst>
-                            <dgm:bulletEnabled val="1"/>
-                          </dgm:varLst>
-                          <dgm:alg type="sp"/>
-                          <dgm:shape xmlns:r="http://schemas.openxmlformats.org/officeDocument/2006/relationships" type="roundRect" r:blip="">
-                            <dgm:adjLst>
-                              <dgm:adj idx="1" val="0.1"/>
-                            </dgm:adjLst>
-                          </dgm:shape>
-                          <dgm:presOf axis="ch desOrSelf" ptType="node node" st="1 1" cnt="1 0"/>
-                          <dgm:constrLst/>
-                          <dgm:ruleLst/>
-                        </dgm:layoutNode>
-                        <dgm:layoutNode name="FiveNodes_2">
-                          <dgm:varLst>
-                            <dgm:bulletEnabled val="1"/>
-                          </dgm:varLst>
-                          <dgm:alg type="sp"/>
-                          <dgm:shape xmlns:r="http://schemas.openxmlformats.org/officeDocument/2006/relationships" type="roundRect" r:blip="">
-                            <dgm:adjLst>
-                              <dgm:adj idx="1" val="0.1"/>
-                            </dgm:adjLst>
-                          </dgm:shape>
-                          <dgm:presOf axis="ch desOrSelf" ptType="node node" st="2 1" cnt="1 0"/>
-                          <dgm:constrLst/>
-                          <dgm:ruleLst/>
-                        </dgm:layoutNode>
-                        <dgm:layoutNode name="FiveNodes_3">
-                          <dgm:varLst>
-                            <dgm:bulletEnabled val="1"/>
-                          </dgm:varLst>
-                          <dgm:alg type="sp"/>
-                          <dgm:shape xmlns:r="http://schemas.openxmlformats.org/officeDocument/2006/relationships" type="roundRect" r:blip="">
-                            <dgm:adjLst>
-                              <dgm:adj idx="1" val="0.1"/>
-                            </dgm:adjLst>
-                          </dgm:shape>
-                          <dgm:presOf axis="ch desOrSelf" ptType="node node" st="3 1" cnt="1 0"/>
-                          <dgm:constrLst/>
-                          <dgm:ruleLst/>
-                        </dgm:layoutNode>
-                        <dgm:layoutNode name="FiveNodes_4">
-                          <dgm:varLst>
-                            <dgm:bulletEnabled val="1"/>
-                          </dgm:varLst>
-                          <dgm:alg type="sp"/>
-                          <dgm:shape xmlns:r="http://schemas.openxmlformats.org/officeDocument/2006/relationships" type="roundRect" r:blip="">
-                            <dgm:adjLst>
-                              <dgm:adj idx="1" val="0.1"/>
-                            </dgm:adjLst>
-                          </dgm:shape>
-                          <dgm:presOf axis="ch desOrSelf" ptType="node node" st="4 1" cnt="1 0"/>
-                          <dgm:constrLst/>
-                          <dgm:ruleLst/>
-                        </dgm:layoutNode>
-                        <dgm:layoutNode name="FiveNodes_5">
-                          <dgm:varLst>
-                            <dgm:bulletEnabled val="1"/>
-                          </dgm:varLst>
-                          <dgm:alg type="sp"/>
-                          <dgm:shape xmlns:r="http://schemas.openxmlformats.org/officeDocument/2006/relationships" type="roundRect" r:blip="">
-                            <dgm:adjLst>
-                              <dgm:adj idx="1" val="0.1"/>
-                            </dgm:adjLst>
-                          </dgm:shape>
-                          <dgm:presOf axis="ch desOrSelf" ptType="node node" st="5 1" cnt="1 0"/>
-                          <dgm:constrLst/>
-                          <dgm:ruleLst/>
-                        </dgm:layoutNode>
-                        <dgm:layoutNode name="FiveConn_1-2" styleLbl="fgAccFollowNode1">
-                          <dgm:varLst>
-                            <dgm:bulletEnabled val="1"/>
-                          </dgm:varLst>
-                          <dgm:alg type="tx"/>
-                          <dgm:shape xmlns:r="http://schemas.openxmlformats.org/officeDocument/2006/relationships" type="downArrow" r:blip="">
-                            <dgm:adjLst>
-                              <dgm:adj idx="1" val="0.55"/>
-                              <dgm:adj idx="2" val="0.45"/>
-                            </dgm:adjLst>
-                          </dgm:shape>
-                          <dgm:presOf axis="ch" ptType="sibTrans" cnt="1"/>
-                          <dgm:constrLst>
-                            <dgm:constr type="lMarg" refType="primFontSz" fact="0.1"/>
-                            <dgm:constr type="rMarg" refType="primFontSz" fact="0.1"/>
-                            <dgm:constr type="tMarg" refType="primFontSz" fact="0.1"/>
-                            <dgm:constr type="bMarg" refType="primFontSz" fact="0.1"/>
-                          </dgm:constrLst>
-                          <dgm:ruleLst>
-                            <dgm:rule type="primFontSz" val="5" fact="NaN" max="NaN"/>
-                          </dgm:ruleLst>
-                        </dgm:layoutNode>
-                        <dgm:layoutNode name="FiveConn_2-3" styleLbl="fgAccFollowNode1">
-                          <dgm:varLst>
-                            <dgm:bulletEnabled val="1"/>
-                          </dgm:varLst>
-                          <dgm:alg type="tx"/>
-                          <dgm:shape xmlns:r="http://schemas.openxmlformats.org/officeDocument/2006/relationships" type="downArrow" r:blip="">
-                            <dgm:adjLst>
-                              <dgm:adj idx="1" val="0.55"/>
-                              <dgm:adj idx="2" val="0.45"/>
-                            </dgm:adjLst>
-                          </dgm:shape>
-                          <dgm:presOf axis="ch" ptType="sibTrans" st="2" cnt="1"/>
-                          <dgm:constrLst>
-                            <dgm:constr type="lMarg" refType="primFontSz" fact="0.1"/>
-                            <dgm:constr type="rMarg" refType="primFontSz" fact="0.1"/>
-                            <dgm:constr type="tMarg" refType="primFontSz" fact="0.1"/>
-                            <dgm:constr type="bMarg" refType="primFontSz" fact="0.1"/>
-                          </dgm:constrLst>
-                          <dgm:ruleLst>
-                            <dgm:rule type="primFontSz" val="5" fact="NaN" max="NaN"/>
-                          </dgm:ruleLst>
-                        </dgm:layoutNode>
-                        <dgm:layoutNode name="FiveConn_3-4" styleLbl="fgAccFollowNode1">
-                          <dgm:varLst>
-                            <dgm:bulletEnabled val="1"/>
-                          </dgm:varLst>
-                          <dgm:alg type="tx"/>
-                          <dgm:shape xmlns:r="http://schemas.openxmlformats.org/officeDocument/2006/relationships" type="downArrow" r:blip="">
-                            <dgm:adjLst>
-                              <dgm:adj idx="1" val="0.55"/>
-                              <dgm:adj idx="2" val="0.45"/>
-                            </dgm:adjLst>
-                          </dgm:shape>
-                          <dgm:presOf axis="ch" ptType="sibTrans" st="3" cnt="1"/>
-                          <dgm:constrLst>
-                            <dgm:constr type="lMarg" refType="primFontSz" fact="0.1"/>
-                            <dgm:constr type="rMarg" refType="primFontSz" fact="0.1"/>
-                            <dgm:constr type="tMarg" refType="primFontSz" fact="0.1"/>
-                            <dgm:constr type="bMarg" refType="primFontSz" fact="0.1"/>
-                          </dgm:constrLst>
-                          <dgm:ruleLst>
-                            <dgm:rule type="primFontSz" val="5" fact="NaN" max="NaN"/>
-                          </dgm:ruleLst>
-                        </dgm:layoutNode>
-                        <dgm:layoutNode name="FiveConn_4-5" styleLbl="fgAccFollowNode1">
-                          <dgm:varLst>
-                            <dgm:bulletEnabled val="1"/>
-                          </dgm:varLst>
-                          <dgm:alg type="tx"/>
-                          <dgm:shape xmlns:r="http://schemas.openxmlformats.org/officeDocument/2006/relationships" type="downArrow" r:blip="">
-                            <dgm:adjLst>
-                              <dgm:adj idx="1" val="0.55"/>
-                              <dgm:adj idx="2" val="0.45"/>
-                            </dgm:adjLst>
-                          </dgm:shape>
-                          <dgm:presOf axis="ch" ptType="sibTrans" st="4" cnt="1"/>
-                          <dgm:constrLst>
-                            <dgm:constr type="lMarg" refType="primFontSz" fact="0.1"/>
-                            <dgm:constr type="rMarg" refType="primFontSz" fact="0.1"/>
-                            <dgm:constr type="tMarg" refType="primFontSz" fact="0.1"/>
-                            <dgm:constr type="bMarg" refType="primFontSz" fact="0.1"/>
-                          </dgm:constrLst>
-                          <dgm:ruleLst>
-                            <dgm:rule type="primFontSz" val="5" fact="NaN" max="NaN"/>
-                          </dgm:ruleLst>
-                        </dgm:layoutNode>
-                        <dgm:layoutNode name="FiveNodes_1_text">
-                          <dgm:varLst>
-                            <dgm:bulletEnabled val="1"/>
-                          </dgm:varLst>
-                          <dgm:alg type="tx">
-                            <dgm:param type="parTxLTRAlign" val="l"/>
-                            <dgm:param type="txAnchorVertCh" val="mid"/>
-                          </dgm:alg>
-                          <dgm:shape xmlns:r="http://schemas.openxmlformats.org/officeDocument/2006/relationships" type="roundRect" r:blip="" hideGeom="1">
-                            <dgm:adjLst>
-                              <dgm:adj idx="1" val="0.1"/>
-                            </dgm:adjLst>
-                          </dgm:shape>
-                          <dgm:presOf axis="ch desOrSelf" ptType="node node" st="1 1" cnt="1 0"/>
-                          <dgm:constrLst>
-                            <dgm:constr type="lMarg" refType="primFontSz" fact="0.3"/>
-                            <dgm:constr type="rMarg" refType="primFontSz" fact="0.3"/>
-                            <dgm:constr type="tMarg" refType="primFontSz" fact="0.3"/>
-                            <dgm:constr type="bMarg" refType="primFontSz" fact="0.3"/>
-                          </dgm:constrLst>
-                          <dgm:ruleLst>
-                            <dgm:rule type="primFontSz" val="5" fact="NaN" max="NaN"/>
-                          </dgm:ruleLst>
-                        </dgm:layoutNode>
-                        <dgm:layoutNode name="FiveNodes_2_text">
-                          <dgm:varLst>
-                            <dgm:bulletEnabled val="1"/>
-                          </dgm:varLst>
-                          <dgm:alg type="tx">
-                            <dgm:param type="parTxLTRAlign" val="l"/>
-                            <dgm:param type="txAnchorVertCh" val="mid"/>
-                          </dgm:alg>
-                          <dgm:shape xmlns:r="http://schemas.openxmlformats.org/officeDocument/2006/relationships" type="roundRect" r:blip="" hideGeom="1">
-                            <dgm:adjLst>
-                              <dgm:adj idx="1" val="0.1"/>
-                            </dgm:adjLst>
-                          </dgm:shape>
-                          <dgm:presOf axis="ch desOrSelf" ptType="node node" st="2 1" cnt="1 0"/>
-                          <dgm:constrLst>
-                            <dgm:constr type="lMarg" refType="primFontSz" fact="0.3"/>
-                            <dgm:constr type="rMarg" refType="primFontSz" fact="0.3"/>
-                            <dgm:constr type="tMarg" refType="primFontSz" fact="0.3"/>
-                            <dgm:constr type="bMarg" refType="primFontSz" fact="0.3"/>
-                          </dgm:constrLst>
-                          <dgm:ruleLst>
-                            <dgm:rule type="primFontSz" val="5" fact="NaN" max="NaN"/>
-                          </dgm:ruleLst>
-                        </dgm:layoutNode>
-                        <dgm:layoutNode name="FiveNodes_3_text">
-                          <dgm:varLst>
-                            <dgm:bulletEnabled val="1"/>
-                          </dgm:varLst>
-                          <dgm:alg type="tx">
-                            <dgm:param type="parTxLTRAlign" val="l"/>
-                            <dgm:param type="txAnchorVertCh" val="mid"/>
-                          </dgm:alg>
-                          <dgm:shape xmlns:r="http://schemas.openxmlformats.org/officeDocument/2006/relationships" type="roundRect" r:blip="" hideGeom="1">
-                            <dgm:adjLst>
-                              <dgm:adj idx="1" val="0.1"/>
-                            </dgm:adjLst>
-                          </dgm:shape>
-                          <dgm:presOf axis="ch desOrSelf" ptType="node node" st="3 1" cnt="1 0"/>
-                          <dgm:constrLst>
-                            <dgm:constr type="lMarg" refType="primFontSz" fact="0.3"/>
-                            <dgm:constr type="rMarg" refType="primFontSz" fact="0.3"/>
-                            <dgm:constr type="tMarg" refType="primFontSz" fact="0.3"/>
-                            <dgm:constr type="bMarg" refType="primFontSz" fact="0.3"/>
-                          </dgm:constrLst>
-                          <dgm:ruleLst>
-                            <dgm:rule type="primFontSz" val="5" fact="NaN" max="NaN"/>
-                          </dgm:ruleLst>
-                        </dgm:layoutNode>
-                        <dgm:layoutNode name="FiveNodes_4_text">
-                          <dgm:varLst>
-                            <dgm:bulletEnabled val="1"/>
-                          </dgm:varLst>
-                          <dgm:alg type="tx">
-                            <dgm:param type="parTxLTRAlign" val="l"/>
-                            <dgm:param type="txAnchorVertCh" val="mid"/>
-                          </dgm:alg>
-                          <dgm:shape xmlns:r="http://schemas.openxmlformats.org/officeDocument/2006/relationships" type="roundRect" r:blip="" hideGeom="1">
-                            <dgm:adjLst>
-                              <dgm:adj idx="1" val="0.1"/>
-                            </dgm:adjLst>
-                          </dgm:shape>
-                          <dgm:presOf axis="ch desOrSelf" ptType="node node" st="4 1" cnt="1 0"/>
-                          <dgm:constrLst>
-                            <dgm:constr type="lMarg" refType="primFontSz" fact="0.3"/>
-                            <dgm:constr type="rMarg" refType="primFontSz" fact="0.3"/>
-                            <dgm:constr type="tMarg" refType="primFontSz" fact="0.3"/>
-                            <dgm:constr type="bMarg" refType="primFontSz" fact="0.3"/>
-                          </dgm:constrLst>
-                          <dgm:ruleLst>
-                            <dgm:rule type="primFontSz" val="5" fact="NaN" max="NaN"/>
-                          </dgm:ruleLst>
-                        </dgm:layoutNode>
-                        <dgm:layoutNode name="FiveNodes_5_text">
-                          <dgm:varLst>
-                            <dgm:bulletEnabled val="1"/>
-                          </dgm:varLst>
-                          <dgm:alg type="tx">
-                            <dgm:param type="parTxLTRAlign" val="l"/>
-                            <dgm:param type="txAnchorVertCh" val="mid"/>
-                          </dgm:alg>
-                          <dgm:shape xmlns:r="http://schemas.openxmlformats.org/officeDocument/2006/relationships" type="roundRect" r:blip="" hideGeom="1">
-                            <dgm:adjLst>
-                              <dgm:adj idx="1" val="0.1"/>
-                            </dgm:adjLst>
-                          </dgm:shape>
-                          <dgm:presOf axis="ch desOrSelf" ptType="node node" st="5 1" cnt="1 0"/>
-                          <dgm:constrLst>
-                            <dgm:constr type="lMarg" refType="primFontSz" fact="0.3"/>
-                            <dgm:constr type="rMarg" refType="primFontSz" fact="0.3"/>
-                            <dgm:constr type="tMarg" refType="primFontSz" fact="0.3"/>
-                            <dgm:constr type="bMarg" refType="primFontSz" fact="0.3"/>
-                          </dgm:constrLst>
-                          <dgm:ruleLst>
-                            <dgm:rule type="primFontSz" val="5" fact="NaN" max="NaN"/>
-                          </dgm:ruleLst>
-                        </dgm:layoutNode>
-                      </dgm:if>
-                      <dgm:else name="Name17"/>
-                    </dgm:choose>
-                  </dgm:else>
-                </dgm:choose>
-              </dgm:else>
-            </dgm:choose>
-          </dgm:else>
-        </dgm:choose>
-      </dgm:else>
-    </dgm:choose>
-  </dgm:layoutNode>
-</dgm:layoutDef>
-</file>
-
-<file path=ppt/diagrams/layout4.xml><?xml version="1.0" encoding="utf-8"?>
 <dgm:layoutDef xmlns:dgm="http://schemas.openxmlformats.org/drawingml/2006/diagram" xmlns:a="http://schemas.openxmlformats.org/drawingml/2006/main" uniqueId="urn:microsoft.com/office/officeart/2005/8/layout/cycle8">
   <dgm:title val=""/>
   <dgm:desc val=""/>
@@ -18087,6 +16866,1232 @@
 </dgm:layoutDef>
 </file>
 
+<file path=ppt/diagrams/layout4.xml><?xml version="1.0" encoding="utf-8"?>
+<dgm:layoutDef xmlns:dgm="http://schemas.openxmlformats.org/drawingml/2006/diagram" xmlns:a="http://schemas.openxmlformats.org/drawingml/2006/main" uniqueId="urn:microsoft.com/office/officeart/2005/8/layout/vProcess5">
+  <dgm:title val=""/>
+  <dgm:desc val=""/>
+  <dgm:catLst>
+    <dgm:cat type="process" pri="14000"/>
+  </dgm:catLst>
+  <dgm:sampData>
+    <dgm:dataModel>
+      <dgm:ptLst>
+        <dgm:pt modelId="0" type="doc"/>
+        <dgm:pt modelId="1">
+          <dgm:prSet phldr="1"/>
+        </dgm:pt>
+        <dgm:pt modelId="2">
+          <dgm:prSet phldr="1"/>
+        </dgm:pt>
+        <dgm:pt modelId="3">
+          <dgm:prSet phldr="1"/>
+        </dgm:pt>
+      </dgm:ptLst>
+      <dgm:cxnLst>
+        <dgm:cxn modelId="5" srcId="0" destId="1" srcOrd="0" destOrd="0"/>
+        <dgm:cxn modelId="6" srcId="0" destId="2" srcOrd="1" destOrd="0"/>
+        <dgm:cxn modelId="7" srcId="0" destId="3" srcOrd="2" destOrd="0"/>
+      </dgm:cxnLst>
+      <dgm:bg/>
+      <dgm:whole/>
+    </dgm:dataModel>
+  </dgm:sampData>
+  <dgm:styleData>
+    <dgm:dataModel>
+      <dgm:ptLst>
+        <dgm:pt modelId="0" type="doc"/>
+        <dgm:pt modelId="1"/>
+        <dgm:pt modelId="2"/>
+      </dgm:ptLst>
+      <dgm:cxnLst>
+        <dgm:cxn modelId="3" srcId="0" destId="1" srcOrd="0" destOrd="0"/>
+        <dgm:cxn modelId="4" srcId="0" destId="2" srcOrd="1" destOrd="0"/>
+      </dgm:cxnLst>
+      <dgm:bg/>
+      <dgm:whole/>
+    </dgm:dataModel>
+  </dgm:styleData>
+  <dgm:clrData>
+    <dgm:dataModel>
+      <dgm:ptLst>
+        <dgm:pt modelId="0" type="doc"/>
+        <dgm:pt modelId="1"/>
+        <dgm:pt modelId="2"/>
+        <dgm:pt modelId="3"/>
+        <dgm:pt modelId="4"/>
+      </dgm:ptLst>
+      <dgm:cxnLst>
+        <dgm:cxn modelId="6" srcId="0" destId="1" srcOrd="0" destOrd="0"/>
+        <dgm:cxn modelId="7" srcId="0" destId="2" srcOrd="1" destOrd="0"/>
+        <dgm:cxn modelId="8" srcId="0" destId="3" srcOrd="2" destOrd="0"/>
+        <dgm:cxn modelId="9" srcId="0" destId="4" srcOrd="3" destOrd="0"/>
+      </dgm:cxnLst>
+      <dgm:bg/>
+      <dgm:whole/>
+    </dgm:dataModel>
+  </dgm:clrData>
+  <dgm:layoutNode name="outerComposite">
+    <dgm:varLst>
+      <dgm:chMax val="5"/>
+      <dgm:dir/>
+      <dgm:resizeHandles val="exact"/>
+    </dgm:varLst>
+    <dgm:alg type="composite"/>
+    <dgm:shape xmlns:r="http://schemas.openxmlformats.org/officeDocument/2006/relationships" r:blip="">
+      <dgm:adjLst/>
+    </dgm:shape>
+    <dgm:presOf/>
+    <dgm:choose name="Name0">
+      <dgm:if name="Name1" func="var" arg="dir" op="equ" val="norm">
+        <dgm:constrLst>
+          <dgm:constr type="primFontSz" for="ch" ptType="node" op="equ" val="65"/>
+          <dgm:constr type="w" for="ch" forName="dummyMaxCanvas" refType="w"/>
+          <dgm:constr type="h" for="ch" forName="dummyMaxCanvas" refType="h"/>
+          <dgm:constr type="w" for="ch" forName="OneNode_1" refType="w"/>
+          <dgm:constr type="h" for="ch" forName="OneNode_1" refType="h" fact="0.5"/>
+          <dgm:constr type="ctrY" for="ch" forName="OneNode_1" refType="h" fact="0.5"/>
+          <dgm:constr type="w" for="ch" forName="TwoNodes_1" refType="w" fact="0.85"/>
+          <dgm:constr type="h" for="ch" forName="TwoNodes_1" refType="h" fact="0.45"/>
+          <dgm:constr type="t" for="ch" forName="TwoNodes_1"/>
+          <dgm:constr type="l" for="ch" forName="TwoNodes_1"/>
+          <dgm:constr type="w" for="ch" forName="TwoNodes_2" refType="w" fact="0.85"/>
+          <dgm:constr type="h" for="ch" forName="TwoNodes_2" refType="h" fact="0.45"/>
+          <dgm:constr type="b" for="ch" forName="TwoNodes_2" refType="h"/>
+          <dgm:constr type="r" for="ch" forName="TwoNodes_2" refType="w"/>
+          <dgm:constr type="w" for="ch" forName="TwoConn_1-2" refType="h" refFor="ch" refForName="TwoNodes_1" fact="0.65"/>
+          <dgm:constr type="h" for="ch" forName="TwoConn_1-2" refType="h" refFor="ch" refForName="TwoNodes_1" fact="0.65"/>
+          <dgm:constr type="ctrY" for="ch" forName="TwoConn_1-2" refType="h" fact="0.5"/>
+          <dgm:constr type="r" for="ch" forName="TwoConn_1-2" refType="r" refFor="ch" refForName="TwoNodes_1"/>
+          <dgm:constr type="r" for="ch" forName="TwoNodes_1_text" refType="l" refFor="ch" refForName="TwoConn_1-2"/>
+          <dgm:constr type="rOff" for="ch" forName="TwoNodes_1_text" refType="w" refFor="ch" refForName="TwoConn_1-2" fact="-0.5"/>
+          <dgm:constr type="t" for="ch" forName="TwoNodes_1_text" refType="t" refFor="ch" refForName="TwoNodes_1"/>
+          <dgm:constr type="b" for="ch" forName="TwoNodes_1_text" refType="b" refFor="ch" refForName="TwoNodes_1"/>
+          <dgm:constr type="l" for="ch" forName="TwoNodes_1_text" refType="l" refFor="ch" refForName="TwoNodes_1"/>
+          <dgm:constr type="r" for="ch" forName="TwoNodes_2_text" refType="l" refFor="ch" refForName="TwoConn_1-2"/>
+          <dgm:constr type="t" for="ch" forName="TwoNodes_2_text" refType="t" refFor="ch" refForName="TwoNodes_2"/>
+          <dgm:constr type="b" for="ch" forName="TwoNodes_2_text" refType="b" refFor="ch" refForName="TwoNodes_2"/>
+          <dgm:constr type="l" for="ch" forName="TwoNodes_2_text" refType="l" refFor="ch" refForName="TwoNodes_2"/>
+          <dgm:constr type="w" for="ch" forName="ThreeNodes_1" refType="w" fact="0.85"/>
+          <dgm:constr type="h" for="ch" forName="ThreeNodes_1" refType="h" fact="0.3"/>
+          <dgm:constr type="t" for="ch" forName="ThreeNodes_1"/>
+          <dgm:constr type="l" for="ch" forName="ThreeNodes_1"/>
+          <dgm:constr type="w" for="ch" forName="ThreeNodes_2" refType="w" fact="0.85"/>
+          <dgm:constr type="h" for="ch" forName="ThreeNodes_2" refType="h" fact="0.3"/>
+          <dgm:constr type="ctrY" for="ch" forName="ThreeNodes_2" refType="h" fact="0.5"/>
+          <dgm:constr type="ctrX" for="ch" forName="ThreeNodes_2" refType="w" fact="0.5"/>
+          <dgm:constr type="w" for="ch" forName="ThreeNodes_3" refType="w" fact="0.85"/>
+          <dgm:constr type="h" for="ch" forName="ThreeNodes_3" refType="h" fact="0.3"/>
+          <dgm:constr type="b" for="ch" forName="ThreeNodes_3" refType="h"/>
+          <dgm:constr type="r" for="ch" forName="ThreeNodes_3" refType="w"/>
+          <dgm:constr type="w" for="ch" forName="ThreeConn_1-2" refType="h" refFor="ch" refForName="ThreeNodes_1" fact="0.65"/>
+          <dgm:constr type="h" for="ch" forName="ThreeConn_1-2" refType="h" refFor="ch" refForName="ThreeNodes_1" fact="0.65"/>
+          <dgm:constr type="ctrY" for="ch" forName="ThreeConn_1-2" refType="h" fact="0.325"/>
+          <dgm:constr type="r" for="ch" forName="ThreeConn_1-2" refType="r" refFor="ch" refForName="ThreeNodes_1"/>
+          <dgm:constr type="w" for="ch" forName="ThreeConn_2-3" refType="h" refFor="ch" refForName="ThreeNodes_2" fact="0.65"/>
+          <dgm:constr type="h" for="ch" forName="ThreeConn_2-3" refType="h" refFor="ch" refForName="ThreeNodes_2" fact="0.65"/>
+          <dgm:constr type="ctrY" for="ch" forName="ThreeConn_2-3" refType="h" fact="0.673"/>
+          <dgm:constr type="r" for="ch" forName="ThreeConn_2-3" refType="r" refFor="ch" refForName="ThreeNodes_2"/>
+          <dgm:constr type="r" for="ch" forName="ThreeNodes_1_text" refType="l" refFor="ch" refForName="ThreeConn_1-2"/>
+          <dgm:constr type="rOff" for="ch" forName="ThreeNodes_1_text" refType="w" refFor="ch" refForName="ThreeConn_1-2" fact="-0.57"/>
+          <dgm:constr type="t" for="ch" forName="ThreeNodes_1_text" refType="t" refFor="ch" refForName="ThreeNodes_1"/>
+          <dgm:constr type="b" for="ch" forName="ThreeNodes_1_text" refType="b" refFor="ch" refForName="ThreeNodes_1"/>
+          <dgm:constr type="l" for="ch" forName="ThreeNodes_1_text" refType="l" refFor="ch" refForName="ThreeNodes_1"/>
+          <dgm:constr type="r" for="ch" forName="ThreeNodes_2_text" refType="l" refFor="ch" refForName="ThreeConn_1-2"/>
+          <dgm:constr type="t" for="ch" forName="ThreeNodes_2_text" refType="t" refFor="ch" refForName="ThreeNodes_2"/>
+          <dgm:constr type="b" for="ch" forName="ThreeNodes_2_text" refType="b" refFor="ch" refForName="ThreeNodes_2"/>
+          <dgm:constr type="l" for="ch" forName="ThreeNodes_2_text" refType="l" refFor="ch" refForName="ThreeNodes_2"/>
+          <dgm:constr type="r" for="ch" forName="ThreeNodes_3_text" refType="l" refFor="ch" refForName="ThreeConn_2-3"/>
+          <dgm:constr type="t" for="ch" forName="ThreeNodes_3_text" refType="t" refFor="ch" refForName="ThreeNodes_3"/>
+          <dgm:constr type="b" for="ch" forName="ThreeNodes_3_text" refType="b" refFor="ch" refForName="ThreeNodes_3"/>
+          <dgm:constr type="l" for="ch" forName="ThreeNodes_3_text" refType="l" refFor="ch" refForName="ThreeNodes_3"/>
+          <dgm:constr type="w" for="ch" forName="FourNodes_1" refType="w" fact="0.8"/>
+          <dgm:constr type="h" for="ch" forName="FourNodes_1" refType="h" fact="0.22"/>
+          <dgm:constr type="t" for="ch" forName="FourNodes_1"/>
+          <dgm:constr type="l" for="ch" forName="FourNodes_1"/>
+          <dgm:constr type="w" for="ch" forName="FourNodes_2" refType="w" fact="0.8"/>
+          <dgm:constr type="h" for="ch" forName="FourNodes_2" refType="h" fact="0.22"/>
+          <dgm:constr type="ctrY" for="ch" forName="FourNodes_2" refType="h" fact="0.37"/>
+          <dgm:constr type="ctrX" for="ch" forName="FourNodes_2" refType="w" fact="0.467"/>
+          <dgm:constr type="w" for="ch" forName="FourNodes_3" refType="w" fact="0.8"/>
+          <dgm:constr type="h" for="ch" forName="FourNodes_3" refType="h" fact="0.22"/>
+          <dgm:constr type="ctrY" for="ch" forName="FourNodes_3" refType="h" fact="0.63"/>
+          <dgm:constr type="ctrX" for="ch" forName="FourNodes_3" refType="w" fact="0.533"/>
+          <dgm:constr type="w" for="ch" forName="FourNodes_4" refType="w" fact="0.8"/>
+          <dgm:constr type="h" for="ch" forName="FourNodes_4" refType="h" fact="0.22"/>
+          <dgm:constr type="b" for="ch" forName="FourNodes_4" refType="h"/>
+          <dgm:constr type="r" for="ch" forName="FourNodes_4" refType="w"/>
+          <dgm:constr type="w" for="ch" forName="FourConn_1-2" refType="h" refFor="ch" refForName="FourNodes_1" fact="0.65"/>
+          <dgm:constr type="h" for="ch" forName="FourConn_1-2" refType="h" refFor="ch" refForName="FourNodes_1" fact="0.65"/>
+          <dgm:constr type="ctrY" for="ch" forName="FourConn_1-2" refType="h" fact="0.24"/>
+          <dgm:constr type="r" for="ch" forName="FourConn_1-2" refType="r" refFor="ch" refForName="FourNodes_1"/>
+          <dgm:constr type="w" for="ch" forName="FourConn_2-3" refType="h" refFor="ch" refForName="FourNodes_2" fact="0.65"/>
+          <dgm:constr type="h" for="ch" forName="FourConn_2-3" refType="h" refFor="ch" refForName="FourNodes_2" fact="0.65"/>
+          <dgm:constr type="ctrY" for="ch" forName="FourConn_2-3" refType="h" fact="0.5"/>
+          <dgm:constr type="r" for="ch" forName="FourConn_2-3" refType="r" refFor="ch" refForName="FourNodes_2"/>
+          <dgm:constr type="w" for="ch" forName="FourConn_3-4" refType="h" refFor="ch" refForName="FourNodes_3" fact="0.65"/>
+          <dgm:constr type="h" for="ch" forName="FourConn_3-4" refType="h" refFor="ch" refForName="FourNodes_3" fact="0.65"/>
+          <dgm:constr type="ctrY" for="ch" forName="FourConn_3-4" refType="h" fact="0.76"/>
+          <dgm:constr type="r" for="ch" forName="FourConn_3-4" refType="r" refFor="ch" refForName="FourNodes_3"/>
+          <dgm:constr type="r" for="ch" forName="FourNodes_1_text" refType="l" refFor="ch" refForName="FourConn_1-2"/>
+          <dgm:constr type="rOff" for="ch" forName="FourNodes_1_text" refType="w" refFor="ch" refForName="FourConn_1-2" fact="-0.7"/>
+          <dgm:constr type="t" for="ch" forName="FourNodes_1_text" refType="t" refFor="ch" refForName="FourNodes_1"/>
+          <dgm:constr type="b" for="ch" forName="FourNodes_1_text" refType="b" refFor="ch" refForName="FourNodes_1"/>
+          <dgm:constr type="l" for="ch" forName="FourNodes_1_text" refType="l" refFor="ch" refForName="FourNodes_1"/>
+          <dgm:constr type="r" for="ch" forName="FourNodes_2_text" refType="l" refFor="ch" refForName="FourConn_1-2"/>
+          <dgm:constr type="t" for="ch" forName="FourNodes_2_text" refType="t" refFor="ch" refForName="FourNodes_2"/>
+          <dgm:constr type="b" for="ch" forName="FourNodes_2_text" refType="b" refFor="ch" refForName="FourNodes_2"/>
+          <dgm:constr type="l" for="ch" forName="FourNodes_2_text" refType="l" refFor="ch" refForName="FourNodes_2"/>
+          <dgm:constr type="r" for="ch" forName="FourNodes_3_text" refType="l" refFor="ch" refForName="FourConn_2-3"/>
+          <dgm:constr type="t" for="ch" forName="FourNodes_3_text" refType="t" refFor="ch" refForName="FourNodes_3"/>
+          <dgm:constr type="b" for="ch" forName="FourNodes_3_text" refType="b" refFor="ch" refForName="FourNodes_3"/>
+          <dgm:constr type="l" for="ch" forName="FourNodes_3_text" refType="l" refFor="ch" refForName="FourNodes_3"/>
+          <dgm:constr type="r" for="ch" forName="FourNodes_4_text" refType="l" refFor="ch" refForName="FourConn_3-4"/>
+          <dgm:constr type="t" for="ch" forName="FourNodes_4_text" refType="t" refFor="ch" refForName="FourNodes_4"/>
+          <dgm:constr type="b" for="ch" forName="FourNodes_4_text" refType="b" refFor="ch" refForName="FourNodes_4"/>
+          <dgm:constr type="l" for="ch" forName="FourNodes_4_text" refType="l" refFor="ch" refForName="FourNodes_4"/>
+          <dgm:constr type="w" for="ch" forName="FiveNodes_1" refType="w" fact="0.77"/>
+          <dgm:constr type="h" for="ch" forName="FiveNodes_1" refType="h" fact="0.18"/>
+          <dgm:constr type="t" for="ch" forName="FiveNodes_1"/>
+          <dgm:constr type="l" for="ch" forName="FiveNodes_1"/>
+          <dgm:constr type="w" for="ch" forName="FiveNodes_2" refType="w" fact="0.77"/>
+          <dgm:constr type="h" for="ch" forName="FiveNodes_2" refType="h" fact="0.18"/>
+          <dgm:constr type="ctrY" for="ch" forName="FiveNodes_2" refType="h" fact="0.295"/>
+          <dgm:constr type="ctrX" for="ch" forName="FiveNodes_2" refType="w" fact="0.4425"/>
+          <dgm:constr type="w" for="ch" forName="FiveNodes_3" refType="w" fact="0.77"/>
+          <dgm:constr type="h" for="ch" forName="FiveNodes_3" refType="h" fact="0.18"/>
+          <dgm:constr type="ctrY" for="ch" forName="FiveNodes_3" refType="h" fact="0.5"/>
+          <dgm:constr type="ctrX" for="ch" forName="FiveNodes_3" refType="w" fact="0.5"/>
+          <dgm:constr type="w" for="ch" forName="FiveNodes_4" refType="w" fact="0.77"/>
+          <dgm:constr type="h" for="ch" forName="FiveNodes_4" refType="h" fact="0.18"/>
+          <dgm:constr type="ctrY" for="ch" forName="FiveNodes_4" refType="h" fact="0.705"/>
+          <dgm:constr type="ctrX" for="ch" forName="FiveNodes_4" refType="w" fact="0.5575"/>
+          <dgm:constr type="w" for="ch" forName="FiveNodes_5" refType="w" fact="0.77"/>
+          <dgm:constr type="h" for="ch" forName="FiveNodes_5" refType="h" fact="0.18"/>
+          <dgm:constr type="b" for="ch" forName="FiveNodes_5" refType="h"/>
+          <dgm:constr type="r" for="ch" forName="FiveNodes_5" refType="w"/>
+          <dgm:constr type="w" for="ch" forName="FiveConn_1-2" refType="h" refFor="ch" refForName="FiveNodes_1" fact="0.65"/>
+          <dgm:constr type="h" for="ch" forName="FiveConn_1-2" refType="h" refFor="ch" refForName="FiveNodes_1" fact="0.65"/>
+          <dgm:constr type="ctrY" for="ch" forName="FiveConn_1-2" refType="h" fact="0.19"/>
+          <dgm:constr type="r" for="ch" forName="FiveConn_1-2" refType="r" refFor="ch" refForName="FiveNodes_1"/>
+          <dgm:constr type="w" for="ch" forName="FiveConn_2-3" refType="h" refFor="ch" refForName="FiveNodes_2" fact="0.65"/>
+          <dgm:constr type="h" for="ch" forName="FiveConn_2-3" refType="h" refFor="ch" refForName="FiveNodes_2" fact="0.65"/>
+          <dgm:constr type="ctrY" for="ch" forName="FiveConn_2-3" refType="h" fact="0.395"/>
+          <dgm:constr type="r" for="ch" forName="FiveConn_2-3" refType="r" refFor="ch" refForName="FiveNodes_2"/>
+          <dgm:constr type="w" for="ch" forName="FiveConn_3-4" refType="h" refFor="ch" refForName="FiveNodes_3" fact="0.65"/>
+          <dgm:constr type="h" for="ch" forName="FiveConn_3-4" refType="h" refFor="ch" refForName="FiveNodes_3" fact="0.65"/>
+          <dgm:constr type="ctrY" for="ch" forName="FiveConn_3-4" refType="h" fact="0.597"/>
+          <dgm:constr type="r" for="ch" forName="FiveConn_3-4" refType="r" refFor="ch" refForName="FiveNodes_3"/>
+          <dgm:constr type="w" for="ch" forName="FiveConn_4-5" refType="h" refFor="ch" refForName="FiveNodes_4" fact="0.65"/>
+          <dgm:constr type="h" for="ch" forName="FiveConn_4-5" refType="h" refFor="ch" refForName="FiveNodes_4" fact="0.65"/>
+          <dgm:constr type="ctrY" for="ch" forName="FiveConn_4-5" refType="h" fact="0.804"/>
+          <dgm:constr type="r" for="ch" forName="FiveConn_4-5" refType="r" refFor="ch" refForName="FiveNodes_4"/>
+          <dgm:constr type="r" for="ch" forName="FiveNodes_1_text" refType="l" refFor="ch" refForName="FiveConn_1-2"/>
+          <dgm:constr type="rOff" for="ch" forName="FiveNodes_1_text" refType="w" refFor="ch" refForName="FiveConn_1-2" fact="-0.75"/>
+          <dgm:constr type="t" for="ch" forName="FiveNodes_1_text" refType="t" refFor="ch" refForName="FiveNodes_1"/>
+          <dgm:constr type="b" for="ch" forName="FiveNodes_1_text" refType="b" refFor="ch" refForName="FiveNodes_1"/>
+          <dgm:constr type="l" for="ch" forName="FiveNodes_1_text" refType="l" refFor="ch" refForName="FiveNodes_1"/>
+          <dgm:constr type="r" for="ch" forName="FiveNodes_2_text" refType="l" refFor="ch" refForName="FiveConn_1-2"/>
+          <dgm:constr type="t" for="ch" forName="FiveNodes_2_text" refType="t" refFor="ch" refForName="FiveNodes_2"/>
+          <dgm:constr type="b" for="ch" forName="FiveNodes_2_text" refType="b" refFor="ch" refForName="FiveNodes_2"/>
+          <dgm:constr type="l" for="ch" forName="FiveNodes_2_text" refType="l" refFor="ch" refForName="FiveNodes_2"/>
+          <dgm:constr type="r" for="ch" forName="FiveNodes_3_text" refType="l" refFor="ch" refForName="FiveConn_2-3"/>
+          <dgm:constr type="t" for="ch" forName="FiveNodes_3_text" refType="t" refFor="ch" refForName="FiveNodes_3"/>
+          <dgm:constr type="b" for="ch" forName="FiveNodes_3_text" refType="b" refFor="ch" refForName="FiveNodes_3"/>
+          <dgm:constr type="l" for="ch" forName="FiveNodes_3_text" refType="l" refFor="ch" refForName="FiveNodes_3"/>
+          <dgm:constr type="r" for="ch" forName="FiveNodes_4_text" refType="l" refFor="ch" refForName="FiveConn_3-4"/>
+          <dgm:constr type="t" for="ch" forName="FiveNodes_4_text" refType="t" refFor="ch" refForName="FiveNodes_4"/>
+          <dgm:constr type="b" for="ch" forName="FiveNodes_4_text" refType="b" refFor="ch" refForName="FiveNodes_4"/>
+          <dgm:constr type="l" for="ch" forName="FiveNodes_4_text" refType="l" refFor="ch" refForName="FiveNodes_4"/>
+          <dgm:constr type="r" for="ch" forName="FiveNodes_5_text" refType="l" refFor="ch" refForName="FiveConn_4-5"/>
+          <dgm:constr type="t" for="ch" forName="FiveNodes_5_text" refType="t" refFor="ch" refForName="FiveNodes_5"/>
+          <dgm:constr type="b" for="ch" forName="FiveNodes_5_text" refType="b" refFor="ch" refForName="FiveNodes_5"/>
+          <dgm:constr type="l" for="ch" forName="FiveNodes_5_text" refType="l" refFor="ch" refForName="FiveNodes_5"/>
+        </dgm:constrLst>
+      </dgm:if>
+      <dgm:else name="Name2">
+        <dgm:constrLst>
+          <dgm:constr type="primFontSz" for="ch" ptType="node" op="equ" val="65"/>
+          <dgm:constr type="w" for="ch" forName="dummyMaxCanvas" refType="w"/>
+          <dgm:constr type="h" for="ch" forName="dummyMaxCanvas" refType="h"/>
+          <dgm:constr type="w" for="ch" forName="OneNode_1" refType="w"/>
+          <dgm:constr type="h" for="ch" forName="OneNode_1" refType="h" fact="0.5"/>
+          <dgm:constr type="ctrY" for="ch" forName="OneNode_1" refType="h" fact="0.5"/>
+          <dgm:constr type="w" for="ch" forName="TwoNodes_1" refType="w" fact="0.85"/>
+          <dgm:constr type="h" for="ch" forName="TwoNodes_1" refType="h" fact="0.45"/>
+          <dgm:constr type="t" for="ch" forName="TwoNodes_1"/>
+          <dgm:constr type="r" for="ch" forName="TwoNodes_1" refType="w"/>
+          <dgm:constr type="w" for="ch" forName="TwoNodes_2" refType="w" fact="0.85"/>
+          <dgm:constr type="h" for="ch" forName="TwoNodes_2" refType="h" fact="0.45"/>
+          <dgm:constr type="b" for="ch" forName="TwoNodes_2" refType="h"/>
+          <dgm:constr type="l" for="ch" forName="TwoNodes_2"/>
+          <dgm:constr type="w" for="ch" forName="TwoConn_1-2" refType="h" refFor="ch" refForName="TwoNodes_1" fact="0.65"/>
+          <dgm:constr type="h" for="ch" forName="TwoConn_1-2" refType="h" refFor="ch" refForName="TwoNodes_1" fact="0.65"/>
+          <dgm:constr type="ctrY" for="ch" forName="TwoConn_1-2" refType="h" fact="0.5"/>
+          <dgm:constr type="l" for="ch" forName="TwoConn_1-2" refType="l" refFor="ch" refForName="TwoNodes_1"/>
+          <dgm:constr type="l" for="ch" forName="TwoNodes_1_text" refType="r" refFor="ch" refForName="TwoConn_1-2"/>
+          <dgm:constr type="lOff" for="ch" forName="TwoNodes_1_text" refType="w" refFor="ch" refForName="TwoConn_1-2" fact="0.5"/>
+          <dgm:constr type="t" for="ch" forName="TwoNodes_1_text" refType="t" refFor="ch" refForName="TwoNodes_1"/>
+          <dgm:constr type="b" for="ch" forName="TwoNodes_1_text" refType="b" refFor="ch" refForName="TwoNodes_1"/>
+          <dgm:constr type="r" for="ch" forName="TwoNodes_1_text" refType="r" refFor="ch" refForName="TwoNodes_1"/>
+          <dgm:constr type="l" for="ch" forName="TwoNodes_2_text" refType="r" refFor="ch" refForName="TwoConn_1-2"/>
+          <dgm:constr type="t" for="ch" forName="TwoNodes_2_text" refType="t" refFor="ch" refForName="TwoNodes_2"/>
+          <dgm:constr type="b" for="ch" forName="TwoNodes_2_text" refType="b" refFor="ch" refForName="TwoNodes_2"/>
+          <dgm:constr type="r" for="ch" forName="TwoNodes_2_text" refType="r" refFor="ch" refForName="TwoNodes_2"/>
+          <dgm:constr type="w" for="ch" forName="ThreeNodes_1" refType="w" fact="0.85"/>
+          <dgm:constr type="h" for="ch" forName="ThreeNodes_1" refType="h" fact="0.3"/>
+          <dgm:constr type="t" for="ch" forName="ThreeNodes_1"/>
+          <dgm:constr type="r" for="ch" forName="ThreeNodes_1" refType="w"/>
+          <dgm:constr type="w" for="ch" forName="ThreeNodes_2" refType="w" fact="0.85"/>
+          <dgm:constr type="h" for="ch" forName="ThreeNodes_2" refType="h" fact="0.3"/>
+          <dgm:constr type="ctrY" for="ch" forName="ThreeNodes_2" refType="h" fact="0.5"/>
+          <dgm:constr type="ctrX" for="ch" forName="ThreeNodes_2" refType="w" fact="0.5"/>
+          <dgm:constr type="w" for="ch" forName="ThreeNodes_3" refType="w" fact="0.85"/>
+          <dgm:constr type="h" for="ch" forName="ThreeNodes_3" refType="h" fact="0.3"/>
+          <dgm:constr type="b" for="ch" forName="ThreeNodes_3" refType="h"/>
+          <dgm:constr type="l" for="ch" forName="ThreeNodes_3"/>
+          <dgm:constr type="w" for="ch" forName="ThreeConn_1-2" refType="h" refFor="ch" refForName="ThreeNodes_1" fact="0.65"/>
+          <dgm:constr type="h" for="ch" forName="ThreeConn_1-2" refType="h" refFor="ch" refForName="ThreeNodes_1" fact="0.65"/>
+          <dgm:constr type="ctrY" for="ch" forName="ThreeConn_1-2" refType="h" fact="0.325"/>
+          <dgm:constr type="l" for="ch" forName="ThreeConn_1-2" refType="l" refFor="ch" refForName="ThreeNodes_1"/>
+          <dgm:constr type="w" for="ch" forName="ThreeConn_2-3" refType="h" refFor="ch" refForName="ThreeNodes_2" fact="0.65"/>
+          <dgm:constr type="h" for="ch" forName="ThreeConn_2-3" refType="h" refFor="ch" refForName="ThreeNodes_2" fact="0.65"/>
+          <dgm:constr type="ctrY" for="ch" forName="ThreeConn_2-3" refType="h" fact="0.673"/>
+          <dgm:constr type="l" for="ch" forName="ThreeConn_2-3" refType="l" refFor="ch" refForName="ThreeNodes_2"/>
+          <dgm:constr type="l" for="ch" forName="ThreeNodes_1_text" refType="r" refFor="ch" refForName="ThreeConn_1-2"/>
+          <dgm:constr type="lOff" for="ch" forName="ThreeNodes_1_text" refType="w" refFor="ch" refForName="ThreeConn_1-2" fact="0.55"/>
+          <dgm:constr type="t" for="ch" forName="ThreeNodes_1_text" refType="t" refFor="ch" refForName="ThreeNodes_1"/>
+          <dgm:constr type="b" for="ch" forName="ThreeNodes_1_text" refType="b" refFor="ch" refForName="ThreeNodes_1"/>
+          <dgm:constr type="r" for="ch" forName="ThreeNodes_1_text" refType="r" refFor="ch" refForName="ThreeNodes_1"/>
+          <dgm:constr type="l" for="ch" forName="ThreeNodes_2_text" refType="r" refFor="ch" refForName="ThreeConn_1-2"/>
+          <dgm:constr type="t" for="ch" forName="ThreeNodes_2_text" refType="t" refFor="ch" refForName="ThreeNodes_2"/>
+          <dgm:constr type="b" for="ch" forName="ThreeNodes_2_text" refType="b" refFor="ch" refForName="ThreeNodes_2"/>
+          <dgm:constr type="r" for="ch" forName="ThreeNodes_2_text" refType="r" refFor="ch" refForName="ThreeNodes_2"/>
+          <dgm:constr type="l" for="ch" forName="ThreeNodes_3_text" refType="r" refFor="ch" refForName="ThreeConn_2-3"/>
+          <dgm:constr type="t" for="ch" forName="ThreeNodes_3_text" refType="t" refFor="ch" refForName="ThreeNodes_3"/>
+          <dgm:constr type="b" for="ch" forName="ThreeNodes_3_text" refType="b" refFor="ch" refForName="ThreeNodes_3"/>
+          <dgm:constr type="r" for="ch" forName="ThreeNodes_3_text" refType="r" refFor="ch" refForName="ThreeNodes_3"/>
+          <dgm:constr type="w" for="ch" forName="FourNodes_1" refType="w" fact="0.8"/>
+          <dgm:constr type="h" for="ch" forName="FourNodes_1" refType="h" fact="0.22"/>
+          <dgm:constr type="t" for="ch" forName="FourNodes_1"/>
+          <dgm:constr type="r" for="ch" forName="FourNodes_1" refType="w"/>
+          <dgm:constr type="w" for="ch" forName="FourNodes_2" refType="w" fact="0.8"/>
+          <dgm:constr type="h" for="ch" forName="FourNodes_2" refType="h" fact="0.22"/>
+          <dgm:constr type="ctrY" for="ch" forName="FourNodes_2" refType="h" fact="0.37"/>
+          <dgm:constr type="ctrX" for="ch" forName="FourNodes_2" refType="w" fact="0.533"/>
+          <dgm:constr type="w" for="ch" forName="FourNodes_3" refType="w" fact="0.8"/>
+          <dgm:constr type="h" for="ch" forName="FourNodes_3" refType="h" fact="0.22"/>
+          <dgm:constr type="ctrY" for="ch" forName="FourNodes_3" refType="h" fact="0.63"/>
+          <dgm:constr type="ctrX" for="ch" forName="FourNodes_3" refType="w" fact="0.467"/>
+          <dgm:constr type="w" for="ch" forName="FourNodes_4" refType="w" fact="0.8"/>
+          <dgm:constr type="h" for="ch" forName="FourNodes_4" refType="h" fact="0.22"/>
+          <dgm:constr type="b" for="ch" forName="FourNodes_4" refType="h"/>
+          <dgm:constr type="l" for="ch" forName="FourNodes_4"/>
+          <dgm:constr type="w" for="ch" forName="FourConn_1-2" refType="h" refFor="ch" refForName="FourNodes_1" fact="0.65"/>
+          <dgm:constr type="h" for="ch" forName="FourConn_1-2" refType="h" refFor="ch" refForName="FourNodes_1" fact="0.65"/>
+          <dgm:constr type="ctrY" for="ch" forName="FourConn_1-2" refType="h" fact="0.24"/>
+          <dgm:constr type="l" for="ch" forName="FourConn_1-2" refType="l" refFor="ch" refForName="FourNodes_1"/>
+          <dgm:constr type="w" for="ch" forName="FourConn_2-3" refType="h" refFor="ch" refForName="FourNodes_2" fact="0.65"/>
+          <dgm:constr type="h" for="ch" forName="FourConn_2-3" refType="h" refFor="ch" refForName="FourNodes_2" fact="0.65"/>
+          <dgm:constr type="ctrY" for="ch" forName="FourConn_2-3" refType="h" fact="0.5"/>
+          <dgm:constr type="l" for="ch" forName="FourConn_2-3" refType="l" refFor="ch" refForName="FourNodes_2"/>
+          <dgm:constr type="w" for="ch" forName="FourConn_3-4" refType="h" refFor="ch" refForName="FourNodes_3" fact="0.65"/>
+          <dgm:constr type="h" for="ch" forName="FourConn_3-4" refType="h" refFor="ch" refForName="FourNodes_3" fact="0.65"/>
+          <dgm:constr type="ctrY" for="ch" forName="FourConn_3-4" refType="h" fact="0.76"/>
+          <dgm:constr type="l" for="ch" forName="FourConn_3-4" refType="l" refFor="ch" refForName="FourNodes_3"/>
+          <dgm:constr type="l" for="ch" forName="FourNodes_1_text" refType="r" refFor="ch" refForName="FourConn_1-2"/>
+          <dgm:constr type="lOff" for="ch" forName="FourNodes_1_text" refType="w" refFor="ch" refForName="FourConn_1-2" fact="0.69"/>
+          <dgm:constr type="t" for="ch" forName="FourNodes_1_text" refType="t" refFor="ch" refForName="FourNodes_1"/>
+          <dgm:constr type="b" for="ch" forName="FourNodes_1_text" refType="b" refFor="ch" refForName="FourNodes_1"/>
+          <dgm:constr type="r" for="ch" forName="FourNodes_1_text" refType="r" refFor="ch" refForName="FourNodes_1"/>
+          <dgm:constr type="l" for="ch" forName="FourNodes_2_text" refType="r" refFor="ch" refForName="FourConn_1-2"/>
+          <dgm:constr type="t" for="ch" forName="FourNodes_2_text" refType="t" refFor="ch" refForName="FourNodes_2"/>
+          <dgm:constr type="b" for="ch" forName="FourNodes_2_text" refType="b" refFor="ch" refForName="FourNodes_2"/>
+          <dgm:constr type="r" for="ch" forName="FourNodes_2_text" refType="r" refFor="ch" refForName="FourNodes_2"/>
+          <dgm:constr type="l" for="ch" forName="FourNodes_3_text" refType="r" refFor="ch" refForName="FourConn_2-3"/>
+          <dgm:constr type="t" for="ch" forName="FourNodes_3_text" refType="t" refFor="ch" refForName="FourNodes_3"/>
+          <dgm:constr type="b" for="ch" forName="FourNodes_3_text" refType="b" refFor="ch" refForName="FourNodes_3"/>
+          <dgm:constr type="r" for="ch" forName="FourNodes_3_text" refType="r" refFor="ch" refForName="FourNodes_3"/>
+          <dgm:constr type="l" for="ch" forName="FourNodes_4_text" refType="r" refFor="ch" refForName="FourConn_3-4"/>
+          <dgm:constr type="t" for="ch" forName="FourNodes_4_text" refType="t" refFor="ch" refForName="FourNodes_4"/>
+          <dgm:constr type="b" for="ch" forName="FourNodes_4_text" refType="b" refFor="ch" refForName="FourNodes_4"/>
+          <dgm:constr type="r" for="ch" forName="FourNodes_4_text" refType="r" refFor="ch" refForName="FourNodes_4"/>
+          <dgm:constr type="w" for="ch" forName="FiveNodes_1" refType="w" fact="0.77"/>
+          <dgm:constr type="h" for="ch" forName="FiveNodes_1" refType="h" fact="0.18"/>
+          <dgm:constr type="t" for="ch" forName="FiveNodes_1"/>
+          <dgm:constr type="r" for="ch" forName="FiveNodes_1" refType="w"/>
+          <dgm:constr type="w" for="ch" forName="FiveNodes_2" refType="w" fact="0.77"/>
+          <dgm:constr type="h" for="ch" forName="FiveNodes_2" refType="h" fact="0.18"/>
+          <dgm:constr type="ctrY" for="ch" forName="FiveNodes_2" refType="h" fact="0.295"/>
+          <dgm:constr type="ctrX" for="ch" forName="FiveNodes_2" refType="w" fact="0.5575"/>
+          <dgm:constr type="w" for="ch" forName="FiveNodes_3" refType="w" fact="0.77"/>
+          <dgm:constr type="h" for="ch" forName="FiveNodes_3" refType="h" fact="0.18"/>
+          <dgm:constr type="ctrY" for="ch" forName="FiveNodes_3" refType="h" fact="0.5"/>
+          <dgm:constr type="ctrX" for="ch" forName="FiveNodes_3" refType="w" fact="0.5"/>
+          <dgm:constr type="w" for="ch" forName="FiveNodes_4" refType="w" fact="0.77"/>
+          <dgm:constr type="h" for="ch" forName="FiveNodes_4" refType="h" fact="0.18"/>
+          <dgm:constr type="ctrY" for="ch" forName="FiveNodes_4" refType="h" fact="0.705"/>
+          <dgm:constr type="ctrX" for="ch" forName="FiveNodes_4" refType="w" fact="0.4425"/>
+          <dgm:constr type="w" for="ch" forName="FiveNodes_5" refType="w" fact="0.77"/>
+          <dgm:constr type="h" for="ch" forName="FiveNodes_5" refType="h" fact="0.18"/>
+          <dgm:constr type="b" for="ch" forName="FiveNodes_5" refType="h"/>
+          <dgm:constr type="l" for="ch" forName="FiveNodes_5"/>
+          <dgm:constr type="w" for="ch" forName="FiveConn_1-2" refType="h" refFor="ch" refForName="FiveNodes_1" fact="0.65"/>
+          <dgm:constr type="h" for="ch" forName="FiveConn_1-2" refType="h" refFor="ch" refForName="FiveNodes_1" fact="0.65"/>
+          <dgm:constr type="ctrY" for="ch" forName="FiveConn_1-2" refType="h" fact="0.19"/>
+          <dgm:constr type="l" for="ch" forName="FiveConn_1-2" refType="l" refFor="ch" refForName="FiveNodes_1"/>
+          <dgm:constr type="w" for="ch" forName="FiveConn_2-3" refType="h" refFor="ch" refForName="FiveNodes_2" fact="0.65"/>
+          <dgm:constr type="h" for="ch" forName="FiveConn_2-3" refType="h" refFor="ch" refForName="FiveNodes_2" fact="0.65"/>
+          <dgm:constr type="ctrY" for="ch" forName="FiveConn_2-3" refType="h" fact="0.395"/>
+          <dgm:constr type="l" for="ch" forName="FiveConn_2-3" refType="l" refFor="ch" refForName="FiveNodes_2"/>
+          <dgm:constr type="w" for="ch" forName="FiveConn_3-4" refType="h" refFor="ch" refForName="FiveNodes_3" fact="0.65"/>
+          <dgm:constr type="h" for="ch" forName="FiveConn_3-4" refType="h" refFor="ch" refForName="FiveNodes_3" fact="0.65"/>
+          <dgm:constr type="ctrY" for="ch" forName="FiveConn_3-4" refType="h" fact="0.597"/>
+          <dgm:constr type="l" for="ch" forName="FiveConn_3-4" refType="l" refFor="ch" refForName="FiveNodes_3"/>
+          <dgm:constr type="w" for="ch" forName="FiveConn_4-5" refType="h" refFor="ch" refForName="FiveNodes_4" fact="0.65"/>
+          <dgm:constr type="h" for="ch" forName="FiveConn_4-5" refType="h" refFor="ch" refForName="FiveNodes_4" fact="0.65"/>
+          <dgm:constr type="ctrY" for="ch" forName="FiveConn_4-5" refType="h" fact="0.804"/>
+          <dgm:constr type="l" for="ch" forName="FiveConn_4-5" refType="l" refFor="ch" refForName="FiveNodes_4"/>
+          <dgm:constr type="l" for="ch" forName="FiveNodes_1_text" refType="r" refFor="ch" refForName="FiveConn_1-2"/>
+          <dgm:constr type="lOff" for="ch" forName="FiveNodes_1_text" refType="w" refFor="ch" refForName="FiveConn_1-2" fact="0.73"/>
+          <dgm:constr type="t" for="ch" forName="FiveNodes_1_text" refType="t" refFor="ch" refForName="FiveNodes_1"/>
+          <dgm:constr type="b" for="ch" forName="FiveNodes_1_text" refType="b" refFor="ch" refForName="FiveNodes_1"/>
+          <dgm:constr type="r" for="ch" forName="FiveNodes_1_text" refType="r" refFor="ch" refForName="FiveNodes_1"/>
+          <dgm:constr type="l" for="ch" forName="FiveNodes_2_text" refType="r" refFor="ch" refForName="FiveConn_1-2"/>
+          <dgm:constr type="t" for="ch" forName="FiveNodes_2_text" refType="t" refFor="ch" refForName="FiveNodes_2"/>
+          <dgm:constr type="b" for="ch" forName="FiveNodes_2_text" refType="b" refFor="ch" refForName="FiveNodes_2"/>
+          <dgm:constr type="r" for="ch" forName="FiveNodes_2_text" refType="r" refFor="ch" refForName="FiveNodes_2"/>
+          <dgm:constr type="l" for="ch" forName="FiveNodes_3_text" refType="r" refFor="ch" refForName="FiveConn_2-3"/>
+          <dgm:constr type="t" for="ch" forName="FiveNodes_3_text" refType="t" refFor="ch" refForName="FiveNodes_3"/>
+          <dgm:constr type="b" for="ch" forName="FiveNodes_3_text" refType="b" refFor="ch" refForName="FiveNodes_3"/>
+          <dgm:constr type="r" for="ch" forName="FiveNodes_3_text" refType="r" refFor="ch" refForName="FiveNodes_3"/>
+          <dgm:constr type="l" for="ch" forName="FiveNodes_4_text" refType="r" refFor="ch" refForName="FiveConn_3-4"/>
+          <dgm:constr type="t" for="ch" forName="FiveNodes_4_text" refType="t" refFor="ch" refForName="FiveNodes_4"/>
+          <dgm:constr type="b" for="ch" forName="FiveNodes_4_text" refType="b" refFor="ch" refForName="FiveNodes_4"/>
+          <dgm:constr type="r" for="ch" forName="FiveNodes_4_text" refType="r" refFor="ch" refForName="FiveNodes_4"/>
+          <dgm:constr type="l" for="ch" forName="FiveNodes_5_text" refType="r" refFor="ch" refForName="FiveConn_4-5"/>
+          <dgm:constr type="t" for="ch" forName="FiveNodes_5_text" refType="t" refFor="ch" refForName="FiveNodes_5"/>
+          <dgm:constr type="b" for="ch" forName="FiveNodes_5_text" refType="b" refFor="ch" refForName="FiveNodes_5"/>
+          <dgm:constr type="r" for="ch" forName="FiveNodes_5_text" refType="r" refFor="ch" refForName="FiveNodes_5"/>
+        </dgm:constrLst>
+      </dgm:else>
+    </dgm:choose>
+    <dgm:ruleLst/>
+    <dgm:layoutNode name="dummyMaxCanvas">
+      <dgm:varLst/>
+      <dgm:alg type="sp"/>
+      <dgm:shape xmlns:r="http://schemas.openxmlformats.org/officeDocument/2006/relationships" r:blip="">
+        <dgm:adjLst/>
+      </dgm:shape>
+      <dgm:presOf/>
+      <dgm:constrLst/>
+      <dgm:ruleLst/>
+    </dgm:layoutNode>
+    <dgm:choose name="Name3">
+      <dgm:if name="Name4" axis="ch" ptType="node" func="cnt" op="equ" val="1">
+        <dgm:layoutNode name="OneNode_1">
+          <dgm:varLst>
+            <dgm:bulletEnabled val="1"/>
+          </dgm:varLst>
+          <dgm:alg type="tx"/>
+          <dgm:shape xmlns:r="http://schemas.openxmlformats.org/officeDocument/2006/relationships" type="roundRect" r:blip="">
+            <dgm:adjLst>
+              <dgm:adj idx="1" val="0.1"/>
+            </dgm:adjLst>
+          </dgm:shape>
+          <dgm:presOf axis="ch desOrSelf" ptType="node node" st="1 1" cnt="1 0"/>
+          <dgm:constrLst>
+            <dgm:constr type="lMarg" refType="primFontSz" fact="0.3"/>
+            <dgm:constr type="rMarg" refType="primFontSz" fact="0.3"/>
+            <dgm:constr type="tMarg" refType="primFontSz" fact="0.3"/>
+            <dgm:constr type="bMarg" refType="primFontSz" fact="0.3"/>
+          </dgm:constrLst>
+          <dgm:ruleLst>
+            <dgm:rule type="primFontSz" val="5" fact="NaN" max="NaN"/>
+          </dgm:ruleLst>
+        </dgm:layoutNode>
+      </dgm:if>
+      <dgm:else name="Name5">
+        <dgm:choose name="Name6">
+          <dgm:if name="Name7" axis="ch" ptType="node" func="cnt" op="equ" val="2">
+            <dgm:layoutNode name="TwoNodes_1">
+              <dgm:varLst>
+                <dgm:bulletEnabled val="1"/>
+              </dgm:varLst>
+              <dgm:alg type="sp"/>
+              <dgm:shape xmlns:r="http://schemas.openxmlformats.org/officeDocument/2006/relationships" type="roundRect" r:blip="">
+                <dgm:adjLst>
+                  <dgm:adj idx="1" val="0.1"/>
+                </dgm:adjLst>
+              </dgm:shape>
+              <dgm:presOf axis="ch desOrSelf" ptType="node node" st="1 1" cnt="1 0"/>
+              <dgm:constrLst/>
+              <dgm:ruleLst/>
+            </dgm:layoutNode>
+            <dgm:layoutNode name="TwoNodes_2">
+              <dgm:varLst>
+                <dgm:bulletEnabled val="1"/>
+              </dgm:varLst>
+              <dgm:alg type="sp"/>
+              <dgm:shape xmlns:r="http://schemas.openxmlformats.org/officeDocument/2006/relationships" type="roundRect" r:blip="">
+                <dgm:adjLst>
+                  <dgm:adj idx="1" val="0.1"/>
+                </dgm:adjLst>
+              </dgm:shape>
+              <dgm:presOf axis="ch desOrSelf" ptType="node node" st="2 1" cnt="1 0"/>
+              <dgm:constrLst/>
+              <dgm:ruleLst/>
+            </dgm:layoutNode>
+            <dgm:layoutNode name="TwoConn_1-2" styleLbl="fgAccFollowNode1">
+              <dgm:varLst>
+                <dgm:bulletEnabled val="1"/>
+              </dgm:varLst>
+              <dgm:alg type="tx"/>
+              <dgm:shape xmlns:r="http://schemas.openxmlformats.org/officeDocument/2006/relationships" type="downArrow" r:blip="">
+                <dgm:adjLst>
+                  <dgm:adj idx="1" val="0.55"/>
+                  <dgm:adj idx="2" val="0.45"/>
+                </dgm:adjLst>
+              </dgm:shape>
+              <dgm:presOf axis="ch" ptType="sibTrans" cnt="1"/>
+              <dgm:constrLst>
+                <dgm:constr type="lMarg" refType="primFontSz" fact="0.1"/>
+                <dgm:constr type="rMarg" refType="primFontSz" fact="0.1"/>
+                <dgm:constr type="tMarg" refType="primFontSz" fact="0.1"/>
+                <dgm:constr type="bMarg" refType="primFontSz" fact="0.1"/>
+              </dgm:constrLst>
+              <dgm:ruleLst>
+                <dgm:rule type="primFontSz" val="5" fact="NaN" max="NaN"/>
+              </dgm:ruleLst>
+            </dgm:layoutNode>
+            <dgm:layoutNode name="TwoNodes_1_text">
+              <dgm:varLst>
+                <dgm:bulletEnabled val="1"/>
+              </dgm:varLst>
+              <dgm:alg type="tx">
+                <dgm:param type="parTxLTRAlign" val="l"/>
+                <dgm:param type="txAnchorVertCh" val="mid"/>
+              </dgm:alg>
+              <dgm:shape xmlns:r="http://schemas.openxmlformats.org/officeDocument/2006/relationships" type="roundRect" r:blip="" hideGeom="1">
+                <dgm:adjLst>
+                  <dgm:adj idx="1" val="0.1"/>
+                </dgm:adjLst>
+              </dgm:shape>
+              <dgm:presOf axis="ch desOrSelf" ptType="node node" st="1 1" cnt="1 0"/>
+              <dgm:constrLst>
+                <dgm:constr type="lMarg" refType="primFontSz" fact="0.3"/>
+                <dgm:constr type="rMarg" refType="primFontSz" fact="0.3"/>
+                <dgm:constr type="tMarg" refType="primFontSz" fact="0.3"/>
+                <dgm:constr type="bMarg" refType="primFontSz" fact="0.3"/>
+              </dgm:constrLst>
+              <dgm:ruleLst>
+                <dgm:rule type="primFontSz" val="5" fact="NaN" max="NaN"/>
+              </dgm:ruleLst>
+            </dgm:layoutNode>
+            <dgm:layoutNode name="TwoNodes_2_text">
+              <dgm:varLst>
+                <dgm:bulletEnabled val="1"/>
+              </dgm:varLst>
+              <dgm:alg type="tx">
+                <dgm:param type="parTxLTRAlign" val="l"/>
+                <dgm:param type="txAnchorVertCh" val="mid"/>
+              </dgm:alg>
+              <dgm:shape xmlns:r="http://schemas.openxmlformats.org/officeDocument/2006/relationships" type="roundRect" r:blip="" hideGeom="1">
+                <dgm:adjLst>
+                  <dgm:adj idx="1" val="0.1"/>
+                </dgm:adjLst>
+              </dgm:shape>
+              <dgm:presOf axis="ch desOrSelf" ptType="node node" st="2 1" cnt="1 0"/>
+              <dgm:constrLst>
+                <dgm:constr type="lMarg" refType="primFontSz" fact="0.3"/>
+                <dgm:constr type="rMarg" refType="primFontSz" fact="0.3"/>
+                <dgm:constr type="tMarg" refType="primFontSz" fact="0.3"/>
+                <dgm:constr type="bMarg" refType="primFontSz" fact="0.3"/>
+              </dgm:constrLst>
+              <dgm:ruleLst>
+                <dgm:rule type="primFontSz" val="5" fact="NaN" max="NaN"/>
+              </dgm:ruleLst>
+            </dgm:layoutNode>
+          </dgm:if>
+          <dgm:else name="Name8">
+            <dgm:choose name="Name9">
+              <dgm:if name="Name10" axis="ch" ptType="node" func="cnt" op="equ" val="3">
+                <dgm:layoutNode name="ThreeNodes_1">
+                  <dgm:varLst>
+                    <dgm:bulletEnabled val="1"/>
+                  </dgm:varLst>
+                  <dgm:alg type="sp"/>
+                  <dgm:shape xmlns:r="http://schemas.openxmlformats.org/officeDocument/2006/relationships" type="roundRect" r:blip="">
+                    <dgm:adjLst>
+                      <dgm:adj idx="1" val="0.1"/>
+                    </dgm:adjLst>
+                  </dgm:shape>
+                  <dgm:presOf axis="ch desOrSelf" ptType="node node" st="1 1" cnt="1 0"/>
+                  <dgm:constrLst/>
+                  <dgm:ruleLst/>
+                </dgm:layoutNode>
+                <dgm:layoutNode name="ThreeNodes_2">
+                  <dgm:varLst>
+                    <dgm:bulletEnabled val="1"/>
+                  </dgm:varLst>
+                  <dgm:alg type="sp"/>
+                  <dgm:shape xmlns:r="http://schemas.openxmlformats.org/officeDocument/2006/relationships" type="roundRect" r:blip="">
+                    <dgm:adjLst>
+                      <dgm:adj idx="1" val="0.1"/>
+                    </dgm:adjLst>
+                  </dgm:shape>
+                  <dgm:presOf axis="ch desOrSelf" ptType="node node" st="2 1" cnt="1 0"/>
+                  <dgm:constrLst/>
+                  <dgm:ruleLst/>
+                </dgm:layoutNode>
+                <dgm:layoutNode name="ThreeNodes_3">
+                  <dgm:varLst>
+                    <dgm:bulletEnabled val="1"/>
+                  </dgm:varLst>
+                  <dgm:alg type="sp"/>
+                  <dgm:shape xmlns:r="http://schemas.openxmlformats.org/officeDocument/2006/relationships" type="roundRect" r:blip="">
+                    <dgm:adjLst>
+                      <dgm:adj idx="1" val="0.1"/>
+                    </dgm:adjLst>
+                  </dgm:shape>
+                  <dgm:presOf axis="ch desOrSelf" ptType="node node" st="3 1" cnt="1 0"/>
+                  <dgm:constrLst/>
+                  <dgm:ruleLst/>
+                </dgm:layoutNode>
+                <dgm:layoutNode name="ThreeConn_1-2" styleLbl="fgAccFollowNode1">
+                  <dgm:varLst>
+                    <dgm:bulletEnabled val="1"/>
+                  </dgm:varLst>
+                  <dgm:alg type="tx"/>
+                  <dgm:shape xmlns:r="http://schemas.openxmlformats.org/officeDocument/2006/relationships" type="downArrow" r:blip="">
+                    <dgm:adjLst>
+                      <dgm:adj idx="1" val="0.55"/>
+                      <dgm:adj idx="2" val="0.45"/>
+                    </dgm:adjLst>
+                  </dgm:shape>
+                  <dgm:presOf axis="ch" ptType="sibTrans" cnt="1"/>
+                  <dgm:constrLst>
+                    <dgm:constr type="lMarg" refType="primFontSz" fact="0.1"/>
+                    <dgm:constr type="rMarg" refType="primFontSz" fact="0.1"/>
+                    <dgm:constr type="tMarg" refType="primFontSz" fact="0.1"/>
+                    <dgm:constr type="bMarg" refType="primFontSz" fact="0.1"/>
+                  </dgm:constrLst>
+                  <dgm:ruleLst>
+                    <dgm:rule type="primFontSz" val="5" fact="NaN" max="NaN"/>
+                  </dgm:ruleLst>
+                </dgm:layoutNode>
+                <dgm:layoutNode name="ThreeConn_2-3" styleLbl="fgAccFollowNode1">
+                  <dgm:varLst>
+                    <dgm:bulletEnabled val="1"/>
+                  </dgm:varLst>
+                  <dgm:alg type="tx"/>
+                  <dgm:shape xmlns:r="http://schemas.openxmlformats.org/officeDocument/2006/relationships" type="downArrow" r:blip="">
+                    <dgm:adjLst>
+                      <dgm:adj idx="1" val="0.55"/>
+                      <dgm:adj idx="2" val="0.45"/>
+                    </dgm:adjLst>
+                  </dgm:shape>
+                  <dgm:presOf axis="ch" ptType="sibTrans" st="2" cnt="1"/>
+                  <dgm:constrLst>
+                    <dgm:constr type="lMarg" refType="primFontSz" fact="0.1"/>
+                    <dgm:constr type="rMarg" refType="primFontSz" fact="0.1"/>
+                    <dgm:constr type="tMarg" refType="primFontSz" fact="0.1"/>
+                    <dgm:constr type="bMarg" refType="primFontSz" fact="0.1"/>
+                  </dgm:constrLst>
+                  <dgm:ruleLst>
+                    <dgm:rule type="primFontSz" val="5" fact="NaN" max="NaN"/>
+                  </dgm:ruleLst>
+                </dgm:layoutNode>
+                <dgm:layoutNode name="ThreeNodes_1_text">
+                  <dgm:varLst>
+                    <dgm:bulletEnabled val="1"/>
+                  </dgm:varLst>
+                  <dgm:alg type="tx">
+                    <dgm:param type="parTxLTRAlign" val="l"/>
+                    <dgm:param type="txAnchorVertCh" val="mid"/>
+                  </dgm:alg>
+                  <dgm:shape xmlns:r="http://schemas.openxmlformats.org/officeDocument/2006/relationships" type="roundRect" r:blip="" hideGeom="1">
+                    <dgm:adjLst>
+                      <dgm:adj idx="1" val="0.1"/>
+                    </dgm:adjLst>
+                  </dgm:shape>
+                  <dgm:presOf axis="ch desOrSelf" ptType="node node" st="1 1" cnt="1 0"/>
+                  <dgm:constrLst>
+                    <dgm:constr type="lMarg" refType="primFontSz" fact="0.3"/>
+                    <dgm:constr type="rMarg" refType="primFontSz" fact="0.3"/>
+                    <dgm:constr type="tMarg" refType="primFontSz" fact="0.3"/>
+                    <dgm:constr type="bMarg" refType="primFontSz" fact="0.3"/>
+                  </dgm:constrLst>
+                  <dgm:ruleLst>
+                    <dgm:rule type="primFontSz" val="5" fact="NaN" max="NaN"/>
+                  </dgm:ruleLst>
+                </dgm:layoutNode>
+                <dgm:layoutNode name="ThreeNodes_2_text">
+                  <dgm:varLst>
+                    <dgm:bulletEnabled val="1"/>
+                  </dgm:varLst>
+                  <dgm:alg type="tx">
+                    <dgm:param type="parTxLTRAlign" val="l"/>
+                    <dgm:param type="txAnchorVertCh" val="mid"/>
+                  </dgm:alg>
+                  <dgm:shape xmlns:r="http://schemas.openxmlformats.org/officeDocument/2006/relationships" type="roundRect" r:blip="" hideGeom="1">
+                    <dgm:adjLst>
+                      <dgm:adj idx="1" val="0.1"/>
+                    </dgm:adjLst>
+                  </dgm:shape>
+                  <dgm:presOf axis="ch desOrSelf" ptType="node node" st="2 1" cnt="1 0"/>
+                  <dgm:constrLst>
+                    <dgm:constr type="lMarg" refType="primFontSz" fact="0.3"/>
+                    <dgm:constr type="rMarg" refType="primFontSz" fact="0.3"/>
+                    <dgm:constr type="tMarg" refType="primFontSz" fact="0.3"/>
+                    <dgm:constr type="bMarg" refType="primFontSz" fact="0.3"/>
+                  </dgm:constrLst>
+                  <dgm:ruleLst>
+                    <dgm:rule type="primFontSz" val="5" fact="NaN" max="NaN"/>
+                  </dgm:ruleLst>
+                </dgm:layoutNode>
+                <dgm:layoutNode name="ThreeNodes_3_text">
+                  <dgm:varLst>
+                    <dgm:bulletEnabled val="1"/>
+                  </dgm:varLst>
+                  <dgm:alg type="tx">
+                    <dgm:param type="parTxLTRAlign" val="l"/>
+                    <dgm:param type="txAnchorVertCh" val="mid"/>
+                  </dgm:alg>
+                  <dgm:shape xmlns:r="http://schemas.openxmlformats.org/officeDocument/2006/relationships" type="roundRect" r:blip="" hideGeom="1">
+                    <dgm:adjLst>
+                      <dgm:adj idx="1" val="0.1"/>
+                    </dgm:adjLst>
+                  </dgm:shape>
+                  <dgm:presOf axis="ch desOrSelf" ptType="node node" st="3 1" cnt="1 0"/>
+                  <dgm:constrLst>
+                    <dgm:constr type="lMarg" refType="primFontSz" fact="0.3"/>
+                    <dgm:constr type="rMarg" refType="primFontSz" fact="0.3"/>
+                    <dgm:constr type="tMarg" refType="primFontSz" fact="0.3"/>
+                    <dgm:constr type="bMarg" refType="primFontSz" fact="0.3"/>
+                  </dgm:constrLst>
+                  <dgm:ruleLst>
+                    <dgm:rule type="primFontSz" val="5" fact="NaN" max="NaN"/>
+                  </dgm:ruleLst>
+                </dgm:layoutNode>
+              </dgm:if>
+              <dgm:else name="Name11">
+                <dgm:choose name="Name12">
+                  <dgm:if name="Name13" axis="ch" ptType="node" func="cnt" op="equ" val="4">
+                    <dgm:layoutNode name="FourNodes_1">
+                      <dgm:varLst>
+                        <dgm:bulletEnabled val="1"/>
+                      </dgm:varLst>
+                      <dgm:alg type="sp"/>
+                      <dgm:shape xmlns:r="http://schemas.openxmlformats.org/officeDocument/2006/relationships" type="roundRect" r:blip="">
+                        <dgm:adjLst>
+                          <dgm:adj idx="1" val="0.1"/>
+                        </dgm:adjLst>
+                      </dgm:shape>
+                      <dgm:presOf axis="ch desOrSelf" ptType="node node" st="1 1" cnt="1 0"/>
+                      <dgm:constrLst/>
+                      <dgm:ruleLst/>
+                    </dgm:layoutNode>
+                    <dgm:layoutNode name="FourNodes_2">
+                      <dgm:varLst>
+                        <dgm:bulletEnabled val="1"/>
+                      </dgm:varLst>
+                      <dgm:alg type="sp"/>
+                      <dgm:shape xmlns:r="http://schemas.openxmlformats.org/officeDocument/2006/relationships" type="roundRect" r:blip="">
+                        <dgm:adjLst>
+                          <dgm:adj idx="1" val="0.1"/>
+                        </dgm:adjLst>
+                      </dgm:shape>
+                      <dgm:presOf axis="ch desOrSelf" ptType="node node" st="2 1" cnt="1 0"/>
+                      <dgm:constrLst/>
+                      <dgm:ruleLst/>
+                    </dgm:layoutNode>
+                    <dgm:layoutNode name="FourNodes_3">
+                      <dgm:varLst>
+                        <dgm:bulletEnabled val="1"/>
+                      </dgm:varLst>
+                      <dgm:alg type="sp"/>
+                      <dgm:shape xmlns:r="http://schemas.openxmlformats.org/officeDocument/2006/relationships" type="roundRect" r:blip="">
+                        <dgm:adjLst>
+                          <dgm:adj idx="1" val="0.1"/>
+                        </dgm:adjLst>
+                      </dgm:shape>
+                      <dgm:presOf axis="ch desOrSelf" ptType="node node" st="3 1" cnt="1 0"/>
+                      <dgm:constrLst/>
+                      <dgm:ruleLst/>
+                    </dgm:layoutNode>
+                    <dgm:layoutNode name="FourNodes_4">
+                      <dgm:varLst>
+                        <dgm:bulletEnabled val="1"/>
+                      </dgm:varLst>
+                      <dgm:alg type="sp"/>
+                      <dgm:shape xmlns:r="http://schemas.openxmlformats.org/officeDocument/2006/relationships" type="roundRect" r:blip="">
+                        <dgm:adjLst>
+                          <dgm:adj idx="1" val="0.1"/>
+                        </dgm:adjLst>
+                      </dgm:shape>
+                      <dgm:presOf axis="ch desOrSelf" ptType="node node" st="4 1" cnt="1 0"/>
+                      <dgm:constrLst/>
+                      <dgm:ruleLst/>
+                    </dgm:layoutNode>
+                    <dgm:layoutNode name="FourConn_1-2" styleLbl="fgAccFollowNode1">
+                      <dgm:varLst>
+                        <dgm:bulletEnabled val="1"/>
+                      </dgm:varLst>
+                      <dgm:alg type="tx"/>
+                      <dgm:shape xmlns:r="http://schemas.openxmlformats.org/officeDocument/2006/relationships" type="downArrow" r:blip="">
+                        <dgm:adjLst>
+                          <dgm:adj idx="1" val="0.55"/>
+                          <dgm:adj idx="2" val="0.45"/>
+                        </dgm:adjLst>
+                      </dgm:shape>
+                      <dgm:presOf axis="ch" ptType="sibTrans" cnt="1"/>
+                      <dgm:constrLst>
+                        <dgm:constr type="lMarg" refType="primFontSz" fact="0.1"/>
+                        <dgm:constr type="rMarg" refType="primFontSz" fact="0.1"/>
+                        <dgm:constr type="tMarg" refType="primFontSz" fact="0.1"/>
+                        <dgm:constr type="bMarg" refType="primFontSz" fact="0.1"/>
+                      </dgm:constrLst>
+                      <dgm:ruleLst>
+                        <dgm:rule type="primFontSz" val="5" fact="NaN" max="NaN"/>
+                      </dgm:ruleLst>
+                    </dgm:layoutNode>
+                    <dgm:layoutNode name="FourConn_2-3" styleLbl="fgAccFollowNode1">
+                      <dgm:varLst>
+                        <dgm:bulletEnabled val="1"/>
+                      </dgm:varLst>
+                      <dgm:alg type="tx"/>
+                      <dgm:shape xmlns:r="http://schemas.openxmlformats.org/officeDocument/2006/relationships" type="downArrow" r:blip="">
+                        <dgm:adjLst>
+                          <dgm:adj idx="1" val="0.55"/>
+                          <dgm:adj idx="2" val="0.45"/>
+                        </dgm:adjLst>
+                      </dgm:shape>
+                      <dgm:presOf axis="ch" ptType="sibTrans" st="2" cnt="1"/>
+                      <dgm:constrLst>
+                        <dgm:constr type="lMarg" refType="primFontSz" fact="0.1"/>
+                        <dgm:constr type="rMarg" refType="primFontSz" fact="0.1"/>
+                        <dgm:constr type="tMarg" refType="primFontSz" fact="0.1"/>
+                        <dgm:constr type="bMarg" refType="primFontSz" fact="0.1"/>
+                      </dgm:constrLst>
+                      <dgm:ruleLst>
+                        <dgm:rule type="primFontSz" val="5" fact="NaN" max="NaN"/>
+                      </dgm:ruleLst>
+                    </dgm:layoutNode>
+                    <dgm:layoutNode name="FourConn_3-4" styleLbl="fgAccFollowNode1">
+                      <dgm:varLst>
+                        <dgm:bulletEnabled val="1"/>
+                      </dgm:varLst>
+                      <dgm:alg type="tx"/>
+                      <dgm:shape xmlns:r="http://schemas.openxmlformats.org/officeDocument/2006/relationships" type="downArrow" r:blip="">
+                        <dgm:adjLst>
+                          <dgm:adj idx="1" val="0.55"/>
+                          <dgm:adj idx="2" val="0.45"/>
+                        </dgm:adjLst>
+                      </dgm:shape>
+                      <dgm:presOf axis="ch" ptType="sibTrans" st="3" cnt="1"/>
+                      <dgm:constrLst>
+                        <dgm:constr type="lMarg" refType="primFontSz" fact="0.1"/>
+                        <dgm:constr type="rMarg" refType="primFontSz" fact="0.1"/>
+                        <dgm:constr type="tMarg" refType="primFontSz" fact="0.1"/>
+                        <dgm:constr type="bMarg" refType="primFontSz" fact="0.1"/>
+                      </dgm:constrLst>
+                      <dgm:ruleLst>
+                        <dgm:rule type="primFontSz" val="5" fact="NaN" max="NaN"/>
+                      </dgm:ruleLst>
+                    </dgm:layoutNode>
+                    <dgm:layoutNode name="FourNodes_1_text">
+                      <dgm:varLst>
+                        <dgm:bulletEnabled val="1"/>
+                      </dgm:varLst>
+                      <dgm:alg type="tx">
+                        <dgm:param type="parTxLTRAlign" val="l"/>
+                        <dgm:param type="txAnchorVertCh" val="mid"/>
+                      </dgm:alg>
+                      <dgm:shape xmlns:r="http://schemas.openxmlformats.org/officeDocument/2006/relationships" type="roundRect" r:blip="" hideGeom="1">
+                        <dgm:adjLst>
+                          <dgm:adj idx="1" val="0.1"/>
+                        </dgm:adjLst>
+                      </dgm:shape>
+                      <dgm:presOf axis="ch desOrSelf" ptType="node node" st="1 1" cnt="1 0"/>
+                      <dgm:constrLst>
+                        <dgm:constr type="lMarg" refType="primFontSz" fact="0.3"/>
+                        <dgm:constr type="rMarg" refType="primFontSz" fact="0.3"/>
+                        <dgm:constr type="tMarg" refType="primFontSz" fact="0.3"/>
+                        <dgm:constr type="bMarg" refType="primFontSz" fact="0.3"/>
+                      </dgm:constrLst>
+                      <dgm:ruleLst>
+                        <dgm:rule type="primFontSz" val="5" fact="NaN" max="NaN"/>
+                      </dgm:ruleLst>
+                    </dgm:layoutNode>
+                    <dgm:layoutNode name="FourNodes_2_text">
+                      <dgm:varLst>
+                        <dgm:bulletEnabled val="1"/>
+                      </dgm:varLst>
+                      <dgm:alg type="tx">
+                        <dgm:param type="parTxLTRAlign" val="l"/>
+                        <dgm:param type="txAnchorVertCh" val="mid"/>
+                      </dgm:alg>
+                      <dgm:shape xmlns:r="http://schemas.openxmlformats.org/officeDocument/2006/relationships" type="roundRect" r:blip="" hideGeom="1">
+                        <dgm:adjLst>
+                          <dgm:adj idx="1" val="0.1"/>
+                        </dgm:adjLst>
+                      </dgm:shape>
+                      <dgm:presOf axis="ch desOrSelf" ptType="node node" st="2 1" cnt="1 0"/>
+                      <dgm:constrLst>
+                        <dgm:constr type="lMarg" refType="primFontSz" fact="0.3"/>
+                        <dgm:constr type="rMarg" refType="primFontSz" fact="0.3"/>
+                        <dgm:constr type="tMarg" refType="primFontSz" fact="0.3"/>
+                        <dgm:constr type="bMarg" refType="primFontSz" fact="0.3"/>
+                      </dgm:constrLst>
+                      <dgm:ruleLst>
+                        <dgm:rule type="primFontSz" val="5" fact="NaN" max="NaN"/>
+                      </dgm:ruleLst>
+                    </dgm:layoutNode>
+                    <dgm:layoutNode name="FourNodes_3_text">
+                      <dgm:varLst>
+                        <dgm:bulletEnabled val="1"/>
+                      </dgm:varLst>
+                      <dgm:alg type="tx">
+                        <dgm:param type="parTxLTRAlign" val="l"/>
+                        <dgm:param type="txAnchorVertCh" val="mid"/>
+                      </dgm:alg>
+                      <dgm:shape xmlns:r="http://schemas.openxmlformats.org/officeDocument/2006/relationships" type="roundRect" r:blip="" hideGeom="1">
+                        <dgm:adjLst>
+                          <dgm:adj idx="1" val="0.1"/>
+                        </dgm:adjLst>
+                      </dgm:shape>
+                      <dgm:presOf axis="ch desOrSelf" ptType="node node" st="3 1" cnt="1 0"/>
+                      <dgm:constrLst>
+                        <dgm:constr type="lMarg" refType="primFontSz" fact="0.3"/>
+                        <dgm:constr type="rMarg" refType="primFontSz" fact="0.3"/>
+                        <dgm:constr type="tMarg" refType="primFontSz" fact="0.3"/>
+                        <dgm:constr type="bMarg" refType="primFontSz" fact="0.3"/>
+                      </dgm:constrLst>
+                      <dgm:ruleLst>
+                        <dgm:rule type="primFontSz" val="5" fact="NaN" max="NaN"/>
+                      </dgm:ruleLst>
+                    </dgm:layoutNode>
+                    <dgm:layoutNode name="FourNodes_4_text">
+                      <dgm:varLst>
+                        <dgm:bulletEnabled val="1"/>
+                      </dgm:varLst>
+                      <dgm:alg type="tx">
+                        <dgm:param type="parTxLTRAlign" val="l"/>
+                        <dgm:param type="txAnchorVertCh" val="mid"/>
+                      </dgm:alg>
+                      <dgm:shape xmlns:r="http://schemas.openxmlformats.org/officeDocument/2006/relationships" type="roundRect" r:blip="" hideGeom="1">
+                        <dgm:adjLst>
+                          <dgm:adj idx="1" val="0.1"/>
+                        </dgm:adjLst>
+                      </dgm:shape>
+                      <dgm:presOf axis="ch desOrSelf" ptType="node node" st="4 1" cnt="1 0"/>
+                      <dgm:constrLst>
+                        <dgm:constr type="lMarg" refType="primFontSz" fact="0.3"/>
+                        <dgm:constr type="rMarg" refType="primFontSz" fact="0.3"/>
+                        <dgm:constr type="tMarg" refType="primFontSz" fact="0.3"/>
+                        <dgm:constr type="bMarg" refType="primFontSz" fact="0.3"/>
+                      </dgm:constrLst>
+                      <dgm:ruleLst>
+                        <dgm:rule type="primFontSz" val="5" fact="NaN" max="NaN"/>
+                      </dgm:ruleLst>
+                    </dgm:layoutNode>
+                  </dgm:if>
+                  <dgm:else name="Name14">
+                    <dgm:choose name="Name15">
+                      <dgm:if name="Name16" axis="ch" ptType="node" func="cnt" op="gte" val="5">
+                        <dgm:layoutNode name="FiveNodes_1">
+                          <dgm:varLst>
+                            <dgm:bulletEnabled val="1"/>
+                          </dgm:varLst>
+                          <dgm:alg type="sp"/>
+                          <dgm:shape xmlns:r="http://schemas.openxmlformats.org/officeDocument/2006/relationships" type="roundRect" r:blip="">
+                            <dgm:adjLst>
+                              <dgm:adj idx="1" val="0.1"/>
+                            </dgm:adjLst>
+                          </dgm:shape>
+                          <dgm:presOf axis="ch desOrSelf" ptType="node node" st="1 1" cnt="1 0"/>
+                          <dgm:constrLst/>
+                          <dgm:ruleLst/>
+                        </dgm:layoutNode>
+                        <dgm:layoutNode name="FiveNodes_2">
+                          <dgm:varLst>
+                            <dgm:bulletEnabled val="1"/>
+                          </dgm:varLst>
+                          <dgm:alg type="sp"/>
+                          <dgm:shape xmlns:r="http://schemas.openxmlformats.org/officeDocument/2006/relationships" type="roundRect" r:blip="">
+                            <dgm:adjLst>
+                              <dgm:adj idx="1" val="0.1"/>
+                            </dgm:adjLst>
+                          </dgm:shape>
+                          <dgm:presOf axis="ch desOrSelf" ptType="node node" st="2 1" cnt="1 0"/>
+                          <dgm:constrLst/>
+                          <dgm:ruleLst/>
+                        </dgm:layoutNode>
+                        <dgm:layoutNode name="FiveNodes_3">
+                          <dgm:varLst>
+                            <dgm:bulletEnabled val="1"/>
+                          </dgm:varLst>
+                          <dgm:alg type="sp"/>
+                          <dgm:shape xmlns:r="http://schemas.openxmlformats.org/officeDocument/2006/relationships" type="roundRect" r:blip="">
+                            <dgm:adjLst>
+                              <dgm:adj idx="1" val="0.1"/>
+                            </dgm:adjLst>
+                          </dgm:shape>
+                          <dgm:presOf axis="ch desOrSelf" ptType="node node" st="3 1" cnt="1 0"/>
+                          <dgm:constrLst/>
+                          <dgm:ruleLst/>
+                        </dgm:layoutNode>
+                        <dgm:layoutNode name="FiveNodes_4">
+                          <dgm:varLst>
+                            <dgm:bulletEnabled val="1"/>
+                          </dgm:varLst>
+                          <dgm:alg type="sp"/>
+                          <dgm:shape xmlns:r="http://schemas.openxmlformats.org/officeDocument/2006/relationships" type="roundRect" r:blip="">
+                            <dgm:adjLst>
+                              <dgm:adj idx="1" val="0.1"/>
+                            </dgm:adjLst>
+                          </dgm:shape>
+                          <dgm:presOf axis="ch desOrSelf" ptType="node node" st="4 1" cnt="1 0"/>
+                          <dgm:constrLst/>
+                          <dgm:ruleLst/>
+                        </dgm:layoutNode>
+                        <dgm:layoutNode name="FiveNodes_5">
+                          <dgm:varLst>
+                            <dgm:bulletEnabled val="1"/>
+                          </dgm:varLst>
+                          <dgm:alg type="sp"/>
+                          <dgm:shape xmlns:r="http://schemas.openxmlformats.org/officeDocument/2006/relationships" type="roundRect" r:blip="">
+                            <dgm:adjLst>
+                              <dgm:adj idx="1" val="0.1"/>
+                            </dgm:adjLst>
+                          </dgm:shape>
+                          <dgm:presOf axis="ch desOrSelf" ptType="node node" st="5 1" cnt="1 0"/>
+                          <dgm:constrLst/>
+                          <dgm:ruleLst/>
+                        </dgm:layoutNode>
+                        <dgm:layoutNode name="FiveConn_1-2" styleLbl="fgAccFollowNode1">
+                          <dgm:varLst>
+                            <dgm:bulletEnabled val="1"/>
+                          </dgm:varLst>
+                          <dgm:alg type="tx"/>
+                          <dgm:shape xmlns:r="http://schemas.openxmlformats.org/officeDocument/2006/relationships" type="downArrow" r:blip="">
+                            <dgm:adjLst>
+                              <dgm:adj idx="1" val="0.55"/>
+                              <dgm:adj idx="2" val="0.45"/>
+                            </dgm:adjLst>
+                          </dgm:shape>
+                          <dgm:presOf axis="ch" ptType="sibTrans" cnt="1"/>
+                          <dgm:constrLst>
+                            <dgm:constr type="lMarg" refType="primFontSz" fact="0.1"/>
+                            <dgm:constr type="rMarg" refType="primFontSz" fact="0.1"/>
+                            <dgm:constr type="tMarg" refType="primFontSz" fact="0.1"/>
+                            <dgm:constr type="bMarg" refType="primFontSz" fact="0.1"/>
+                          </dgm:constrLst>
+                          <dgm:ruleLst>
+                            <dgm:rule type="primFontSz" val="5" fact="NaN" max="NaN"/>
+                          </dgm:ruleLst>
+                        </dgm:layoutNode>
+                        <dgm:layoutNode name="FiveConn_2-3" styleLbl="fgAccFollowNode1">
+                          <dgm:varLst>
+                            <dgm:bulletEnabled val="1"/>
+                          </dgm:varLst>
+                          <dgm:alg type="tx"/>
+                          <dgm:shape xmlns:r="http://schemas.openxmlformats.org/officeDocument/2006/relationships" type="downArrow" r:blip="">
+                            <dgm:adjLst>
+                              <dgm:adj idx="1" val="0.55"/>
+                              <dgm:adj idx="2" val="0.45"/>
+                            </dgm:adjLst>
+                          </dgm:shape>
+                          <dgm:presOf axis="ch" ptType="sibTrans" st="2" cnt="1"/>
+                          <dgm:constrLst>
+                            <dgm:constr type="lMarg" refType="primFontSz" fact="0.1"/>
+                            <dgm:constr type="rMarg" refType="primFontSz" fact="0.1"/>
+                            <dgm:constr type="tMarg" refType="primFontSz" fact="0.1"/>
+                            <dgm:constr type="bMarg" refType="primFontSz" fact="0.1"/>
+                          </dgm:constrLst>
+                          <dgm:ruleLst>
+                            <dgm:rule type="primFontSz" val="5" fact="NaN" max="NaN"/>
+                          </dgm:ruleLst>
+                        </dgm:layoutNode>
+                        <dgm:layoutNode name="FiveConn_3-4" styleLbl="fgAccFollowNode1">
+                          <dgm:varLst>
+                            <dgm:bulletEnabled val="1"/>
+                          </dgm:varLst>
+                          <dgm:alg type="tx"/>
+                          <dgm:shape xmlns:r="http://schemas.openxmlformats.org/officeDocument/2006/relationships" type="downArrow" r:blip="">
+                            <dgm:adjLst>
+                              <dgm:adj idx="1" val="0.55"/>
+                              <dgm:adj idx="2" val="0.45"/>
+                            </dgm:adjLst>
+                          </dgm:shape>
+                          <dgm:presOf axis="ch" ptType="sibTrans" st="3" cnt="1"/>
+                          <dgm:constrLst>
+                            <dgm:constr type="lMarg" refType="primFontSz" fact="0.1"/>
+                            <dgm:constr type="rMarg" refType="primFontSz" fact="0.1"/>
+                            <dgm:constr type="tMarg" refType="primFontSz" fact="0.1"/>
+                            <dgm:constr type="bMarg" refType="primFontSz" fact="0.1"/>
+                          </dgm:constrLst>
+                          <dgm:ruleLst>
+                            <dgm:rule type="primFontSz" val="5" fact="NaN" max="NaN"/>
+                          </dgm:ruleLst>
+                        </dgm:layoutNode>
+                        <dgm:layoutNode name="FiveConn_4-5" styleLbl="fgAccFollowNode1">
+                          <dgm:varLst>
+                            <dgm:bulletEnabled val="1"/>
+                          </dgm:varLst>
+                          <dgm:alg type="tx"/>
+                          <dgm:shape xmlns:r="http://schemas.openxmlformats.org/officeDocument/2006/relationships" type="downArrow" r:blip="">
+                            <dgm:adjLst>
+                              <dgm:adj idx="1" val="0.55"/>
+                              <dgm:adj idx="2" val="0.45"/>
+                            </dgm:adjLst>
+                          </dgm:shape>
+                          <dgm:presOf axis="ch" ptType="sibTrans" st="4" cnt="1"/>
+                          <dgm:constrLst>
+                            <dgm:constr type="lMarg" refType="primFontSz" fact="0.1"/>
+                            <dgm:constr type="rMarg" refType="primFontSz" fact="0.1"/>
+                            <dgm:constr type="tMarg" refType="primFontSz" fact="0.1"/>
+                            <dgm:constr type="bMarg" refType="primFontSz" fact="0.1"/>
+                          </dgm:constrLst>
+                          <dgm:ruleLst>
+                            <dgm:rule type="primFontSz" val="5" fact="NaN" max="NaN"/>
+                          </dgm:ruleLst>
+                        </dgm:layoutNode>
+                        <dgm:layoutNode name="FiveNodes_1_text">
+                          <dgm:varLst>
+                            <dgm:bulletEnabled val="1"/>
+                          </dgm:varLst>
+                          <dgm:alg type="tx">
+                            <dgm:param type="parTxLTRAlign" val="l"/>
+                            <dgm:param type="txAnchorVertCh" val="mid"/>
+                          </dgm:alg>
+                          <dgm:shape xmlns:r="http://schemas.openxmlformats.org/officeDocument/2006/relationships" type="roundRect" r:blip="" hideGeom="1">
+                            <dgm:adjLst>
+                              <dgm:adj idx="1" val="0.1"/>
+                            </dgm:adjLst>
+                          </dgm:shape>
+                          <dgm:presOf axis="ch desOrSelf" ptType="node node" st="1 1" cnt="1 0"/>
+                          <dgm:constrLst>
+                            <dgm:constr type="lMarg" refType="primFontSz" fact="0.3"/>
+                            <dgm:constr type="rMarg" refType="primFontSz" fact="0.3"/>
+                            <dgm:constr type="tMarg" refType="primFontSz" fact="0.3"/>
+                            <dgm:constr type="bMarg" refType="primFontSz" fact="0.3"/>
+                          </dgm:constrLst>
+                          <dgm:ruleLst>
+                            <dgm:rule type="primFontSz" val="5" fact="NaN" max="NaN"/>
+                          </dgm:ruleLst>
+                        </dgm:layoutNode>
+                        <dgm:layoutNode name="FiveNodes_2_text">
+                          <dgm:varLst>
+                            <dgm:bulletEnabled val="1"/>
+                          </dgm:varLst>
+                          <dgm:alg type="tx">
+                            <dgm:param type="parTxLTRAlign" val="l"/>
+                            <dgm:param type="txAnchorVertCh" val="mid"/>
+                          </dgm:alg>
+                          <dgm:shape xmlns:r="http://schemas.openxmlformats.org/officeDocument/2006/relationships" type="roundRect" r:blip="" hideGeom="1">
+                            <dgm:adjLst>
+                              <dgm:adj idx="1" val="0.1"/>
+                            </dgm:adjLst>
+                          </dgm:shape>
+                          <dgm:presOf axis="ch desOrSelf" ptType="node node" st="2 1" cnt="1 0"/>
+                          <dgm:constrLst>
+                            <dgm:constr type="lMarg" refType="primFontSz" fact="0.3"/>
+                            <dgm:constr type="rMarg" refType="primFontSz" fact="0.3"/>
+                            <dgm:constr type="tMarg" refType="primFontSz" fact="0.3"/>
+                            <dgm:constr type="bMarg" refType="primFontSz" fact="0.3"/>
+                          </dgm:constrLst>
+                          <dgm:ruleLst>
+                            <dgm:rule type="primFontSz" val="5" fact="NaN" max="NaN"/>
+                          </dgm:ruleLst>
+                        </dgm:layoutNode>
+                        <dgm:layoutNode name="FiveNodes_3_text">
+                          <dgm:varLst>
+                            <dgm:bulletEnabled val="1"/>
+                          </dgm:varLst>
+                          <dgm:alg type="tx">
+                            <dgm:param type="parTxLTRAlign" val="l"/>
+                            <dgm:param type="txAnchorVertCh" val="mid"/>
+                          </dgm:alg>
+                          <dgm:shape xmlns:r="http://schemas.openxmlformats.org/officeDocument/2006/relationships" type="roundRect" r:blip="" hideGeom="1">
+                            <dgm:adjLst>
+                              <dgm:adj idx="1" val="0.1"/>
+                            </dgm:adjLst>
+                          </dgm:shape>
+                          <dgm:presOf axis="ch desOrSelf" ptType="node node" st="3 1" cnt="1 0"/>
+                          <dgm:constrLst>
+                            <dgm:constr type="lMarg" refType="primFontSz" fact="0.3"/>
+                            <dgm:constr type="rMarg" refType="primFontSz" fact="0.3"/>
+                            <dgm:constr type="tMarg" refType="primFontSz" fact="0.3"/>
+                            <dgm:constr type="bMarg" refType="primFontSz" fact="0.3"/>
+                          </dgm:constrLst>
+                          <dgm:ruleLst>
+                            <dgm:rule type="primFontSz" val="5" fact="NaN" max="NaN"/>
+                          </dgm:ruleLst>
+                        </dgm:layoutNode>
+                        <dgm:layoutNode name="FiveNodes_4_text">
+                          <dgm:varLst>
+                            <dgm:bulletEnabled val="1"/>
+                          </dgm:varLst>
+                          <dgm:alg type="tx">
+                            <dgm:param type="parTxLTRAlign" val="l"/>
+                            <dgm:param type="txAnchorVertCh" val="mid"/>
+                          </dgm:alg>
+                          <dgm:shape xmlns:r="http://schemas.openxmlformats.org/officeDocument/2006/relationships" type="roundRect" r:blip="" hideGeom="1">
+                            <dgm:adjLst>
+                              <dgm:adj idx="1" val="0.1"/>
+                            </dgm:adjLst>
+                          </dgm:shape>
+                          <dgm:presOf axis="ch desOrSelf" ptType="node node" st="4 1" cnt="1 0"/>
+                          <dgm:constrLst>
+                            <dgm:constr type="lMarg" refType="primFontSz" fact="0.3"/>
+                            <dgm:constr type="rMarg" refType="primFontSz" fact="0.3"/>
+                            <dgm:constr type="tMarg" refType="primFontSz" fact="0.3"/>
+                            <dgm:constr type="bMarg" refType="primFontSz" fact="0.3"/>
+                          </dgm:constrLst>
+                          <dgm:ruleLst>
+                            <dgm:rule type="primFontSz" val="5" fact="NaN" max="NaN"/>
+                          </dgm:ruleLst>
+                        </dgm:layoutNode>
+                        <dgm:layoutNode name="FiveNodes_5_text">
+                          <dgm:varLst>
+                            <dgm:bulletEnabled val="1"/>
+                          </dgm:varLst>
+                          <dgm:alg type="tx">
+                            <dgm:param type="parTxLTRAlign" val="l"/>
+                            <dgm:param type="txAnchorVertCh" val="mid"/>
+                          </dgm:alg>
+                          <dgm:shape xmlns:r="http://schemas.openxmlformats.org/officeDocument/2006/relationships" type="roundRect" r:blip="" hideGeom="1">
+                            <dgm:adjLst>
+                              <dgm:adj idx="1" val="0.1"/>
+                            </dgm:adjLst>
+                          </dgm:shape>
+                          <dgm:presOf axis="ch desOrSelf" ptType="node node" st="5 1" cnt="1 0"/>
+                          <dgm:constrLst>
+                            <dgm:constr type="lMarg" refType="primFontSz" fact="0.3"/>
+                            <dgm:constr type="rMarg" refType="primFontSz" fact="0.3"/>
+                            <dgm:constr type="tMarg" refType="primFontSz" fact="0.3"/>
+                            <dgm:constr type="bMarg" refType="primFontSz" fact="0.3"/>
+                          </dgm:constrLst>
+                          <dgm:ruleLst>
+                            <dgm:rule type="primFontSz" val="5" fact="NaN" max="NaN"/>
+                          </dgm:ruleLst>
+                        </dgm:layoutNode>
+                      </dgm:if>
+                      <dgm:else name="Name17"/>
+                    </dgm:choose>
+                  </dgm:else>
+                </dgm:choose>
+              </dgm:else>
+            </dgm:choose>
+          </dgm:else>
+        </dgm:choose>
+      </dgm:else>
+    </dgm:choose>
+  </dgm:layoutNode>
+</dgm:layoutDef>
+</file>
+
 <file path=ppt/diagrams/layout5.xml><?xml version="1.0" encoding="utf-8"?>
 <dgm:layoutDef xmlns:dgm="http://schemas.openxmlformats.org/drawingml/2006/diagram" xmlns:a="http://schemas.openxmlformats.org/drawingml/2006/main" uniqueId="urn:microsoft.com/office/officeart/2016/7/layout/RepeatingBendingProcessNew">
   <dgm:title val="Repeating Bending Process New"/>
@@ -24777,7 +24782,7 @@
           <a:p>
             <a:fld id="{4256FC9E-4BE0-4F73-8E12-5256D0BCC4D9}" type="datetimeFigureOut">
               <a:rPr lang="en-US" smtClean="0"/>
-              <a:t>19-Apr-26</a:t>
+              <a:t>21-Apr-26</a:t>
             </a:fld>
             <a:endParaRPr lang="en-US"/>
           </a:p>
@@ -24975,7 +24980,7 @@
           <a:p>
             <a:fld id="{4256FC9E-4BE0-4F73-8E12-5256D0BCC4D9}" type="datetimeFigureOut">
               <a:rPr lang="en-US" smtClean="0"/>
-              <a:t>19-Apr-26</a:t>
+              <a:t>21-Apr-26</a:t>
             </a:fld>
             <a:endParaRPr lang="en-US"/>
           </a:p>
@@ -25183,7 +25188,7 @@
           <a:p>
             <a:fld id="{4256FC9E-4BE0-4F73-8E12-5256D0BCC4D9}" type="datetimeFigureOut">
               <a:rPr lang="en-US" smtClean="0"/>
-              <a:t>19-Apr-26</a:t>
+              <a:t>21-Apr-26</a:t>
             </a:fld>
             <a:endParaRPr lang="en-US"/>
           </a:p>
@@ -25381,7 +25386,7 @@
           <a:p>
             <a:fld id="{4256FC9E-4BE0-4F73-8E12-5256D0BCC4D9}" type="datetimeFigureOut">
               <a:rPr lang="en-US" smtClean="0"/>
-              <a:t>19-Apr-26</a:t>
+              <a:t>21-Apr-26</a:t>
             </a:fld>
             <a:endParaRPr lang="en-US"/>
           </a:p>
@@ -25656,7 +25661,7 @@
           <a:p>
             <a:fld id="{4256FC9E-4BE0-4F73-8E12-5256D0BCC4D9}" type="datetimeFigureOut">
               <a:rPr lang="en-US" smtClean="0"/>
-              <a:t>19-Apr-26</a:t>
+              <a:t>21-Apr-26</a:t>
             </a:fld>
             <a:endParaRPr lang="en-US"/>
           </a:p>
@@ -25921,7 +25926,7 @@
           <a:p>
             <a:fld id="{4256FC9E-4BE0-4F73-8E12-5256D0BCC4D9}" type="datetimeFigureOut">
               <a:rPr lang="en-US" smtClean="0"/>
-              <a:t>19-Apr-26</a:t>
+              <a:t>21-Apr-26</a:t>
             </a:fld>
             <a:endParaRPr lang="en-US"/>
           </a:p>
@@ -26333,7 +26338,7 @@
           <a:p>
             <a:fld id="{4256FC9E-4BE0-4F73-8E12-5256D0BCC4D9}" type="datetimeFigureOut">
               <a:rPr lang="en-US" smtClean="0"/>
-              <a:t>19-Apr-26</a:t>
+              <a:t>21-Apr-26</a:t>
             </a:fld>
             <a:endParaRPr lang="en-US"/>
           </a:p>
@@ -26474,7 +26479,7 @@
           <a:p>
             <a:fld id="{4256FC9E-4BE0-4F73-8E12-5256D0BCC4D9}" type="datetimeFigureOut">
               <a:rPr lang="en-US" smtClean="0"/>
-              <a:t>19-Apr-26</a:t>
+              <a:t>21-Apr-26</a:t>
             </a:fld>
             <a:endParaRPr lang="en-US"/>
           </a:p>
@@ -26587,7 +26592,7 @@
           <a:p>
             <a:fld id="{4256FC9E-4BE0-4F73-8E12-5256D0BCC4D9}" type="datetimeFigureOut">
               <a:rPr lang="en-US" smtClean="0"/>
-              <a:t>19-Apr-26</a:t>
+              <a:t>21-Apr-26</a:t>
             </a:fld>
             <a:endParaRPr lang="en-US"/>
           </a:p>
@@ -26898,7 +26903,7 @@
           <a:p>
             <a:fld id="{4256FC9E-4BE0-4F73-8E12-5256D0BCC4D9}" type="datetimeFigureOut">
               <a:rPr lang="en-US" smtClean="0"/>
-              <a:t>19-Apr-26</a:t>
+              <a:t>21-Apr-26</a:t>
             </a:fld>
             <a:endParaRPr lang="en-US"/>
           </a:p>
@@ -27186,7 +27191,7 @@
           <a:p>
             <a:fld id="{4256FC9E-4BE0-4F73-8E12-5256D0BCC4D9}" type="datetimeFigureOut">
               <a:rPr lang="en-US" smtClean="0"/>
-              <a:t>19-Apr-26</a:t>
+              <a:t>21-Apr-26</a:t>
             </a:fld>
             <a:endParaRPr lang="en-US"/>
           </a:p>
@@ -27427,7 +27432,7 @@
           <a:p>
             <a:fld id="{4256FC9E-4BE0-4F73-8E12-5256D0BCC4D9}" type="datetimeFigureOut">
               <a:rPr lang="en-US" smtClean="0"/>
-              <a:t>19-Apr-26</a:t>
+              <a:t>21-Apr-26</a:t>
             </a:fld>
             <a:endParaRPr lang="en-US"/>
           </a:p>
@@ -28098,13 +28103,27 @@
               <a:rPr lang="en-US" sz="2000" b="1" dirty="0">
                 <a:effectLst/>
               </a:rPr>
-              <a:t>echnological university </a:t>
+              <a:t>echnological </a:t>
             </a:r>
             <a:r>
-              <a:rPr lang="en-US" sz="2000" b="1" dirty="0" err="1">
+              <a:rPr lang="en-US" sz="2000" b="1" dirty="0"/>
+              <a:t>U</a:t>
+            </a:r>
+            <a:r>
+              <a:rPr lang="en-US" sz="2000" b="1" dirty="0">
                 <a:effectLst/>
               </a:rPr>
-              <a:t>dublin</a:t>
+              <a:t>niversity </a:t>
+            </a:r>
+            <a:r>
+              <a:rPr lang="en-US" sz="2000" b="1" dirty="0"/>
+              <a:t>D</a:t>
+            </a:r>
+            <a:r>
+              <a:rPr lang="en-US" sz="2000" b="1" dirty="0">
+                <a:effectLst/>
+              </a:rPr>
+              <a:t>ublin</a:t>
             </a:r>
             <a:r>
               <a:rPr lang="en-US" sz="2000" dirty="0">
@@ -29749,6 +29768,95 @@
 <file path=ppt/slides/slide4.xml><?xml version="1.0" encoding="utf-8"?>
 <p:sld xmlns:a="http://schemas.openxmlformats.org/drawingml/2006/main" xmlns:r="http://schemas.openxmlformats.org/officeDocument/2006/relationships" xmlns:p="http://schemas.openxmlformats.org/presentationml/2006/main">
   <p:cSld>
+    <p:spTree>
+      <p:nvGrpSpPr>
+        <p:cNvPr id="1" name=""/>
+        <p:cNvGrpSpPr/>
+        <p:nvPr/>
+      </p:nvGrpSpPr>
+      <p:grpSpPr>
+        <a:xfrm>
+          <a:off x="0" y="0"/>
+          <a:ext cx="0" cy="0"/>
+          <a:chOff x="0" y="0"/>
+          <a:chExt cx="0" cy="0"/>
+        </a:xfrm>
+      </p:grpSpPr>
+      <p:sp>
+        <p:nvSpPr>
+          <p:cNvPr id="2" name="Title 1">
+            <a:extLst>
+              <a:ext uri="{FF2B5EF4-FFF2-40B4-BE49-F238E27FC236}">
+                <a16:creationId xmlns:a16="http://schemas.microsoft.com/office/drawing/2014/main" id="{84880997-2773-5FB2-2899-55A8E67A08E5}"/>
+              </a:ext>
+            </a:extLst>
+          </p:cNvPr>
+          <p:cNvSpPr>
+            <a:spLocks noGrp="1"/>
+          </p:cNvSpPr>
+          <p:nvPr>
+            <p:ph type="title"/>
+          </p:nvPr>
+        </p:nvSpPr>
+        <p:spPr/>
+        <p:txBody>
+          <a:bodyPr/>
+          <a:lstStyle/>
+          <a:p>
+            <a:r>
+              <a:rPr lang="en-US" dirty="0"/>
+              <a:t>Hotkey brain</a:t>
+            </a:r>
+          </a:p>
+        </p:txBody>
+      </p:sp>
+      <p:graphicFrame>
+        <p:nvGraphicFramePr>
+          <p:cNvPr id="5" name="Content Placeholder 2">
+            <a:extLst>
+              <a:ext uri="{FF2B5EF4-FFF2-40B4-BE49-F238E27FC236}">
+                <a16:creationId xmlns:a16="http://schemas.microsoft.com/office/drawing/2014/main" id="{74514848-3779-62F1-3EDF-A4DA430CC267}"/>
+              </a:ext>
+            </a:extLst>
+          </p:cNvPr>
+          <p:cNvGraphicFramePr>
+            <a:graphicFrameLocks noGrp="1"/>
+          </p:cNvGraphicFramePr>
+          <p:nvPr>
+            <p:ph idx="1"/>
+            <p:extLst>
+              <p:ext uri="{D42A27DB-BD31-4B8C-83A1-F6EECF244321}">
+                <p14:modId xmlns:p14="http://schemas.microsoft.com/office/powerpoint/2010/main" val="2423406210"/>
+              </p:ext>
+            </p:extLst>
+          </p:nvPr>
+        </p:nvGraphicFramePr>
+        <p:xfrm>
+          <a:off x="838200" y="1825625"/>
+          <a:ext cx="10515600" cy="4351338"/>
+        </p:xfrm>
+        <a:graphic>
+          <a:graphicData uri="http://schemas.openxmlformats.org/drawingml/2006/diagram">
+            <dgm:relIds xmlns:dgm="http://schemas.openxmlformats.org/drawingml/2006/diagram" xmlns:r="http://schemas.openxmlformats.org/officeDocument/2006/relationships" r:dm="rId2" r:lo="rId3" r:qs="rId4" r:cs="rId5"/>
+          </a:graphicData>
+        </a:graphic>
+      </p:graphicFrame>
+    </p:spTree>
+    <p:extLst>
+      <p:ext uri="{BB962C8B-B14F-4D97-AF65-F5344CB8AC3E}">
+        <p14:creationId xmlns:p14="http://schemas.microsoft.com/office/powerpoint/2010/main" val="464808837"/>
+      </p:ext>
+    </p:extLst>
+  </p:cSld>
+  <p:clrMapOvr>
+    <a:masterClrMapping/>
+  </p:clrMapOvr>
+</p:sld>
+</file>
+
+<file path=ppt/slides/slide5.xml><?xml version="1.0" encoding="utf-8"?>
+<p:sld xmlns:a="http://schemas.openxmlformats.org/drawingml/2006/main" xmlns:r="http://schemas.openxmlformats.org/officeDocument/2006/relationships" xmlns:p="http://schemas.openxmlformats.org/presentationml/2006/main">
+  <p:cSld>
     <p:bg>
       <p:bgPr>
         <a:solidFill>
@@ -29934,95 +30042,6 @@
     <p:extLst>
       <p:ext uri="{BB962C8B-B14F-4D97-AF65-F5344CB8AC3E}">
         <p14:creationId xmlns:p14="http://schemas.microsoft.com/office/powerpoint/2010/main" val="1328659631"/>
-      </p:ext>
-    </p:extLst>
-  </p:cSld>
-  <p:clrMapOvr>
-    <a:masterClrMapping/>
-  </p:clrMapOvr>
-</p:sld>
-</file>
-
-<file path=ppt/slides/slide5.xml><?xml version="1.0" encoding="utf-8"?>
-<p:sld xmlns:a="http://schemas.openxmlformats.org/drawingml/2006/main" xmlns:r="http://schemas.openxmlformats.org/officeDocument/2006/relationships" xmlns:p="http://schemas.openxmlformats.org/presentationml/2006/main">
-  <p:cSld>
-    <p:spTree>
-      <p:nvGrpSpPr>
-        <p:cNvPr id="1" name=""/>
-        <p:cNvGrpSpPr/>
-        <p:nvPr/>
-      </p:nvGrpSpPr>
-      <p:grpSpPr>
-        <a:xfrm>
-          <a:off x="0" y="0"/>
-          <a:ext cx="0" cy="0"/>
-          <a:chOff x="0" y="0"/>
-          <a:chExt cx="0" cy="0"/>
-        </a:xfrm>
-      </p:grpSpPr>
-      <p:sp>
-        <p:nvSpPr>
-          <p:cNvPr id="2" name="Title 1">
-            <a:extLst>
-              <a:ext uri="{FF2B5EF4-FFF2-40B4-BE49-F238E27FC236}">
-                <a16:creationId xmlns:a16="http://schemas.microsoft.com/office/drawing/2014/main" id="{84880997-2773-5FB2-2899-55A8E67A08E5}"/>
-              </a:ext>
-            </a:extLst>
-          </p:cNvPr>
-          <p:cNvSpPr>
-            <a:spLocks noGrp="1"/>
-          </p:cNvSpPr>
-          <p:nvPr>
-            <p:ph type="title"/>
-          </p:nvPr>
-        </p:nvSpPr>
-        <p:spPr/>
-        <p:txBody>
-          <a:bodyPr/>
-          <a:lstStyle/>
-          <a:p>
-            <a:r>
-              <a:rPr lang="en-US" dirty="0"/>
-              <a:t>Hotkey brain</a:t>
-            </a:r>
-          </a:p>
-        </p:txBody>
-      </p:sp>
-      <p:graphicFrame>
-        <p:nvGraphicFramePr>
-          <p:cNvPr id="5" name="Content Placeholder 2">
-            <a:extLst>
-              <a:ext uri="{FF2B5EF4-FFF2-40B4-BE49-F238E27FC236}">
-                <a16:creationId xmlns:a16="http://schemas.microsoft.com/office/drawing/2014/main" id="{74514848-3779-62F1-3EDF-A4DA430CC267}"/>
-              </a:ext>
-            </a:extLst>
-          </p:cNvPr>
-          <p:cNvGraphicFramePr>
-            <a:graphicFrameLocks noGrp="1"/>
-          </p:cNvGraphicFramePr>
-          <p:nvPr>
-            <p:ph idx="1"/>
-            <p:extLst>
-              <p:ext uri="{D42A27DB-BD31-4B8C-83A1-F6EECF244321}">
-                <p14:modId xmlns:p14="http://schemas.microsoft.com/office/powerpoint/2010/main" val="2423406210"/>
-              </p:ext>
-            </p:extLst>
-          </p:nvPr>
-        </p:nvGraphicFramePr>
-        <p:xfrm>
-          <a:off x="838200" y="1825625"/>
-          <a:ext cx="10515600" cy="4351338"/>
-        </p:xfrm>
-        <a:graphic>
-          <a:graphicData uri="http://schemas.openxmlformats.org/drawingml/2006/diagram">
-            <dgm:relIds xmlns:dgm="http://schemas.openxmlformats.org/drawingml/2006/diagram" xmlns:r="http://schemas.openxmlformats.org/officeDocument/2006/relationships" r:dm="rId2" r:lo="rId3" r:qs="rId4" r:cs="rId5"/>
-          </a:graphicData>
-        </a:graphic>
-      </p:graphicFrame>
-    </p:spTree>
-    <p:extLst>
-      <p:ext uri="{BB962C8B-B14F-4D97-AF65-F5344CB8AC3E}">
-        <p14:creationId xmlns:p14="http://schemas.microsoft.com/office/powerpoint/2010/main" val="464808837"/>
       </p:ext>
     </p:extLst>
   </p:cSld>
